--- a/docs/compliance-radar-deck.pptx
+++ b/docs/compliance-radar-deck.pptx
@@ -17,9 +17,6 @@
     <p:sldId id="265" r:id="rId16"/>
     <p:sldId id="266" r:id="rId17"/>
     <p:sldId id="267" r:id="rId18"/>
-    <p:sldId id="268" r:id="rId19"/>
-    <p:sldId id="269" r:id="rId20"/>
-    <p:sldId id="270" r:id="rId21"/>
   </p:sldIdLst>
   <p:sldSz cx="12191695" cy="6858000" type="screen4x3"/>
   <p:notesSz cx="6858000" cy="9144000"/>
@@ -3164,7 +3161,7 @@
         </p:nvSpPr>
         <p:spPr>
           <a:xfrm>
-            <a:off x="1005840" y="1920240"/>
+            <a:off x="1005840" y="2194560"/>
             <a:ext cx="10058400" cy="365760"/>
           </a:xfrm>
           <a:prstGeom prst="rect">
@@ -3193,7 +3190,7 @@
                 </a:solidFill>
                 <a:latin typeface="Arial"/>
               </a:rPr>
-              <a:t>SKY INNOVATION PROJECT  ·  AUTOMATE TRACK</a:t>
+              <a:t>SKY INNOVATION  ·  AUTOMATE TRACK</a:t>
             </a:r>
           </a:p>
         </p:txBody>
@@ -3206,7 +3203,7 @@
         </p:nvSpPr>
         <p:spPr>
           <a:xfrm>
-            <a:off x="1005840" y="2377440"/>
+            <a:off x="1005840" y="2651760"/>
             <a:ext cx="10058400" cy="1005840"/>
           </a:xfrm>
           <a:prstGeom prst="rect">
@@ -3248,8 +3245,8 @@
         </p:nvSpPr>
         <p:spPr>
           <a:xfrm>
-            <a:off x="1005840" y="3520440"/>
-            <a:ext cx="9601200" cy="457200"/>
+            <a:off x="1005840" y="3794760"/>
+            <a:ext cx="10058400" cy="457200"/>
           </a:xfrm>
           <a:prstGeom prst="rect">
             <a:avLst/>
@@ -3271,13 +3268,13 @@
               </a:spcAft>
             </a:pPr>
             <a:r>
-              <a:rPr sz="2000" b="0">
+              <a:rPr sz="2200" b="0">
                 <a:solidFill>
                   <a:srgbClr val="475569"/>
                 </a:solidFill>
                 <a:latin typeface="Arial"/>
               </a:rPr>
-              <a:t>Sky Transport Solutions is paid to remember 18,000 carriers' deadlines.</a:t>
+              <a:t>Deadlines nobody sends you, and the ones hiding behind them.</a:t>
             </a:r>
           </a:p>
         </p:txBody>
@@ -3290,91 +3287,7 @@
         </p:nvSpPr>
         <p:spPr>
           <a:xfrm>
-            <a:off x="1005840" y="3913632"/>
-            <a:ext cx="9601200" cy="457200"/>
-          </a:xfrm>
-          <a:prstGeom prst="rect">
-            <a:avLst/>
-          </a:prstGeom>
-          <a:noFill/>
-        </p:spPr>
-        <p:txBody>
-          <a:bodyPr wrap="square" lIns="0" rIns="0" tIns="0" bIns="0">
-            <a:spAutoFit/>
-          </a:bodyPr>
-          <a:lstStyle/>
-          <a:p>
-            <a:pPr algn="l">
-              <a:lnSpc>
-                <a:spcPct val="115000"/>
-              </a:lnSpc>
-              <a:spcAft>
-                <a:spcPts val="600"/>
-              </a:spcAft>
-            </a:pPr>
-            <a:r>
-              <a:rPr sz="2000" b="0">
-                <a:solidFill>
-                  <a:srgbClr val="475569"/>
-                </a:solidFill>
-                <a:latin typeface="Arial"/>
-              </a:rPr>
-              <a:t>This derives every one of them from the regulations, models what blocks what,</a:t>
-            </a:r>
-          </a:p>
-        </p:txBody>
-      </p:sp>
-      <p:sp>
-        <p:nvSpPr>
-          <p:cNvPr id="7" name="TextBox 6"/>
-          <p:cNvSpPr txBox="1"/>
-          <p:nvPr/>
-        </p:nvSpPr>
-        <p:spPr>
-          <a:xfrm>
-            <a:off x="1005840" y="4306824"/>
-            <a:ext cx="9601200" cy="457200"/>
-          </a:xfrm>
-          <a:prstGeom prst="rect">
-            <a:avLst/>
-          </a:prstGeom>
-          <a:noFill/>
-        </p:spPr>
-        <p:txBody>
-          <a:bodyPr wrap="square" lIns="0" rIns="0" tIns="0" bIns="0">
-            <a:spAutoFit/>
-          </a:bodyPr>
-          <a:lstStyle/>
-          <a:p>
-            <a:pPr algn="l">
-              <a:lnSpc>
-                <a:spcPct val="115000"/>
-              </a:lnSpc>
-              <a:spcAft>
-                <a:spcPts val="600"/>
-              </a:spcAft>
-            </a:pPr>
-            <a:r>
-              <a:rPr sz="2000" b="0">
-                <a:solidFill>
-                  <a:srgbClr val="475569"/>
-                </a:solidFill>
-                <a:latin typeface="Arial"/>
-              </a:rPr>
-              <a:t>and surfaces the date each truck stops being legal.</a:t>
-            </a:r>
-          </a:p>
-        </p:txBody>
-      </p:sp>
-      <p:sp>
-        <p:nvSpPr>
-          <p:cNvPr id="8" name="TextBox 7"/>
-          <p:cNvSpPr txBox="1"/>
-          <p:nvPr/>
-        </p:nvSpPr>
-        <p:spPr>
-          <a:xfrm>
-            <a:off x="1005840" y="5303520"/>
+            <a:off x="1005840" y="5029200"/>
             <a:ext cx="5486400" cy="365760"/>
           </a:xfrm>
           <a:prstGeom prst="rect">
@@ -3517,7 +3430,7 @@
                 </a:solidFill>
                 <a:latin typeface="Arial"/>
               </a:rPr>
-              <a:t>FEATURE — CLIENT EXPERIENCE</a:t>
+              <a:t>WHAT HAPPENED</a:t>
             </a:r>
           </a:p>
         </p:txBody>
@@ -3559,7 +3472,7 @@
                 </a:solidFill>
                 <a:latin typeface="Arial"/>
               </a:rPr>
-              <a:t>Three audiences, three surfaces, one rules engine.</a:t>
+              <a:t>The tests caught two real bugs.</a:t>
             </a:r>
           </a:p>
         </p:txBody>
@@ -3572,8 +3485,8 @@
         </p:nvSpPr>
         <p:spPr>
           <a:xfrm>
-            <a:off x="777240" y="1783080"/>
-            <a:ext cx="3337560" cy="3566160"/>
+            <a:off x="777240" y="1920240"/>
+            <a:ext cx="5166360" cy="2834640"/>
           </a:xfrm>
           <a:prstGeom prst="roundRect">
             <a:avLst>
@@ -3620,8 +3533,8 @@
         </p:nvSpPr>
         <p:spPr>
           <a:xfrm>
-            <a:off x="777240" y="1783080"/>
-            <a:ext cx="3337560" cy="73152"/>
+            <a:off x="777240" y="1920240"/>
+            <a:ext cx="5166360" cy="73152"/>
           </a:xfrm>
           <a:prstGeom prst="roundRect">
             <a:avLst>
@@ -3629,7 +3542,7 @@
             </a:avLst>
           </a:prstGeom>
           <a:solidFill>
-            <a:srgbClr val="1E3A8A"/>
+            <a:srgbClr val="B91C1C"/>
           </a:solidFill>
           <a:ln>
             <a:noFill/>
@@ -3666,8 +3579,8 @@
         </p:nvSpPr>
         <p:spPr>
           <a:xfrm>
-            <a:off x="1051560" y="2103120"/>
-            <a:ext cx="2788920" cy="365760"/>
+            <a:off x="1051560" y="2240280"/>
+            <a:ext cx="4617720" cy="365760"/>
           </a:xfrm>
           <a:prstGeom prst="rect">
             <a:avLst/>
@@ -3689,13 +3602,13 @@
               </a:spcAft>
             </a:pPr>
             <a:r>
-              <a:rPr sz="1900" b="1">
+              <a:rPr sz="1700" b="1">
                 <a:solidFill>
                   <a:srgbClr val="0F172A"/>
                 </a:solidFill>
                 <a:latin typeface="Arial"/>
               </a:rPr>
-              <a:t>Public</a:t>
+              <a:t>Valid PDFs were rejected</a:t>
             </a:r>
           </a:p>
         </p:txBody>
@@ -3708,8 +3621,8 @@
         </p:nvSpPr>
         <p:spPr>
           <a:xfrm>
-            <a:off x="1051560" y="2514600"/>
-            <a:ext cx="2788920" cy="320040"/>
+            <a:off x="1051560" y="2743200"/>
+            <a:ext cx="4617720" cy="1828800"/>
           </a:xfrm>
           <a:prstGeom prst="rect">
             <a:avLst/>
@@ -3731,69 +3644,28 @@
               </a:spcAft>
             </a:pPr>
             <a:r>
-              <a:rPr sz="1200" b="0">
-                <a:solidFill>
-                  <a:srgbClr val="94A3B8"/>
-                </a:solidFill>
-                <a:latin typeface="Arial"/>
-              </a:rPr>
-              <a:t>/start</a:t>
-            </a:r>
-          </a:p>
-        </p:txBody>
-      </p:sp>
-      <p:sp>
-        <p:nvSpPr>
-          <p:cNvPr id="9" name="TextBox 8"/>
-          <p:cNvSpPr txBox="1"/>
-          <p:nvPr/>
-        </p:nvSpPr>
-        <p:spPr>
-          <a:xfrm>
-            <a:off x="1051560" y="2926080"/>
-            <a:ext cx="2788920" cy="2194560"/>
-          </a:xfrm>
-          <a:prstGeom prst="rect">
-            <a:avLst/>
-          </a:prstGeom>
-          <a:noFill/>
-        </p:spPr>
-        <p:txBody>
-          <a:bodyPr wrap="square" lIns="0" rIns="0" tIns="0" bIns="0">
-            <a:spAutoFit/>
-          </a:bodyPr>
-          <a:lstStyle/>
-          <a:p>
-            <a:pPr algn="l">
-              <a:lnSpc>
-                <a:spcPct val="115000"/>
-              </a:lnSpc>
-              <a:spcAft>
-                <a:spcPts val="600"/>
-              </a:spcAft>
-            </a:pPr>
-            <a:r>
-              <a:rPr sz="1300" b="0">
+              <a:rPr sz="1400" b="0">
                 <a:solidFill>
                   <a:srgbClr val="475569"/>
                 </a:solidFill>
                 <a:latin typeface="Arial"/>
               </a:rPr>
-              <a:t>A prospect who isn't a customer yet. Six questions, and the requirement list updates live — answering "intrastate only" drops 10 requirements to 5 and the price from $1,200 to $975.</a:t>
-            </a:r>
-          </a:p>
-        </p:txBody>
-      </p:sp>
-      <p:sp>
-        <p:nvSpPr>
-          <p:cNvPr id="10" name="Rounded Rectangle 9"/>
+              <a:t>I trusted the browser's file type. It's guessed from the extension, so a file without one reported nothing.
+Now the server reads the first few bytes instead.</a:t>
+            </a:r>
+          </a:p>
+        </p:txBody>
+      </p:sp>
+      <p:sp>
+        <p:nvSpPr>
+          <p:cNvPr id="9" name="Rounded Rectangle 8"/>
           <p:cNvSpPr/>
           <p:nvPr/>
         </p:nvSpPr>
         <p:spPr>
           <a:xfrm>
-            <a:off x="4343400" y="1783080"/>
-            <a:ext cx="3337560" cy="3566160"/>
+            <a:off x="6217920" y="1920240"/>
+            <a:ext cx="5166360" cy="2834640"/>
           </a:xfrm>
           <a:prstGeom prst="roundRect">
             <a:avLst>
@@ -3834,14 +3706,14 @@
       </p:sp>
       <p:sp>
         <p:nvSpPr>
-          <p:cNvPr id="11" name="Rounded Rectangle 10"/>
+          <p:cNvPr id="10" name="Rounded Rectangle 9"/>
           <p:cNvSpPr/>
           <p:nvPr/>
         </p:nvSpPr>
         <p:spPr>
           <a:xfrm>
-            <a:off x="4343400" y="1783080"/>
-            <a:ext cx="3337560" cy="73152"/>
+            <a:off x="6217920" y="1920240"/>
+            <a:ext cx="5166360" cy="73152"/>
           </a:xfrm>
           <a:prstGeom prst="roundRect">
             <a:avLst>
@@ -3849,7 +3721,7 @@
             </a:avLst>
           </a:prstGeom>
           <a:solidFill>
-            <a:srgbClr val="15803D"/>
+            <a:srgbClr val="B91C1C"/>
           </a:solidFill>
           <a:ln>
             <a:noFill/>
@@ -3880,14 +3752,14 @@
       </p:sp>
       <p:sp>
         <p:nvSpPr>
-          <p:cNvPr id="12" name="TextBox 11"/>
+          <p:cNvPr id="11" name="TextBox 10"/>
           <p:cNvSpPr txBox="1"/>
           <p:nvPr/>
         </p:nvSpPr>
         <p:spPr>
           <a:xfrm>
-            <a:off x="4617720" y="2103120"/>
-            <a:ext cx="2788920" cy="365760"/>
+            <a:off x="6492240" y="2240280"/>
+            <a:ext cx="4617720" cy="365760"/>
           </a:xfrm>
           <a:prstGeom prst="rect">
             <a:avLst/>
@@ -3909,27 +3781,27 @@
               </a:spcAft>
             </a:pPr>
             <a:r>
-              <a:rPr sz="1900" b="1">
+              <a:rPr sz="1700" b="1">
                 <a:solidFill>
                   <a:srgbClr val="0F172A"/>
                 </a:solidFill>
                 <a:latin typeface="Arial"/>
               </a:rPr>
-              <a:t>Client</a:t>
-            </a:r>
-          </a:p>
-        </p:txBody>
-      </p:sp>
-      <p:sp>
-        <p:nvSpPr>
-          <p:cNvPr id="13" name="TextBox 12"/>
+              <a:t>The simulator went quiet</a:t>
+            </a:r>
+          </a:p>
+        </p:txBody>
+      </p:sp>
+      <p:sp>
+        <p:nvSpPr>
+          <p:cNvPr id="12" name="TextBox 11"/>
           <p:cNvSpPr txBox="1"/>
           <p:nvPr/>
         </p:nvSpPr>
         <p:spPr>
           <a:xfrm>
-            <a:off x="4617720" y="2514600"/>
-            <a:ext cx="2788920" cy="320040"/>
+            <a:off x="6492240" y="2743200"/>
+            <a:ext cx="4617720" cy="1828800"/>
           </a:xfrm>
           <a:prstGeom prst="rect">
             <a:avLst/>
@@ -3951,27 +3823,28 @@
               </a:spcAft>
             </a:pPr>
             <a:r>
-              <a:rPr sz="1200" b="0">
-                <a:solidFill>
-                  <a:srgbClr val="94A3B8"/>
-                </a:solidFill>
-                <a:latin typeface="Arial"/>
-              </a:rPr>
-              <a:t>/c/&lt;token&gt;</a:t>
-            </a:r>
-          </a:p>
-        </p:txBody>
-      </p:sp>
-      <p:sp>
-        <p:nvSpPr>
-          <p:cNvPr id="14" name="TextBox 13"/>
+              <a:rPr sz="1400" b="0">
+                <a:solidFill>
+                  <a:srgbClr val="475569"/>
+                </a:solidFill>
+                <a:latin typeface="Arial"/>
+              </a:rPr>
+              <a:t>Slipping a deadline past the one it blocks deleted the link instead of breaking it — so it reported no problem.
+In exactly the case it exists to show.</a:t>
+            </a:r>
+          </a:p>
+        </p:txBody>
+      </p:sp>
+      <p:sp>
+        <p:nvSpPr>
+          <p:cNvPr id="13" name="TextBox 12"/>
           <p:cNvSpPr txBox="1"/>
           <p:nvPr/>
         </p:nvSpPr>
         <p:spPr>
           <a:xfrm>
-            <a:off x="4617720" y="2926080"/>
-            <a:ext cx="2788920" cy="2194560"/>
+            <a:off x="777240" y="5029200"/>
+            <a:ext cx="10607040" cy="457200"/>
           </a:xfrm>
           <a:prstGeom prst="rect">
             <a:avLst/>
@@ -3993,275 +3866,13 @@
               </a:spcAft>
             </a:pPr>
             <a:r>
-              <a:rPr sz="1300" b="0">
+              <a:rPr sz="1500" b="0">
                 <a:solidFill>
                   <a:srgbClr val="475569"/>
                 </a:solidFill>
                 <a:latin typeface="Arial"/>
               </a:rPr>
-              <a:t>An owner-operator on a phone. Leads with "You're covered" or "We need a few things." No risk scores, no jargon, no rule citations — a test enforces it.</a:t>
-            </a:r>
-          </a:p>
-        </p:txBody>
-      </p:sp>
-      <p:sp>
-        <p:nvSpPr>
-          <p:cNvPr id="15" name="Rounded Rectangle 14"/>
-          <p:cNvSpPr/>
-          <p:nvPr/>
-        </p:nvSpPr>
-        <p:spPr>
-          <a:xfrm>
-            <a:off x="7909560" y="1783080"/>
-            <a:ext cx="3337560" cy="3566160"/>
-          </a:xfrm>
-          <a:prstGeom prst="roundRect">
-            <a:avLst>
-              <a:gd name="adj" fmla="val 6000"/>
-            </a:avLst>
-          </a:prstGeom>
-          <a:solidFill>
-            <a:srgbClr val="F6F7F9"/>
-          </a:solidFill>
-          <a:ln w="12700">
-            <a:solidFill>
-              <a:srgbClr val="E2E8F0"/>
-            </a:solidFill>
-          </a:ln>
-          <a:effectLst/>
-        </p:spPr>
-        <p:style>
-          <a:lnRef idx="1">
-            <a:schemeClr val="accent1"/>
-          </a:lnRef>
-          <a:fillRef idx="3">
-            <a:schemeClr val="accent1"/>
-          </a:fillRef>
-          <a:effectRef idx="2">
-            <a:schemeClr val="accent1"/>
-          </a:effectRef>
-          <a:fontRef idx="minor">
-            <a:schemeClr val="lt1"/>
-          </a:fontRef>
-        </p:style>
-        <p:txBody>
-          <a:bodyPr rtlCol="0" anchor="ctr"/>
-          <a:lstStyle/>
-          <a:p>
-            <a:pPr algn="ctr"/>
-          </a:p>
-        </p:txBody>
-      </p:sp>
-      <p:sp>
-        <p:nvSpPr>
-          <p:cNvPr id="16" name="Rounded Rectangle 15"/>
-          <p:cNvSpPr/>
-          <p:nvPr/>
-        </p:nvSpPr>
-        <p:spPr>
-          <a:xfrm>
-            <a:off x="7909560" y="1783080"/>
-            <a:ext cx="3337560" cy="73152"/>
-          </a:xfrm>
-          <a:prstGeom prst="roundRect">
-            <a:avLst>
-              <a:gd name="adj" fmla="val 6000"/>
-            </a:avLst>
-          </a:prstGeom>
-          <a:solidFill>
-            <a:srgbClr val="C2410C"/>
-          </a:solidFill>
-          <a:ln>
-            <a:noFill/>
-          </a:ln>
-          <a:effectLst/>
-        </p:spPr>
-        <p:style>
-          <a:lnRef idx="1">
-            <a:schemeClr val="accent1"/>
-          </a:lnRef>
-          <a:fillRef idx="3">
-            <a:schemeClr val="accent1"/>
-          </a:fillRef>
-          <a:effectRef idx="2">
-            <a:schemeClr val="accent1"/>
-          </a:effectRef>
-          <a:fontRef idx="minor">
-            <a:schemeClr val="lt1"/>
-          </a:fontRef>
-        </p:style>
-        <p:txBody>
-          <a:bodyPr rtlCol="0" anchor="ctr"/>
-          <a:lstStyle/>
-          <a:p>
-            <a:pPr algn="ctr"/>
-          </a:p>
-        </p:txBody>
-      </p:sp>
-      <p:sp>
-        <p:nvSpPr>
-          <p:cNvPr id="17" name="TextBox 16"/>
-          <p:cNvSpPr txBox="1"/>
-          <p:nvPr/>
-        </p:nvSpPr>
-        <p:spPr>
-          <a:xfrm>
-            <a:off x="8183880" y="2103120"/>
-            <a:ext cx="2788920" cy="365760"/>
-          </a:xfrm>
-          <a:prstGeom prst="rect">
-            <a:avLst/>
-          </a:prstGeom>
-          <a:noFill/>
-        </p:spPr>
-        <p:txBody>
-          <a:bodyPr wrap="square" lIns="0" rIns="0" tIns="0" bIns="0">
-            <a:spAutoFit/>
-          </a:bodyPr>
-          <a:lstStyle/>
-          <a:p>
-            <a:pPr algn="l">
-              <a:lnSpc>
-                <a:spcPct val="115000"/>
-              </a:lnSpc>
-              <a:spcAft>
-                <a:spcPts val="600"/>
-              </a:spcAft>
-            </a:pPr>
-            <a:r>
-              <a:rPr sz="1900" b="1">
-                <a:solidFill>
-                  <a:srgbClr val="0F172A"/>
-                </a:solidFill>
-                <a:latin typeface="Arial"/>
-              </a:rPr>
-              <a:t>Staff</a:t>
-            </a:r>
-          </a:p>
-        </p:txBody>
-      </p:sp>
-      <p:sp>
-        <p:nvSpPr>
-          <p:cNvPr id="18" name="TextBox 17"/>
-          <p:cNvSpPr txBox="1"/>
-          <p:nvPr/>
-        </p:nvSpPr>
-        <p:spPr>
-          <a:xfrm>
-            <a:off x="8183880" y="2514600"/>
-            <a:ext cx="2788920" cy="320040"/>
-          </a:xfrm>
-          <a:prstGeom prst="rect">
-            <a:avLst/>
-          </a:prstGeom>
-          <a:noFill/>
-        </p:spPr>
-        <p:txBody>
-          <a:bodyPr wrap="square" lIns="0" rIns="0" tIns="0" bIns="0">
-            <a:spAutoFit/>
-          </a:bodyPr>
-          <a:lstStyle/>
-          <a:p>
-            <a:pPr algn="l">
-              <a:lnSpc>
-                <a:spcPct val="115000"/>
-              </a:lnSpc>
-              <a:spcAft>
-                <a:spcPts val="600"/>
-              </a:spcAft>
-            </a:pPr>
-            <a:r>
-              <a:rPr sz="1200" b="0">
-                <a:solidFill>
-                  <a:srgbClr val="94A3B8"/>
-                </a:solidFill>
-                <a:latin typeface="Arial"/>
-              </a:rPr>
-              <a:t>console</a:t>
-            </a:r>
-          </a:p>
-        </p:txBody>
-      </p:sp>
-      <p:sp>
-        <p:nvSpPr>
-          <p:cNvPr id="19" name="TextBox 18"/>
-          <p:cNvSpPr txBox="1"/>
-          <p:nvPr/>
-        </p:nvSpPr>
-        <p:spPr>
-          <a:xfrm>
-            <a:off x="8183880" y="2926080"/>
-            <a:ext cx="2788920" cy="2194560"/>
-          </a:xfrm>
-          <a:prstGeom prst="rect">
-            <a:avLst/>
-          </a:prstGeom>
-          <a:noFill/>
-        </p:spPr>
-        <p:txBody>
-          <a:bodyPr wrap="square" lIns="0" rIns="0" tIns="0" bIns="0">
-            <a:spAutoFit/>
-          </a:bodyPr>
-          <a:lstStyle/>
-          <a:p>
-            <a:pPr algn="l">
-              <a:lnSpc>
-                <a:spcPct val="115000"/>
-              </a:lnSpc>
-              <a:spcAft>
-                <a:spcPts val="600"/>
-              </a:spcAft>
-            </a:pPr>
-            <a:r>
-              <a:rPr sz="1300" b="0">
-                <a:solidFill>
-                  <a:srgbClr val="475569"/>
-                </a:solidFill>
-                <a:latin typeface="Arial"/>
-              </a:rPr>
-              <a:t>A specialist with 18,000 carriers. Dense tables, ranked work queue, dependency chains, filing packets, scan review.</a:t>
-            </a:r>
-          </a:p>
-        </p:txBody>
-      </p:sp>
-      <p:sp>
-        <p:nvSpPr>
-          <p:cNvPr id="20" name="TextBox 19"/>
-          <p:cNvSpPr txBox="1"/>
-          <p:nvPr/>
-        </p:nvSpPr>
-        <p:spPr>
-          <a:xfrm>
-            <a:off x="777240" y="5577840"/>
-            <a:ext cx="10607040" cy="548640"/>
-          </a:xfrm>
-          <a:prstGeom prst="rect">
-            <a:avLst/>
-          </a:prstGeom>
-          <a:noFill/>
-        </p:spPr>
-        <p:txBody>
-          <a:bodyPr wrap="square" lIns="0" rIns="0" tIns="0" bIns="0">
-            <a:spAutoFit/>
-          </a:bodyPr>
-          <a:lstStyle/>
-          <a:p>
-            <a:pPr algn="l">
-              <a:lnSpc>
-                <a:spcPct val="115000"/>
-              </a:lnSpc>
-              <a:spcAft>
-                <a:spcPts val="600"/>
-              </a:spcAft>
-            </a:pPr>
-            <a:r>
-              <a:rPr sz="1400" b="0">
-                <a:solidFill>
-                  <a:srgbClr val="475569"/>
-                </a:solidFill>
-                <a:latin typeface="Arial"/>
-              </a:rPr>
-              <a:t>Onboarding is public because a prospect has no account to log into — the account is what the flow produces. That's why no client ever sees another client.</a:t>
+              <a:t>111 tests. The interesting ones pin decisions — like refusing an ambiguous date — not implementations.</a:t>
             </a:r>
           </a:p>
         </p:txBody>
@@ -4375,7 +3986,7 @@
                 </a:solidFill>
                 <a:latin typeface="Arial"/>
               </a:rPr>
-              <a:t>WHAT HAPPENED</a:t>
+              <a:t>RESULTS</a:t>
             </a:r>
           </a:p>
         </p:txBody>
@@ -4417,21 +4028,418 @@
                 </a:solidFill>
                 <a:latin typeface="Arial"/>
               </a:rPr>
-              <a:t>The tests found two real bugs.</a:t>
-            </a:r>
-          </a:p>
-        </p:txBody>
-      </p:sp>
-      <p:sp>
-        <p:nvSpPr>
-          <p:cNvPr id="5" name="Rounded Rectangle 4"/>
+              <a:t>Where it landed.</a:t>
+            </a:r>
+          </a:p>
+        </p:txBody>
+      </p:sp>
+      <p:sp>
+        <p:nvSpPr>
+          <p:cNvPr id="5" name="TextBox 4"/>
+          <p:cNvSpPr txBox="1"/>
+          <p:nvPr/>
+        </p:nvSpPr>
+        <p:spPr>
+          <a:xfrm>
+            <a:off x="777240" y="2011680"/>
+            <a:ext cx="2377440" cy="548640"/>
+          </a:xfrm>
+          <a:prstGeom prst="rect">
+            <a:avLst/>
+          </a:prstGeom>
+          <a:noFill/>
+        </p:spPr>
+        <p:txBody>
+          <a:bodyPr wrap="square" lIns="0" rIns="0" tIns="0" bIns="0">
+            <a:spAutoFit/>
+          </a:bodyPr>
+          <a:lstStyle/>
+          <a:p>
+            <a:pPr algn="l">
+              <a:lnSpc>
+                <a:spcPct val="115000"/>
+              </a:lnSpc>
+              <a:spcAft>
+                <a:spcPts val="600"/>
+              </a:spcAft>
+            </a:pPr>
+            <a:r>
+              <a:rPr sz="3400" b="1">
+                <a:solidFill>
+                  <a:srgbClr val="0F172A"/>
+                </a:solidFill>
+                <a:latin typeface="Arial"/>
+              </a:rPr>
+              <a:t>7</a:t>
+            </a:r>
+          </a:p>
+        </p:txBody>
+      </p:sp>
+      <p:sp>
+        <p:nvSpPr>
+          <p:cNvPr id="6" name="TextBox 5"/>
+          <p:cNvSpPr txBox="1"/>
+          <p:nvPr/>
+        </p:nvSpPr>
+        <p:spPr>
+          <a:xfrm>
+            <a:off x="777240" y="2542032"/>
+            <a:ext cx="2377440" cy="457200"/>
+          </a:xfrm>
+          <a:prstGeom prst="rect">
+            <a:avLst/>
+          </a:prstGeom>
+          <a:noFill/>
+        </p:spPr>
+        <p:txBody>
+          <a:bodyPr wrap="square" lIns="0" rIns="0" tIns="0" bIns="0">
+            <a:spAutoFit/>
+          </a:bodyPr>
+          <a:lstStyle/>
+          <a:p>
+            <a:pPr algn="l">
+              <a:lnSpc>
+                <a:spcPct val="115000"/>
+              </a:lnSpc>
+              <a:spcAft>
+                <a:spcPts val="600"/>
+              </a:spcAft>
+            </a:pPr>
+            <a:r>
+              <a:rPr sz="1200" b="0">
+                <a:solidFill>
+                  <a:srgbClr val="94A3B8"/>
+                </a:solidFill>
+                <a:latin typeface="Arial"/>
+              </a:rPr>
+              <a:t>rules, each cited</a:t>
+            </a:r>
+          </a:p>
+        </p:txBody>
+      </p:sp>
+      <p:sp>
+        <p:nvSpPr>
+          <p:cNvPr id="7" name="TextBox 6"/>
+          <p:cNvSpPr txBox="1"/>
+          <p:nvPr/>
+        </p:nvSpPr>
+        <p:spPr>
+          <a:xfrm>
+            <a:off x="3154680" y="2011680"/>
+            <a:ext cx="2377440" cy="548640"/>
+          </a:xfrm>
+          <a:prstGeom prst="rect">
+            <a:avLst/>
+          </a:prstGeom>
+          <a:noFill/>
+        </p:spPr>
+        <p:txBody>
+          <a:bodyPr wrap="square" lIns="0" rIns="0" tIns="0" bIns="0">
+            <a:spAutoFit/>
+          </a:bodyPr>
+          <a:lstStyle/>
+          <a:p>
+            <a:pPr algn="l">
+              <a:lnSpc>
+                <a:spcPct val="115000"/>
+              </a:lnSpc>
+              <a:spcAft>
+                <a:spcPts val="600"/>
+              </a:spcAft>
+            </a:pPr>
+            <a:r>
+              <a:rPr sz="3400" b="1">
+                <a:solidFill>
+                  <a:srgbClr val="0F172A"/>
+                </a:solidFill>
+                <a:latin typeface="Arial"/>
+              </a:rPr>
+              <a:t>22</a:t>
+            </a:r>
+          </a:p>
+        </p:txBody>
+      </p:sp>
+      <p:sp>
+        <p:nvSpPr>
+          <p:cNvPr id="8" name="TextBox 7"/>
+          <p:cNvSpPr txBox="1"/>
+          <p:nvPr/>
+        </p:nvSpPr>
+        <p:spPr>
+          <a:xfrm>
+            <a:off x="3154680" y="2542032"/>
+            <a:ext cx="2377440" cy="457200"/>
+          </a:xfrm>
+          <a:prstGeom prst="rect">
+            <a:avLst/>
+          </a:prstGeom>
+          <a:noFill/>
+        </p:spPr>
+        <p:txBody>
+          <a:bodyPr wrap="square" lIns="0" rIns="0" tIns="0" bIns="0">
+            <a:spAutoFit/>
+          </a:bodyPr>
+          <a:lstStyle/>
+          <a:p>
+            <a:pPr algn="l">
+              <a:lnSpc>
+                <a:spcPct val="115000"/>
+              </a:lnSpc>
+              <a:spcAft>
+                <a:spcPts val="600"/>
+              </a:spcAft>
+            </a:pPr>
+            <a:r>
+              <a:rPr sz="1200" b="0">
+                <a:solidFill>
+                  <a:srgbClr val="94A3B8"/>
+                </a:solidFill>
+                <a:latin typeface="Arial"/>
+              </a:rPr>
+              <a:t>routes</a:t>
+            </a:r>
+          </a:p>
+        </p:txBody>
+      </p:sp>
+      <p:sp>
+        <p:nvSpPr>
+          <p:cNvPr id="9" name="TextBox 8"/>
+          <p:cNvSpPr txBox="1"/>
+          <p:nvPr/>
+        </p:nvSpPr>
+        <p:spPr>
+          <a:xfrm>
+            <a:off x="5532120" y="2011680"/>
+            <a:ext cx="2377440" cy="548640"/>
+          </a:xfrm>
+          <a:prstGeom prst="rect">
+            <a:avLst/>
+          </a:prstGeom>
+          <a:noFill/>
+        </p:spPr>
+        <p:txBody>
+          <a:bodyPr wrap="square" lIns="0" rIns="0" tIns="0" bIns="0">
+            <a:spAutoFit/>
+          </a:bodyPr>
+          <a:lstStyle/>
+          <a:p>
+            <a:pPr algn="l">
+              <a:lnSpc>
+                <a:spcPct val="115000"/>
+              </a:lnSpc>
+              <a:spcAft>
+                <a:spcPts val="600"/>
+              </a:spcAft>
+            </a:pPr>
+            <a:r>
+              <a:rPr sz="3400" b="1">
+                <a:solidFill>
+                  <a:srgbClr val="0F172A"/>
+                </a:solidFill>
+                <a:latin typeface="Arial"/>
+              </a:rPr>
+              <a:t>111</a:t>
+            </a:r>
+          </a:p>
+        </p:txBody>
+      </p:sp>
+      <p:sp>
+        <p:nvSpPr>
+          <p:cNvPr id="10" name="TextBox 9"/>
+          <p:cNvSpPr txBox="1"/>
+          <p:nvPr/>
+        </p:nvSpPr>
+        <p:spPr>
+          <a:xfrm>
+            <a:off x="5532120" y="2542032"/>
+            <a:ext cx="2377440" cy="457200"/>
+          </a:xfrm>
+          <a:prstGeom prst="rect">
+            <a:avLst/>
+          </a:prstGeom>
+          <a:noFill/>
+        </p:spPr>
+        <p:txBody>
+          <a:bodyPr wrap="square" lIns="0" rIns="0" tIns="0" bIns="0">
+            <a:spAutoFit/>
+          </a:bodyPr>
+          <a:lstStyle/>
+          <a:p>
+            <a:pPr algn="l">
+              <a:lnSpc>
+                <a:spcPct val="115000"/>
+              </a:lnSpc>
+              <a:spcAft>
+                <a:spcPts val="600"/>
+              </a:spcAft>
+            </a:pPr>
+            <a:r>
+              <a:rPr sz="1200" b="0">
+                <a:solidFill>
+                  <a:srgbClr val="94A3B8"/>
+                </a:solidFill>
+                <a:latin typeface="Arial"/>
+              </a:rPr>
+              <a:t>tests</a:t>
+            </a:r>
+          </a:p>
+        </p:txBody>
+      </p:sp>
+      <p:sp>
+        <p:nvSpPr>
+          <p:cNvPr id="11" name="TextBox 10"/>
+          <p:cNvSpPr txBox="1"/>
+          <p:nvPr/>
+        </p:nvSpPr>
+        <p:spPr>
+          <a:xfrm>
+            <a:off x="7909560" y="2011680"/>
+            <a:ext cx="2377440" cy="548640"/>
+          </a:xfrm>
+          <a:prstGeom prst="rect">
+            <a:avLst/>
+          </a:prstGeom>
+          <a:noFill/>
+        </p:spPr>
+        <p:txBody>
+          <a:bodyPr wrap="square" lIns="0" rIns="0" tIns="0" bIns="0">
+            <a:spAutoFit/>
+          </a:bodyPr>
+          <a:lstStyle/>
+          <a:p>
+            <a:pPr algn="l">
+              <a:lnSpc>
+                <a:spcPct val="115000"/>
+              </a:lnSpc>
+              <a:spcAft>
+                <a:spcPts val="600"/>
+              </a:spcAft>
+            </a:pPr>
+            <a:r>
+              <a:rPr sz="3400" b="1">
+                <a:solidFill>
+                  <a:srgbClr val="0F172A"/>
+                </a:solidFill>
+                <a:latin typeface="Arial"/>
+              </a:rPr>
+              <a:t>1,150</a:t>
+            </a:r>
+          </a:p>
+        </p:txBody>
+      </p:sp>
+      <p:sp>
+        <p:nvSpPr>
+          <p:cNvPr id="12" name="TextBox 11"/>
+          <p:cNvSpPr txBox="1"/>
+          <p:nvPr/>
+        </p:nvSpPr>
+        <p:spPr>
+          <a:xfrm>
+            <a:off x="7909560" y="2542032"/>
+            <a:ext cx="2377440" cy="457200"/>
+          </a:xfrm>
+          <a:prstGeom prst="rect">
+            <a:avLst/>
+          </a:prstGeom>
+          <a:noFill/>
+        </p:spPr>
+        <p:txBody>
+          <a:bodyPr wrap="square" lIns="0" rIns="0" tIns="0" bIns="0">
+            <a:spAutoFit/>
+          </a:bodyPr>
+          <a:lstStyle/>
+          <a:p>
+            <a:pPr algn="l">
+              <a:lnSpc>
+                <a:spcPct val="115000"/>
+              </a:lnSpc>
+              <a:spcAft>
+                <a:spcPts val="600"/>
+              </a:spcAft>
+            </a:pPr>
+            <a:r>
+              <a:rPr sz="1200" b="0">
+                <a:solidFill>
+                  <a:srgbClr val="94A3B8"/>
+                </a:solidFill>
+                <a:latin typeface="Arial"/>
+              </a:rPr>
+              <a:t>deadlines derived</a:t>
+            </a:r>
+          </a:p>
+        </p:txBody>
+      </p:sp>
+      <p:sp>
+        <p:nvSpPr>
+          <p:cNvPr id="13" name="TextBox 12"/>
+          <p:cNvSpPr txBox="1"/>
+          <p:nvPr/>
+        </p:nvSpPr>
+        <p:spPr>
+          <a:xfrm>
+            <a:off x="777240" y="3566160"/>
+            <a:ext cx="10607040" cy="4114800"/>
+          </a:xfrm>
+          <a:prstGeom prst="rect">
+            <a:avLst/>
+          </a:prstGeom>
+          <a:noFill/>
+        </p:spPr>
+        <p:txBody>
+          <a:bodyPr wrap="square" lIns="0" rIns="0" tIns="0" bIns="0">
+            <a:spAutoFit/>
+          </a:bodyPr>
+          <a:lstStyle/>
+          <a:p>
+            <a:pPr>
+              <a:lnSpc>
+                <a:spcPct val="120000"/>
+              </a:lnSpc>
+              <a:spcAft>
+                <a:spcPts val="1400"/>
+              </a:spcAft>
+            </a:pPr>
+            <a:r>
+              <a:rPr sz="1800">
+                <a:solidFill>
+                  <a:srgbClr val="475569"/>
+                </a:solidFill>
+                <a:latin typeface="Arial"/>
+              </a:rPr>
+              <a:t>Three surfaces: a public walkthrough, a client portal, and the staff console.</a:t>
+            </a:r>
+          </a:p>
+          <a:p>
+            <a:pPr>
+              <a:lnSpc>
+                <a:spcPct val="120000"/>
+              </a:lnSpc>
+              <a:spcAft>
+                <a:spcPts val="1400"/>
+              </a:spcAft>
+            </a:pPr>
+            <a:r>
+              <a:rPr sz="1800">
+                <a:solidFill>
+                  <a:srgbClr val="475569"/>
+                </a:solidFill>
+                <a:latin typeface="Arial"/>
+              </a:rPr>
+              <a:t>Live on Vercel and Neon.</a:t>
+            </a:r>
+          </a:p>
+        </p:txBody>
+      </p:sp>
+      <p:sp>
+        <p:nvSpPr>
+          <p:cNvPr id="14" name="Rounded Rectangle 13"/>
           <p:cNvSpPr/>
           <p:nvPr/>
         </p:nvSpPr>
         <p:spPr>
           <a:xfrm>
-            <a:off x="777240" y="1737360"/>
-            <a:ext cx="5166360" cy="3566160"/>
+            <a:off x="777240" y="4572000"/>
+            <a:ext cx="10607040" cy="1234440"/>
           </a:xfrm>
           <a:prstGeom prst="roundRect">
             <a:avLst>
@@ -4472,60 +4480,14 @@
       </p:sp>
       <p:sp>
         <p:nvSpPr>
-          <p:cNvPr id="6" name="Rounded Rectangle 5"/>
-          <p:cNvSpPr/>
-          <p:nvPr/>
-        </p:nvSpPr>
-        <p:spPr>
-          <a:xfrm>
-            <a:off x="777240" y="1737360"/>
-            <a:ext cx="5166360" cy="73152"/>
-          </a:xfrm>
-          <a:prstGeom prst="roundRect">
-            <a:avLst>
-              <a:gd name="adj" fmla="val 6000"/>
-            </a:avLst>
-          </a:prstGeom>
-          <a:solidFill>
-            <a:srgbClr val="B91C1C"/>
-          </a:solidFill>
-          <a:ln>
-            <a:noFill/>
-          </a:ln>
-          <a:effectLst/>
-        </p:spPr>
-        <p:style>
-          <a:lnRef idx="1">
-            <a:schemeClr val="accent1"/>
-          </a:lnRef>
-          <a:fillRef idx="3">
-            <a:schemeClr val="accent1"/>
-          </a:fillRef>
-          <a:effectRef idx="2">
-            <a:schemeClr val="accent1"/>
-          </a:effectRef>
-          <a:fontRef idx="minor">
-            <a:schemeClr val="lt1"/>
-          </a:fontRef>
-        </p:style>
-        <p:txBody>
-          <a:bodyPr rtlCol="0" anchor="ctr"/>
-          <a:lstStyle/>
-          <a:p>
-            <a:pPr algn="ctr"/>
-          </a:p>
-        </p:txBody>
-      </p:sp>
-      <p:sp>
-        <p:nvSpPr>
-          <p:cNvPr id="7" name="TextBox 6"/>
+          <p:cNvPr id="15" name="TextBox 14"/>
           <p:cNvSpPr txBox="1"/>
           <p:nvPr/>
         </p:nvSpPr>
         <p:spPr>
           <a:xfrm>
-            <a:off x="1051560" y="2057400"/>
-            <a:ext cx="4617720" cy="365760"/>
+            <a:off x="1097280" y="4846320"/>
+            <a:ext cx="10058400" cy="411480"/>
           </a:xfrm>
           <a:prstGeom prst="rect">
             <a:avLst/>
@@ -4547,27 +4509,27 @@
               </a:spcAft>
             </a:pPr>
             <a:r>
-              <a:rPr sz="1700" b="1">
-                <a:solidFill>
-                  <a:srgbClr val="0F172A"/>
-                </a:solidFill>
-                <a:latin typeface="Arial"/>
-              </a:rPr>
-              <a:t>Valid PDFs were rejected</a:t>
-            </a:r>
-          </a:p>
-        </p:txBody>
-      </p:sp>
-      <p:sp>
-        <p:nvSpPr>
-          <p:cNvPr id="8" name="TextBox 7"/>
+              <a:rPr sz="1600" b="1">
+                <a:solidFill>
+                  <a:srgbClr val="1E3A8A"/>
+                </a:solidFill>
+                <a:latin typeface="Arial"/>
+              </a:rPr>
+              <a:t>Next: a live FMCSA lookup, so it runs on a real carrier instead of seeded data.</a:t>
+            </a:r>
+          </a:p>
+        </p:txBody>
+      </p:sp>
+      <p:sp>
+        <p:nvSpPr>
+          <p:cNvPr id="16" name="TextBox 15"/>
           <p:cNvSpPr txBox="1"/>
           <p:nvPr/>
         </p:nvSpPr>
         <p:spPr>
           <a:xfrm>
-            <a:off x="1051560" y="2560320"/>
-            <a:ext cx="4617720" cy="2560320"/>
+            <a:off x="1097280" y="5285232"/>
+            <a:ext cx="10058400" cy="411480"/>
           </a:xfrm>
           <a:prstGeom prst="rect">
             <a:avLst/>
@@ -4589,235 +4551,13 @@
               </a:spcAft>
             </a:pPr>
             <a:r>
-              <a:rPr sz="1300" b="0">
+              <a:rPr sz="1400" b="0">
                 <a:solidFill>
                   <a:srgbClr val="475569"/>
                 </a:solidFill>
                 <a:latin typeface="Arial"/>
               </a:rPr>
-              <a:t>Upload validation trusted the browser's declared file type, which is derived from the extension — so a file without one reported nothing and was refused.
-Fixed by identifying files from their magic number. More permissive for real users, and stricter against a forged type.</a:t>
-            </a:r>
-          </a:p>
-        </p:txBody>
-      </p:sp>
-      <p:sp>
-        <p:nvSpPr>
-          <p:cNvPr id="9" name="Rounded Rectangle 8"/>
-          <p:cNvSpPr/>
-          <p:nvPr/>
-        </p:nvSpPr>
-        <p:spPr>
-          <a:xfrm>
-            <a:off x="6217920" y="1737360"/>
-            <a:ext cx="5166360" cy="3566160"/>
-          </a:xfrm>
-          <a:prstGeom prst="roundRect">
-            <a:avLst>
-              <a:gd name="adj" fmla="val 6000"/>
-            </a:avLst>
-          </a:prstGeom>
-          <a:solidFill>
-            <a:srgbClr val="F6F7F9"/>
-          </a:solidFill>
-          <a:ln w="12700">
-            <a:solidFill>
-              <a:srgbClr val="E2E8F0"/>
-            </a:solidFill>
-          </a:ln>
-          <a:effectLst/>
-        </p:spPr>
-        <p:style>
-          <a:lnRef idx="1">
-            <a:schemeClr val="accent1"/>
-          </a:lnRef>
-          <a:fillRef idx="3">
-            <a:schemeClr val="accent1"/>
-          </a:fillRef>
-          <a:effectRef idx="2">
-            <a:schemeClr val="accent1"/>
-          </a:effectRef>
-          <a:fontRef idx="minor">
-            <a:schemeClr val="lt1"/>
-          </a:fontRef>
-        </p:style>
-        <p:txBody>
-          <a:bodyPr rtlCol="0" anchor="ctr"/>
-          <a:lstStyle/>
-          <a:p>
-            <a:pPr algn="ctr"/>
-          </a:p>
-        </p:txBody>
-      </p:sp>
-      <p:sp>
-        <p:nvSpPr>
-          <p:cNvPr id="10" name="Rounded Rectangle 9"/>
-          <p:cNvSpPr/>
-          <p:nvPr/>
-        </p:nvSpPr>
-        <p:spPr>
-          <a:xfrm>
-            <a:off x="6217920" y="1737360"/>
-            <a:ext cx="5166360" cy="73152"/>
-          </a:xfrm>
-          <a:prstGeom prst="roundRect">
-            <a:avLst>
-              <a:gd name="adj" fmla="val 6000"/>
-            </a:avLst>
-          </a:prstGeom>
-          <a:solidFill>
-            <a:srgbClr val="B91C1C"/>
-          </a:solidFill>
-          <a:ln>
-            <a:noFill/>
-          </a:ln>
-          <a:effectLst/>
-        </p:spPr>
-        <p:style>
-          <a:lnRef idx="1">
-            <a:schemeClr val="accent1"/>
-          </a:lnRef>
-          <a:fillRef idx="3">
-            <a:schemeClr val="accent1"/>
-          </a:fillRef>
-          <a:effectRef idx="2">
-            <a:schemeClr val="accent1"/>
-          </a:effectRef>
-          <a:fontRef idx="minor">
-            <a:schemeClr val="lt1"/>
-          </a:fontRef>
-        </p:style>
-        <p:txBody>
-          <a:bodyPr rtlCol="0" anchor="ctr"/>
-          <a:lstStyle/>
-          <a:p>
-            <a:pPr algn="ctr"/>
-          </a:p>
-        </p:txBody>
-      </p:sp>
-      <p:sp>
-        <p:nvSpPr>
-          <p:cNvPr id="11" name="TextBox 10"/>
-          <p:cNvSpPr txBox="1"/>
-          <p:nvPr/>
-        </p:nvSpPr>
-        <p:spPr>
-          <a:xfrm>
-            <a:off x="6492240" y="2057400"/>
-            <a:ext cx="4617720" cy="365760"/>
-          </a:xfrm>
-          <a:prstGeom prst="rect">
-            <a:avLst/>
-          </a:prstGeom>
-          <a:noFill/>
-        </p:spPr>
-        <p:txBody>
-          <a:bodyPr wrap="square" lIns="0" rIns="0" tIns="0" bIns="0">
-            <a:spAutoFit/>
-          </a:bodyPr>
-          <a:lstStyle/>
-          <a:p>
-            <a:pPr algn="l">
-              <a:lnSpc>
-                <a:spcPct val="115000"/>
-              </a:lnSpc>
-              <a:spcAft>
-                <a:spcPts val="600"/>
-              </a:spcAft>
-            </a:pPr>
-            <a:r>
-              <a:rPr sz="1700" b="1">
-                <a:solidFill>
-                  <a:srgbClr val="0F172A"/>
-                </a:solidFill>
-                <a:latin typeface="Arial"/>
-              </a:rPr>
-              <a:t>The simulator went silent</a:t>
-            </a:r>
-          </a:p>
-        </p:txBody>
-      </p:sp>
-      <p:sp>
-        <p:nvSpPr>
-          <p:cNvPr id="12" name="TextBox 11"/>
-          <p:cNvSpPr txBox="1"/>
-          <p:nvPr/>
-        </p:nvSpPr>
-        <p:spPr>
-          <a:xfrm>
-            <a:off x="6492240" y="2560320"/>
-            <a:ext cx="4617720" cy="2560320"/>
-          </a:xfrm>
-          <a:prstGeom prst="rect">
-            <a:avLst/>
-          </a:prstGeom>
-          <a:noFill/>
-        </p:spPr>
-        <p:txBody>
-          <a:bodyPr wrap="square" lIns="0" rIns="0" tIns="0" bIns="0">
-            <a:spAutoFit/>
-          </a:bodyPr>
-          <a:lstStyle/>
-          <a:p>
-            <a:pPr algn="l">
-              <a:lnSpc>
-                <a:spcPct val="115000"/>
-              </a:lnSpc>
-              <a:spcAft>
-                <a:spcPts val="600"/>
-              </a:spcAft>
-            </a:pPr>
-            <a:r>
-              <a:rPr sz="1300" b="0">
-                <a:solidFill>
-                  <a:srgbClr val="475569"/>
-                </a:solidFill>
-                <a:latin typeface="Arial"/>
-              </a:rPr>
-              <a:t>The what-if tool rebuilt dependency edges from the simulated dates. Slipping a prerequisite past its deadline deleted the edge instead of breaking it — so it reported no problem in exactly the case it exists to surface.
-Topology is a property of the rules, not the calendar.</a:t>
-            </a:r>
-          </a:p>
-        </p:txBody>
-      </p:sp>
-      <p:sp>
-        <p:nvSpPr>
-          <p:cNvPr id="13" name="TextBox 12"/>
-          <p:cNvSpPr txBox="1"/>
-          <p:nvPr/>
-        </p:nvSpPr>
-        <p:spPr>
-          <a:xfrm>
-            <a:off x="777240" y="5532120"/>
-            <a:ext cx="10607040" cy="548640"/>
-          </a:xfrm>
-          <a:prstGeom prst="rect">
-            <a:avLst/>
-          </a:prstGeom>
-          <a:noFill/>
-        </p:spPr>
-        <p:txBody>
-          <a:bodyPr wrap="square" lIns="0" rIns="0" tIns="0" bIns="0">
-            <a:spAutoFit/>
-          </a:bodyPr>
-          <a:lstStyle/>
-          <a:p>
-            <a:pPr algn="l">
-              <a:lnSpc>
-                <a:spcPct val="115000"/>
-              </a:lnSpc>
-              <a:spcAft>
-                <a:spcPts val="600"/>
-              </a:spcAft>
-            </a:pPr>
-            <a:r>
-              <a:rPr sz="1400" b="0">
-                <a:solidFill>
-                  <a:srgbClr val="475569"/>
-                </a:solidFill>
-                <a:latin typeface="Arial"/>
-              </a:rPr>
-              <a:t>Both are now pinned by tests. 91 unit tests run in under a second with no database; 20 browser tests cover what unit tests structurally cannot.</a:t>
+              <a:t>And letting a confirmed document update the record, which today stops at the comparison.</a:t>
             </a:r>
           </a:p>
         </p:txBody>
@@ -4857,7 +4597,7 @@
         <p:spPr>
           <a:xfrm>
             <a:off x="0" y="0"/>
-            <a:ext cx="12191695" cy="82296"/>
+            <a:ext cx="256032" cy="6858000"/>
           </a:xfrm>
           <a:prstGeom prst="roundRect">
             <a:avLst>
@@ -4902,8 +4642,8 @@
         </p:nvSpPr>
         <p:spPr>
           <a:xfrm>
-            <a:off x="777240" y="502920"/>
-            <a:ext cx="10515600" cy="274320"/>
+            <a:off x="1005840" y="2377440"/>
+            <a:ext cx="10058400" cy="822960"/>
           </a:xfrm>
           <a:prstGeom prst="rect">
             <a:avLst/>
@@ -4925,13 +4665,13 @@
               </a:spcAft>
             </a:pPr>
             <a:r>
-              <a:rPr sz="1100" b="1">
-                <a:solidFill>
-                  <a:srgbClr val="94A3B8"/>
-                </a:solidFill>
-                <a:latin typeface="Arial"/>
-              </a:rPr>
-              <a:t>A DELIBERATE CHOICE</a:t>
+              <a:rPr sz="4600" b="1">
+                <a:solidFill>
+                  <a:srgbClr val="0F172A"/>
+                </a:solidFill>
+                <a:latin typeface="Arial"/>
+              </a:rPr>
+              <a:t>Let me show you.</a:t>
             </a:r>
           </a:p>
         </p:txBody>
@@ -4944,8 +4684,8 @@
         </p:nvSpPr>
         <p:spPr>
           <a:xfrm>
-            <a:off x="777240" y="841248"/>
-            <a:ext cx="10607040" cy="822960"/>
+            <a:off x="1005840" y="3566160"/>
+            <a:ext cx="365760" cy="365760"/>
           </a:xfrm>
           <a:prstGeom prst="rect">
             <a:avLst/>
@@ -4967,13 +4707,13 @@
               </a:spcAft>
             </a:pPr>
             <a:r>
-              <a:rPr sz="3000" b="1">
-                <a:solidFill>
-                  <a:srgbClr val="0F172A"/>
-                </a:solidFill>
-                <a:latin typeface="Arial"/>
-              </a:rPr>
-              <a:t>Where it tells you what it doesn't know.</a:t>
+              <a:rPr sz="1500" b="1">
+                <a:solidFill>
+                  <a:srgbClr val="1E3A8A"/>
+                </a:solidFill>
+                <a:latin typeface="Arial"/>
+              </a:rPr>
+              <a:t>1</a:t>
             </a:r>
           </a:p>
         </p:txBody>
@@ -4986,8 +4726,8 @@
         </p:nvSpPr>
         <p:spPr>
           <a:xfrm>
-            <a:off x="777240" y="1737360"/>
-            <a:ext cx="10607040" cy="4114800"/>
+            <a:off x="1463040" y="3566160"/>
+            <a:ext cx="9692640" cy="365760"/>
           </a:xfrm>
           <a:prstGeom prst="rect">
             <a:avLst/>
@@ -5000,177 +4740,36 @@
           </a:bodyPr>
           <a:lstStyle/>
           <a:p>
-            <a:pPr>
-              <a:lnSpc>
-                <a:spcPct val="120000"/>
-              </a:lnSpc>
-              <a:spcAft>
-                <a:spcPts val="1000"/>
-              </a:spcAft>
-            </a:pPr>
-            <a:r>
-              <a:rPr sz="1500" b="1">
-                <a:solidFill>
-                  <a:srgbClr val="0F172A"/>
-                </a:solidFill>
-                <a:latin typeface="Arial"/>
-              </a:rPr>
-              <a:t>Two rules are marked "needs review." </a:t>
-            </a:r>
-            <a:r>
-              <a:rPr sz="1500">
+            <a:pPr algn="l">
+              <a:lnSpc>
+                <a:spcPct val="115000"/>
+              </a:lnSpc>
+              <a:spcAft>
+                <a:spcPts val="600"/>
+              </a:spcAft>
+            </a:pPr>
+            <a:r>
+              <a:rPr sz="1700" b="0">
                 <a:solidFill>
                   <a:srgbClr val="475569"/>
                 </a:solidFill>
                 <a:latin typeface="Arial"/>
               </a:rPr>
-              <a:t>Encoding regulation from secondary sources is where compliance software quietly goes wrong. A rule that announces uncertainty is safer than one that looks confident and is subtly wrong.</a:t>
-            </a:r>
-          </a:p>
-          <a:p>
-            <a:pPr>
-              <a:lnSpc>
-                <a:spcPct val="120000"/>
-              </a:lnSpc>
-              <a:spcAft>
-                <a:spcPts val="1000"/>
-              </a:spcAft>
-            </a:pPr>
-            <a:r>
-              <a:rPr sz="1500" b="1">
-                <a:solidFill>
-                  <a:srgbClr val="0F172A"/>
-                </a:solidFill>
-                <a:latin typeface="Arial"/>
-              </a:rPr>
-              <a:t>A truncated list says so. </a:t>
-            </a:r>
-            <a:r>
-              <a:rPr sz="1500">
-                <a:solidFill>
-                  <a:srgbClr val="475569"/>
-                </a:solidFill>
-                <a:latin typeface="Arial"/>
-              </a:rPr>
-              <a:t>"The first 200 of 919" — not "200 obligations", which reads as complete.</a:t>
-            </a:r>
-          </a:p>
-          <a:p>
-            <a:pPr>
-              <a:lnSpc>
-                <a:spcPct val="120000"/>
-              </a:lnSpc>
-              <a:spcAft>
-                <a:spcPts val="1000"/>
-              </a:spcAft>
-            </a:pPr>
-            <a:r>
-              <a:rPr sz="1500" b="1">
-                <a:solidFill>
-                  <a:srgbClr val="0F172A"/>
-                </a:solidFill>
-                <a:latin typeface="Arial"/>
-              </a:rPr>
-              <a:t>Unread documents are shown as unread. </a:t>
-            </a:r>
-            <a:r>
-              <a:rPr sz="1500">
-                <a:solidFill>
-                  <a:srgbClr val="475569"/>
-                </a:solidFill>
-                <a:latin typeface="Arial"/>
-              </a:rPr>
-              <a:t>With no model credentials configured, the app queues for manual review rather than displaying a plausible-looking result.</a:t>
-            </a:r>
-          </a:p>
-          <a:p>
-            <a:pPr>
-              <a:lnSpc>
-                <a:spcPct val="120000"/>
-              </a:lnSpc>
-              <a:spcAft>
-                <a:spcPts val="1000"/>
-              </a:spcAft>
-            </a:pPr>
-            <a:r>
-              <a:rPr sz="1500" b="1">
-                <a:solidFill>
-                  <a:srgbClr val="0F172A"/>
-                </a:solidFill>
-                <a:latin typeface="Arial"/>
-              </a:rPr>
-              <a:t>Capacity assumptions are printed on the page. </a:t>
-            </a:r>
-            <a:r>
-              <a:rPr sz="1500">
-                <a:solidFill>
-                  <a:srgbClr val="475569"/>
-                </a:solidFill>
-                <a:latin typeface="Arial"/>
-              </a:rPr>
-              <a:t>Staff count, hours per filing — labelled estimates, not measurements.</a:t>
-            </a:r>
-          </a:p>
-        </p:txBody>
-      </p:sp>
-      <p:sp>
-        <p:nvSpPr>
-          <p:cNvPr id="6" name="Rounded Rectangle 5"/>
-          <p:cNvSpPr/>
-          <p:nvPr/>
-        </p:nvSpPr>
-        <p:spPr>
-          <a:xfrm>
-            <a:off x="777240" y="4754880"/>
-            <a:ext cx="10607040" cy="1005840"/>
-          </a:xfrm>
-          <a:prstGeom prst="roundRect">
-            <a:avLst>
-              <a:gd name="adj" fmla="val 6000"/>
-            </a:avLst>
-          </a:prstGeom>
-          <a:solidFill>
-            <a:srgbClr val="F6F7F9"/>
-          </a:solidFill>
-          <a:ln w="12700">
-            <a:solidFill>
-              <a:srgbClr val="E2E8F0"/>
-            </a:solidFill>
-          </a:ln>
-          <a:effectLst/>
-        </p:spPr>
-        <p:style>
-          <a:lnRef idx="1">
-            <a:schemeClr val="accent1"/>
-          </a:lnRef>
-          <a:fillRef idx="3">
-            <a:schemeClr val="accent1"/>
-          </a:fillRef>
-          <a:effectRef idx="2">
-            <a:schemeClr val="accent1"/>
-          </a:effectRef>
-          <a:fontRef idx="minor">
-            <a:schemeClr val="lt1"/>
-          </a:fontRef>
-        </p:style>
-        <p:txBody>
-          <a:bodyPr rtlCol="0" anchor="ctr"/>
-          <a:lstStyle/>
-          <a:p>
-            <a:pPr algn="ctr"/>
-          </a:p>
-        </p:txBody>
-      </p:sp>
-      <p:sp>
-        <p:nvSpPr>
-          <p:cNvPr id="7" name="TextBox 6"/>
+              <a:t>The walkthrough — answer one question differently, watch the requirements halve</a:t>
+            </a:r>
+          </a:p>
+        </p:txBody>
+      </p:sp>
+      <p:sp>
+        <p:nvSpPr>
+          <p:cNvPr id="6" name="TextBox 5"/>
           <p:cNvSpPr txBox="1"/>
           <p:nvPr/>
         </p:nvSpPr>
         <p:spPr>
           <a:xfrm>
-            <a:off x="1097280" y="5074920"/>
-            <a:ext cx="10058400" cy="457200"/>
+            <a:off x="1005840" y="4114800"/>
+            <a:ext cx="365760" cy="365760"/>
           </a:xfrm>
           <a:prstGeom prst="rect">
             <a:avLst/>
@@ -5192,99 +4791,27 @@
               </a:spcAft>
             </a:pPr>
             <a:r>
-              <a:rPr sz="1600" b="1">
+              <a:rPr sz="1500" b="1">
                 <a:solidFill>
                   <a:srgbClr val="1E3A8A"/>
                 </a:solidFill>
                 <a:latin typeface="Arial"/>
               </a:rPr>
-              <a:t>In a compliance product, a screen that looks authoritative and is wrong is worse than one that admits its limits.</a:t>
-            </a:r>
-          </a:p>
-        </p:txBody>
-      </p:sp>
-    </p:spTree>
-  </p:cSld>
-  <p:clrMapOvr>
-    <a:masterClrMapping/>
-  </p:clrMapOvr>
-</p:sld>
-</file>
-
-<file path=ppt/slides/slide13.xml><?xml version="1.0" encoding="utf-8"?>
-<p:sld xmlns:a="http://schemas.openxmlformats.org/drawingml/2006/main" xmlns:p="http://schemas.openxmlformats.org/presentationml/2006/main" xmlns:r="http://schemas.openxmlformats.org/officeDocument/2006/relationships">
-  <p:cSld>
-    <p:bg>
-      <p:bgPr>
-        <a:solidFill>
-          <a:srgbClr val="FFFFFF"/>
-        </a:solidFill>
-        <a:effectLst/>
-      </p:bgPr>
-    </p:bg>
-    <p:spTree>
-      <p:nvGrpSpPr>
-        <p:cNvPr id="1" name=""/>
-        <p:cNvGrpSpPr/>
-        <p:nvPr/>
-      </p:nvGrpSpPr>
-      <p:grpSpPr/>
-      <p:sp>
-        <p:nvSpPr>
-          <p:cNvPr id="2" name="Rounded Rectangle 1"/>
-          <p:cNvSpPr/>
-          <p:nvPr/>
-        </p:nvSpPr>
-        <p:spPr>
-          <a:xfrm>
-            <a:off x="0" y="0"/>
-            <a:ext cx="12191695" cy="82296"/>
-          </a:xfrm>
-          <a:prstGeom prst="roundRect">
-            <a:avLst>
-              <a:gd name="adj" fmla="val 6000"/>
-            </a:avLst>
-          </a:prstGeom>
-          <a:solidFill>
-            <a:srgbClr val="1E3A8A"/>
-          </a:solidFill>
-          <a:ln>
-            <a:noFill/>
-          </a:ln>
-          <a:effectLst/>
-        </p:spPr>
-        <p:style>
-          <a:lnRef idx="1">
-            <a:schemeClr val="accent1"/>
-          </a:lnRef>
-          <a:fillRef idx="3">
-            <a:schemeClr val="accent1"/>
-          </a:fillRef>
-          <a:effectRef idx="2">
-            <a:schemeClr val="accent1"/>
-          </a:effectRef>
-          <a:fontRef idx="minor">
-            <a:schemeClr val="lt1"/>
-          </a:fontRef>
-        </p:style>
-        <p:txBody>
-          <a:bodyPr rtlCol="0" anchor="ctr"/>
-          <a:lstStyle/>
-          <a:p>
-            <a:pPr algn="ctr"/>
-          </a:p>
-        </p:txBody>
-      </p:sp>
-      <p:sp>
-        <p:nvSpPr>
-          <p:cNvPr id="3" name="TextBox 2"/>
+              <a:t>2</a:t>
+            </a:r>
+          </a:p>
+        </p:txBody>
+      </p:sp>
+      <p:sp>
+        <p:nvSpPr>
+          <p:cNvPr id="7" name="TextBox 6"/>
           <p:cNvSpPr txBox="1"/>
           <p:nvPr/>
         </p:nvSpPr>
         <p:spPr>
           <a:xfrm>
-            <a:off x="777240" y="502920"/>
-            <a:ext cx="10515600" cy="274320"/>
+            <a:off x="1463040" y="4114800"/>
+            <a:ext cx="9692640" cy="365760"/>
           </a:xfrm>
           <a:prstGeom prst="rect">
             <a:avLst/>
@@ -5306,27 +4833,27 @@
               </a:spcAft>
             </a:pPr>
             <a:r>
-              <a:rPr sz="1100" b="1">
-                <a:solidFill>
-                  <a:srgbClr val="94A3B8"/>
-                </a:solidFill>
-                <a:latin typeface="Arial"/>
-              </a:rPr>
-              <a:t>RESULTS</a:t>
-            </a:r>
-          </a:p>
-        </p:txBody>
-      </p:sp>
-      <p:sp>
-        <p:nvSpPr>
-          <p:cNvPr id="4" name="TextBox 3"/>
+              <a:rPr sz="1700" b="0">
+                <a:solidFill>
+                  <a:srgbClr val="475569"/>
+                </a:solidFill>
+                <a:latin typeface="Arial"/>
+              </a:rPr>
+              <a:t>The work queue — and what a parked truck actually costs</a:t>
+            </a:r>
+          </a:p>
+        </p:txBody>
+      </p:sp>
+      <p:sp>
+        <p:nvSpPr>
+          <p:cNvPr id="8" name="TextBox 7"/>
           <p:cNvSpPr txBox="1"/>
           <p:nvPr/>
         </p:nvSpPr>
         <p:spPr>
           <a:xfrm>
-            <a:off x="777240" y="841248"/>
-            <a:ext cx="10607040" cy="822960"/>
+            <a:off x="1005840" y="4663440"/>
+            <a:ext cx="365760" cy="365760"/>
           </a:xfrm>
           <a:prstGeom prst="rect">
             <a:avLst/>
@@ -5348,27 +4875,27 @@
               </a:spcAft>
             </a:pPr>
             <a:r>
-              <a:rPr sz="3000" b="1">
-                <a:solidFill>
-                  <a:srgbClr val="0F172A"/>
-                </a:solidFill>
-                <a:latin typeface="Arial"/>
-              </a:rPr>
-              <a:t>What exists.</a:t>
-            </a:r>
-          </a:p>
-        </p:txBody>
-      </p:sp>
-      <p:sp>
-        <p:nvSpPr>
-          <p:cNvPr id="5" name="TextBox 4"/>
+              <a:rPr sz="1500" b="1">
+                <a:solidFill>
+                  <a:srgbClr val="1E3A8A"/>
+                </a:solidFill>
+                <a:latin typeface="Arial"/>
+              </a:rPr>
+              <a:t>3</a:t>
+            </a:r>
+          </a:p>
+        </p:txBody>
+      </p:sp>
+      <p:sp>
+        <p:nvSpPr>
+          <p:cNvPr id="9" name="TextBox 8"/>
           <p:cNvSpPr txBox="1"/>
           <p:nvPr/>
         </p:nvSpPr>
         <p:spPr>
           <a:xfrm>
-            <a:off x="777240" y="1828800"/>
-            <a:ext cx="2377440" cy="548640"/>
+            <a:off x="1463040" y="4663440"/>
+            <a:ext cx="9692640" cy="365760"/>
           </a:xfrm>
           <a:prstGeom prst="rect">
             <a:avLst/>
@@ -5390,27 +4917,27 @@
               </a:spcAft>
             </a:pPr>
             <a:r>
-              <a:rPr sz="3400" b="1">
-                <a:solidFill>
-                  <a:srgbClr val="0F172A"/>
-                </a:solidFill>
-                <a:latin typeface="Arial"/>
-              </a:rPr>
-              <a:t>7</a:t>
-            </a:r>
-          </a:p>
-        </p:txBody>
-      </p:sp>
-      <p:sp>
-        <p:nvSpPr>
-          <p:cNvPr id="6" name="TextBox 5"/>
+              <a:rPr sz="1700" b="0">
+                <a:solidFill>
+                  <a:srgbClr val="475569"/>
+                </a:solidFill>
+                <a:latin typeface="Arial"/>
+              </a:rPr>
+              <a:t>One truck — the chain, and the slider that breaks it</a:t>
+            </a:r>
+          </a:p>
+        </p:txBody>
+      </p:sp>
+      <p:sp>
+        <p:nvSpPr>
+          <p:cNvPr id="10" name="TextBox 9"/>
           <p:cNvSpPr txBox="1"/>
           <p:nvPr/>
         </p:nvSpPr>
         <p:spPr>
           <a:xfrm>
-            <a:off x="777240" y="2359152"/>
-            <a:ext cx="2377440" cy="457200"/>
+            <a:off x="1005840" y="5212080"/>
+            <a:ext cx="365760" cy="365760"/>
           </a:xfrm>
           <a:prstGeom prst="rect">
             <a:avLst/>
@@ -5432,28 +4959,27 @@
               </a:spcAft>
             </a:pPr>
             <a:r>
-              <a:rPr sz="1200" b="0">
-                <a:solidFill>
-                  <a:srgbClr val="94A3B8"/>
-                </a:solidFill>
-                <a:latin typeface="Arial"/>
-              </a:rPr>
-              <a:t>compliance rules,
-each cited</a:t>
-            </a:r>
-          </a:p>
-        </p:txBody>
-      </p:sp>
-      <p:sp>
-        <p:nvSpPr>
-          <p:cNvPr id="7" name="TextBox 6"/>
+              <a:rPr sz="1500" b="1">
+                <a:solidFill>
+                  <a:srgbClr val="1E3A8A"/>
+                </a:solidFill>
+                <a:latin typeface="Arial"/>
+              </a:rPr>
+              <a:t>4</a:t>
+            </a:r>
+          </a:p>
+        </p:txBody>
+      </p:sp>
+      <p:sp>
+        <p:nvSpPr>
+          <p:cNvPr id="11" name="TextBox 10"/>
           <p:cNvSpPr txBox="1"/>
           <p:nvPr/>
         </p:nvSpPr>
         <p:spPr>
           <a:xfrm>
-            <a:off x="3154680" y="1828800"/>
-            <a:ext cx="2377440" cy="548640"/>
+            <a:off x="1463040" y="5212080"/>
+            <a:ext cx="9692640" cy="365760"/>
           </a:xfrm>
           <a:prstGeom prst="rect">
             <a:avLst/>
@@ -5475,1374 +5001,13 @@
               </a:spcAft>
             </a:pPr>
             <a:r>
-              <a:rPr sz="3400" b="1">
-                <a:solidFill>
-                  <a:srgbClr val="0F172A"/>
-                </a:solidFill>
-                <a:latin typeface="Arial"/>
-              </a:rPr>
-              <a:t>22</a:t>
-            </a:r>
-          </a:p>
-        </p:txBody>
-      </p:sp>
-      <p:sp>
-        <p:nvSpPr>
-          <p:cNvPr id="8" name="TextBox 7"/>
-          <p:cNvSpPr txBox="1"/>
-          <p:nvPr/>
-        </p:nvSpPr>
-        <p:spPr>
-          <a:xfrm>
-            <a:off x="3154680" y="2359152"/>
-            <a:ext cx="2377440" cy="457200"/>
-          </a:xfrm>
-          <a:prstGeom prst="rect">
-            <a:avLst/>
-          </a:prstGeom>
-          <a:noFill/>
-        </p:spPr>
-        <p:txBody>
-          <a:bodyPr wrap="square" lIns="0" rIns="0" tIns="0" bIns="0">
-            <a:spAutoFit/>
-          </a:bodyPr>
-          <a:lstStyle/>
-          <a:p>
-            <a:pPr algn="l">
-              <a:lnSpc>
-                <a:spcPct val="115000"/>
-              </a:lnSpc>
-              <a:spcAft>
-                <a:spcPts val="600"/>
-              </a:spcAft>
-            </a:pPr>
-            <a:r>
-              <a:rPr sz="1200" b="0">
-                <a:solidFill>
-                  <a:srgbClr val="94A3B8"/>
-                </a:solidFill>
-                <a:latin typeface="Arial"/>
-              </a:rPr>
-              <a:t>routes across
-three surfaces</a:t>
-            </a:r>
-          </a:p>
-        </p:txBody>
-      </p:sp>
-      <p:sp>
-        <p:nvSpPr>
-          <p:cNvPr id="9" name="TextBox 8"/>
-          <p:cNvSpPr txBox="1"/>
-          <p:nvPr/>
-        </p:nvSpPr>
-        <p:spPr>
-          <a:xfrm>
-            <a:off x="5532120" y="1828800"/>
-            <a:ext cx="2377440" cy="548640"/>
-          </a:xfrm>
-          <a:prstGeom prst="rect">
-            <a:avLst/>
-          </a:prstGeom>
-          <a:noFill/>
-        </p:spPr>
-        <p:txBody>
-          <a:bodyPr wrap="square" lIns="0" rIns="0" tIns="0" bIns="0">
-            <a:spAutoFit/>
-          </a:bodyPr>
-          <a:lstStyle/>
-          <a:p>
-            <a:pPr algn="l">
-              <a:lnSpc>
-                <a:spcPct val="115000"/>
-              </a:lnSpc>
-              <a:spcAft>
-                <a:spcPts val="600"/>
-              </a:spcAft>
-            </a:pPr>
-            <a:r>
-              <a:rPr sz="3400" b="1">
-                <a:solidFill>
-                  <a:srgbClr val="0F172A"/>
-                </a:solidFill>
-                <a:latin typeface="Arial"/>
-              </a:rPr>
-              <a:t>111</a:t>
-            </a:r>
-          </a:p>
-        </p:txBody>
-      </p:sp>
-      <p:sp>
-        <p:nvSpPr>
-          <p:cNvPr id="10" name="TextBox 9"/>
-          <p:cNvSpPr txBox="1"/>
-          <p:nvPr/>
-        </p:nvSpPr>
-        <p:spPr>
-          <a:xfrm>
-            <a:off x="5532120" y="2359152"/>
-            <a:ext cx="2377440" cy="457200"/>
-          </a:xfrm>
-          <a:prstGeom prst="rect">
-            <a:avLst/>
-          </a:prstGeom>
-          <a:noFill/>
-        </p:spPr>
-        <p:txBody>
-          <a:bodyPr wrap="square" lIns="0" rIns="0" tIns="0" bIns="0">
-            <a:spAutoFit/>
-          </a:bodyPr>
-          <a:lstStyle/>
-          <a:p>
-            <a:pPr algn="l">
-              <a:lnSpc>
-                <a:spcPct val="115000"/>
-              </a:lnSpc>
-              <a:spcAft>
-                <a:spcPts val="600"/>
-              </a:spcAft>
-            </a:pPr>
-            <a:r>
-              <a:rPr sz="1200" b="0">
-                <a:solidFill>
-                  <a:srgbClr val="94A3B8"/>
-                </a:solidFill>
-                <a:latin typeface="Arial"/>
-              </a:rPr>
-              <a:t>tests — 91 unit,
-20 browser</a:t>
-            </a:r>
-          </a:p>
-        </p:txBody>
-      </p:sp>
-      <p:sp>
-        <p:nvSpPr>
-          <p:cNvPr id="11" name="TextBox 10"/>
-          <p:cNvSpPr txBox="1"/>
-          <p:nvPr/>
-        </p:nvSpPr>
-        <p:spPr>
-          <a:xfrm>
-            <a:off x="7909560" y="1828800"/>
-            <a:ext cx="2377440" cy="548640"/>
-          </a:xfrm>
-          <a:prstGeom prst="rect">
-            <a:avLst/>
-          </a:prstGeom>
-          <a:noFill/>
-        </p:spPr>
-        <p:txBody>
-          <a:bodyPr wrap="square" lIns="0" rIns="0" tIns="0" bIns="0">
-            <a:spAutoFit/>
-          </a:bodyPr>
-          <a:lstStyle/>
-          <a:p>
-            <a:pPr algn="l">
-              <a:lnSpc>
-                <a:spcPct val="115000"/>
-              </a:lnSpc>
-              <a:spcAft>
-                <a:spcPts val="600"/>
-              </a:spcAft>
-            </a:pPr>
-            <a:r>
-              <a:rPr sz="3400" b="1">
-                <a:solidFill>
-                  <a:srgbClr val="0F172A"/>
-                </a:solidFill>
-                <a:latin typeface="Arial"/>
-              </a:rPr>
-              <a:t>1,150</a:t>
-            </a:r>
-          </a:p>
-        </p:txBody>
-      </p:sp>
-      <p:sp>
-        <p:nvSpPr>
-          <p:cNvPr id="12" name="TextBox 11"/>
-          <p:cNvSpPr txBox="1"/>
-          <p:nvPr/>
-        </p:nvSpPr>
-        <p:spPr>
-          <a:xfrm>
-            <a:off x="7909560" y="2359152"/>
-            <a:ext cx="2377440" cy="457200"/>
-          </a:xfrm>
-          <a:prstGeom prst="rect">
-            <a:avLst/>
-          </a:prstGeom>
-          <a:noFill/>
-        </p:spPr>
-        <p:txBody>
-          <a:bodyPr wrap="square" lIns="0" rIns="0" tIns="0" bIns="0">
-            <a:spAutoFit/>
-          </a:bodyPr>
-          <a:lstStyle/>
-          <a:p>
-            <a:pPr algn="l">
-              <a:lnSpc>
-                <a:spcPct val="115000"/>
-              </a:lnSpc>
-              <a:spcAft>
-                <a:spcPts val="600"/>
-              </a:spcAft>
-            </a:pPr>
-            <a:r>
-              <a:rPr sz="1200" b="0">
-                <a:solidFill>
-                  <a:srgbClr val="94A3B8"/>
-                </a:solidFill>
-                <a:latin typeface="Arial"/>
-              </a:rPr>
-              <a:t>obligations derived
-from 40 carriers</a:t>
-            </a:r>
-          </a:p>
-        </p:txBody>
-      </p:sp>
-      <p:sp>
-        <p:nvSpPr>
-          <p:cNvPr id="13" name="TextBox 12"/>
-          <p:cNvSpPr txBox="1"/>
-          <p:nvPr/>
-        </p:nvSpPr>
-        <p:spPr>
-          <a:xfrm>
-            <a:off x="777240" y="3566160"/>
-            <a:ext cx="10607040" cy="4114800"/>
-          </a:xfrm>
-          <a:prstGeom prst="rect">
-            <a:avLst/>
-          </a:prstGeom>
-          <a:noFill/>
-        </p:spPr>
-        <p:txBody>
-          <a:bodyPr wrap="square" lIns="0" rIns="0" tIns="0" bIns="0">
-            <a:spAutoFit/>
-          </a:bodyPr>
-          <a:lstStyle/>
-          <a:p>
-            <a:pPr>
-              <a:lnSpc>
-                <a:spcPct val="120000"/>
-              </a:lnSpc>
-              <a:spcAft>
-                <a:spcPts val="1000"/>
-              </a:spcAft>
-            </a:pPr>
-            <a:r>
-              <a:rPr sz="1500" b="1">
-                <a:solidFill>
-                  <a:srgbClr val="0F172A"/>
-                </a:solidFill>
-                <a:latin typeface="Arial"/>
-              </a:rPr>
-              <a:t>PostgreSQL + Prisma, </a:t>
-            </a:r>
-            <a:r>
-              <a:rPr sz="1500">
+              <a:rPr sz="1700" b="0">
                 <a:solidFill>
                   <a:srgbClr val="475569"/>
                 </a:solidFill>
                 <a:latin typeface="Arial"/>
               </a:rPr>
-              <a:t>10 tables, 6 migrations, with hand-written SQL for the aggregate work an ORM hides.</a:t>
-            </a:r>
-          </a:p>
-          <a:p>
-            <a:pPr>
-              <a:lnSpc>
-                <a:spcPct val="120000"/>
-              </a:lnSpc>
-              <a:spcAft>
-                <a:spcPts val="1000"/>
-              </a:spcAft>
-            </a:pPr>
-            <a:r>
-              <a:rPr sz="1500" b="1">
-                <a:solidFill>
-                  <a:srgbClr val="0F172A"/>
-                </a:solidFill>
-                <a:latin typeface="Arial"/>
-              </a:rPr>
-              <a:t>Next.js + React, </a:t>
-            </a:r>
-            <a:r>
-              <a:rPr sz="1500">
-                <a:solidFill>
-                  <a:srgbClr val="475569"/>
-                </a:solidFill>
-                <a:latin typeface="Arial"/>
-              </a:rPr>
-              <a:t>Server Components querying the database directly — no API layer to maintain.</a:t>
-            </a:r>
-          </a:p>
-          <a:p>
-            <a:pPr>
-              <a:lnSpc>
-                <a:spcPct val="120000"/>
-              </a:lnSpc>
-              <a:spcAft>
-                <a:spcPts val="1000"/>
-              </a:spcAft>
-            </a:pPr>
-            <a:r>
-              <a:rPr sz="1500" b="1">
-                <a:solidFill>
-                  <a:srgbClr val="0F172A"/>
-                </a:solidFill>
-                <a:latin typeface="Arial"/>
-              </a:rPr>
-              <a:t>Five subagents committed to the repo, </a:t>
-            </a:r>
-            <a:r>
-              <a:rPr sz="1500">
-                <a:solidFill>
-                  <a:srgbClr val="475569"/>
-                </a:solidFill>
-                <a:latin typeface="Arial"/>
-              </a:rPr>
-              <a:t>encoding the domain and the decisions.</a:t>
-            </a:r>
-          </a:p>
-        </p:txBody>
-      </p:sp>
-      <p:sp>
-        <p:nvSpPr>
-          <p:cNvPr id="14" name="Rounded Rectangle 13"/>
-          <p:cNvSpPr/>
-          <p:nvPr/>
-        </p:nvSpPr>
-        <p:spPr>
-          <a:xfrm>
-            <a:off x="777240" y="5074920"/>
-            <a:ext cx="10607040" cy="868680"/>
-          </a:xfrm>
-          <a:prstGeom prst="roundRect">
-            <a:avLst>
-              <a:gd name="adj" fmla="val 6000"/>
-            </a:avLst>
-          </a:prstGeom>
-          <a:solidFill>
-            <a:srgbClr val="F6F7F9"/>
-          </a:solidFill>
-          <a:ln w="12700">
-            <a:solidFill>
-              <a:srgbClr val="E2E8F0"/>
-            </a:solidFill>
-          </a:ln>
-          <a:effectLst/>
-        </p:spPr>
-        <p:style>
-          <a:lnRef idx="1">
-            <a:schemeClr val="accent1"/>
-          </a:lnRef>
-          <a:fillRef idx="3">
-            <a:schemeClr val="accent1"/>
-          </a:fillRef>
-          <a:effectRef idx="2">
-            <a:schemeClr val="accent1"/>
-          </a:effectRef>
-          <a:fontRef idx="minor">
-            <a:schemeClr val="lt1"/>
-          </a:fontRef>
-        </p:style>
-        <p:txBody>
-          <a:bodyPr rtlCol="0" anchor="ctr"/>
-          <a:lstStyle/>
-          <a:p>
-            <a:pPr algn="ctr"/>
-          </a:p>
-        </p:txBody>
-      </p:sp>
-      <p:sp>
-        <p:nvSpPr>
-          <p:cNvPr id="15" name="TextBox 14"/>
-          <p:cNvSpPr txBox="1"/>
-          <p:nvPr/>
-        </p:nvSpPr>
-        <p:spPr>
-          <a:xfrm>
-            <a:off x="1097280" y="5321808"/>
-            <a:ext cx="9966960" cy="548640"/>
-          </a:xfrm>
-          <a:prstGeom prst="rect">
-            <a:avLst/>
-          </a:prstGeom>
-          <a:noFill/>
-        </p:spPr>
-        <p:txBody>
-          <a:bodyPr wrap="square" lIns="0" rIns="0" tIns="0" bIns="0">
-            <a:spAutoFit/>
-          </a:bodyPr>
-          <a:lstStyle/>
-          <a:p>
-            <a:pPr algn="l">
-              <a:lnSpc>
-                <a:spcPct val="115000"/>
-              </a:lnSpc>
-              <a:spcAft>
-                <a:spcPts val="600"/>
-              </a:spcAft>
-            </a:pPr>
-            <a:r>
-              <a:rPr sz="1300" b="0">
-                <a:solidFill>
-                  <a:srgbClr val="475569"/>
-                </a:solidFill>
-                <a:latin typeface="Arial"/>
-              </a:rPr>
-              <a:t>Not built: cross-portal reconciliation against live agency records, and writing a confirmed extraction back to the credential. Both are described rather than half-implemented.</a:t>
-            </a:r>
-          </a:p>
-        </p:txBody>
-      </p:sp>
-    </p:spTree>
-  </p:cSld>
-  <p:clrMapOvr>
-    <a:masterClrMapping/>
-  </p:clrMapOvr>
-</p:sld>
-</file>
-
-<file path=ppt/slides/slide14.xml><?xml version="1.0" encoding="utf-8"?>
-<p:sld xmlns:a="http://schemas.openxmlformats.org/drawingml/2006/main" xmlns:p="http://schemas.openxmlformats.org/presentationml/2006/main" xmlns:r="http://schemas.openxmlformats.org/officeDocument/2006/relationships">
-  <p:cSld>
-    <p:bg>
-      <p:bgPr>
-        <a:solidFill>
-          <a:srgbClr val="FFFFFF"/>
-        </a:solidFill>
-        <a:effectLst/>
-      </p:bgPr>
-    </p:bg>
-    <p:spTree>
-      <p:nvGrpSpPr>
-        <p:cNvPr id="1" name=""/>
-        <p:cNvGrpSpPr/>
-        <p:nvPr/>
-      </p:nvGrpSpPr>
-      <p:grpSpPr/>
-      <p:sp>
-        <p:nvSpPr>
-          <p:cNvPr id="2" name="Rounded Rectangle 1"/>
-          <p:cNvSpPr/>
-          <p:nvPr/>
-        </p:nvSpPr>
-        <p:spPr>
-          <a:xfrm>
-            <a:off x="0" y="0"/>
-            <a:ext cx="12191695" cy="82296"/>
-          </a:xfrm>
-          <a:prstGeom prst="roundRect">
-            <a:avLst>
-              <a:gd name="adj" fmla="val 6000"/>
-            </a:avLst>
-          </a:prstGeom>
-          <a:solidFill>
-            <a:srgbClr val="1E3A8A"/>
-          </a:solidFill>
-          <a:ln>
-            <a:noFill/>
-          </a:ln>
-          <a:effectLst/>
-        </p:spPr>
-        <p:style>
-          <a:lnRef idx="1">
-            <a:schemeClr val="accent1"/>
-          </a:lnRef>
-          <a:fillRef idx="3">
-            <a:schemeClr val="accent1"/>
-          </a:fillRef>
-          <a:effectRef idx="2">
-            <a:schemeClr val="accent1"/>
-          </a:effectRef>
-          <a:fontRef idx="minor">
-            <a:schemeClr val="lt1"/>
-          </a:fontRef>
-        </p:style>
-        <p:txBody>
-          <a:bodyPr rtlCol="0" anchor="ctr"/>
-          <a:lstStyle/>
-          <a:p>
-            <a:pPr algn="ctr"/>
-          </a:p>
-        </p:txBody>
-      </p:sp>
-      <p:sp>
-        <p:nvSpPr>
-          <p:cNvPr id="3" name="TextBox 2"/>
-          <p:cNvSpPr txBox="1"/>
-          <p:nvPr/>
-        </p:nvSpPr>
-        <p:spPr>
-          <a:xfrm>
-            <a:off x="777240" y="502920"/>
-            <a:ext cx="10515600" cy="274320"/>
-          </a:xfrm>
-          <a:prstGeom prst="rect">
-            <a:avLst/>
-          </a:prstGeom>
-          <a:noFill/>
-        </p:spPr>
-        <p:txBody>
-          <a:bodyPr wrap="square" lIns="0" rIns="0" tIns="0" bIns="0">
-            <a:spAutoFit/>
-          </a:bodyPr>
-          <a:lstStyle/>
-          <a:p>
-            <a:pPr algn="l">
-              <a:lnSpc>
-                <a:spcPct val="115000"/>
-              </a:lnSpc>
-              <a:spcAft>
-                <a:spcPts val="600"/>
-              </a:spcAft>
-            </a:pPr>
-            <a:r>
-              <a:rPr sz="1100" b="1">
-                <a:solidFill>
-                  <a:srgbClr val="94A3B8"/>
-                </a:solidFill>
-                <a:latin typeface="Arial"/>
-              </a:rPr>
-              <a:t>IF THIS WERE REAL</a:t>
-            </a:r>
-          </a:p>
-        </p:txBody>
-      </p:sp>
-      <p:sp>
-        <p:nvSpPr>
-          <p:cNvPr id="4" name="TextBox 3"/>
-          <p:cNvSpPr txBox="1"/>
-          <p:nvPr/>
-        </p:nvSpPr>
-        <p:spPr>
-          <a:xfrm>
-            <a:off x="777240" y="841248"/>
-            <a:ext cx="10607040" cy="822960"/>
-          </a:xfrm>
-          <a:prstGeom prst="rect">
-            <a:avLst/>
-          </a:prstGeom>
-          <a:noFill/>
-        </p:spPr>
-        <p:txBody>
-          <a:bodyPr wrap="square" lIns="0" rIns="0" tIns="0" bIns="0">
-            <a:spAutoFit/>
-          </a:bodyPr>
-          <a:lstStyle/>
-          <a:p>
-            <a:pPr algn="l">
-              <a:lnSpc>
-                <a:spcPct val="115000"/>
-              </a:lnSpc>
-              <a:spcAft>
-                <a:spcPts val="600"/>
-              </a:spcAft>
-            </a:pPr>
-            <a:r>
-              <a:rPr sz="3000" b="1">
-                <a:solidFill>
-                  <a:srgbClr val="0F172A"/>
-                </a:solidFill>
-                <a:latin typeface="Arial"/>
-              </a:rPr>
-              <a:t>What I'd do next.</a:t>
-            </a:r>
-          </a:p>
-        </p:txBody>
-      </p:sp>
-      <p:sp>
-        <p:nvSpPr>
-          <p:cNvPr id="5" name="TextBox 4"/>
-          <p:cNvSpPr txBox="1"/>
-          <p:nvPr/>
-        </p:nvSpPr>
-        <p:spPr>
-          <a:xfrm>
-            <a:off x="777240" y="1737360"/>
-            <a:ext cx="10607040" cy="4114800"/>
-          </a:xfrm>
-          <a:prstGeom prst="rect">
-            <a:avLst/>
-          </a:prstGeom>
-          <a:noFill/>
-        </p:spPr>
-        <p:txBody>
-          <a:bodyPr wrap="square" lIns="0" rIns="0" tIns="0" bIns="0">
-            <a:spAutoFit/>
-          </a:bodyPr>
-          <a:lstStyle/>
-          <a:p>
-            <a:pPr>
-              <a:lnSpc>
-                <a:spcPct val="120000"/>
-              </a:lnSpc>
-              <a:spcAft>
-                <a:spcPts val="1000"/>
-              </a:spcAft>
-            </a:pPr>
-            <a:r>
-              <a:rPr sz="1500" b="1">
-                <a:solidFill>
-                  <a:srgbClr val="0F172A"/>
-                </a:solidFill>
-                <a:latin typeface="Arial"/>
-              </a:rPr>
-              <a:t>Wire the live FMCSA lookup. </a:t>
-            </a:r>
-            <a:r>
-              <a:rPr sz="1500">
-                <a:solidFill>
-                  <a:srgbClr val="475569"/>
-                </a:solidFill>
-                <a:latin typeface="Arial"/>
-              </a:rPr>
-              <a:t>Enter a real USDOT number and derive from the actual record instead of seeded data. Highest-value next step, and the one I'd start with.</a:t>
-            </a:r>
-          </a:p>
-          <a:p>
-            <a:pPr>
-              <a:lnSpc>
-                <a:spcPct val="120000"/>
-              </a:lnSpc>
-              <a:spcAft>
-                <a:spcPts val="1000"/>
-              </a:spcAft>
-            </a:pPr>
-            <a:r>
-              <a:rPr sz="1500" b="1">
-                <a:solidFill>
-                  <a:srgbClr val="0F172A"/>
-                </a:solidFill>
-                <a:latin typeface="Arial"/>
-              </a:rPr>
-              <a:t>Close the extraction loop. </a:t>
-            </a:r>
-            <a:r>
-              <a:rPr sz="1500">
-                <a:solidFill>
-                  <a:srgbClr val="475569"/>
-                </a:solidFill>
-                <a:latin typeface="Arial"/>
-              </a:rPr>
-              <a:t>A confirmed reading should update the credential and let the engine recompute from it — today it stops at the comparison.</a:t>
-            </a:r>
-          </a:p>
-          <a:p>
-            <a:pPr>
-              <a:lnSpc>
-                <a:spcPct val="120000"/>
-              </a:lnSpc>
-              <a:spcAft>
-                <a:spcPts val="1000"/>
-              </a:spcAft>
-            </a:pPr>
-            <a:r>
-              <a:rPr sz="1500" b="1">
-                <a:solidFill>
-                  <a:srgbClr val="0F172A"/>
-                </a:solidFill>
-                <a:latin typeface="Arial"/>
-              </a:rPr>
-              <a:t>Reconcile against agency records. </a:t>
-            </a:r>
-            <a:r>
-              <a:rPr sz="1500">
-                <a:solidFill>
-                  <a:srgbClr val="475569"/>
-                </a:solidFill>
-                <a:latin typeface="Arial"/>
-              </a:rPr>
-              <a:t>Silent data drift — an address updated with the state but not the feds — causes real revocations, and nobody audits for it.</a:t>
-            </a:r>
-          </a:p>
-          <a:p>
-            <a:pPr>
-              <a:lnSpc>
-                <a:spcPct val="120000"/>
-              </a:lnSpc>
-              <a:spcAft>
-                <a:spcPts val="1000"/>
-              </a:spcAft>
-            </a:pPr>
-            <a:r>
-              <a:rPr sz="1500" b="1">
-                <a:solidFill>
-                  <a:srgbClr val="0F172A"/>
-                </a:solidFill>
-                <a:latin typeface="Arial"/>
-              </a:rPr>
-              <a:t>Measure the assumptions. </a:t>
-            </a:r>
-            <a:r>
-              <a:rPr sz="1500">
-                <a:solidFill>
-                  <a:srgbClr val="475569"/>
-                </a:solidFill>
-                <a:latin typeface="Arial"/>
-              </a:rPr>
-              <a:t>The capacity model uses estimated handling times. Real ones come from time tracking, and would turn the planning view from a shape into a number.</a:t>
-            </a:r>
-          </a:p>
-        </p:txBody>
-      </p:sp>
-    </p:spTree>
-  </p:cSld>
-  <p:clrMapOvr>
-    <a:masterClrMapping/>
-  </p:clrMapOvr>
-</p:sld>
-</file>
-
-<file path=ppt/slides/slide15.xml><?xml version="1.0" encoding="utf-8"?>
-<p:sld xmlns:a="http://schemas.openxmlformats.org/drawingml/2006/main" xmlns:p="http://schemas.openxmlformats.org/presentationml/2006/main" xmlns:r="http://schemas.openxmlformats.org/officeDocument/2006/relationships">
-  <p:cSld>
-    <p:bg>
-      <p:bgPr>
-        <a:solidFill>
-          <a:srgbClr val="FFFFFF"/>
-        </a:solidFill>
-        <a:effectLst/>
-      </p:bgPr>
-    </p:bg>
-    <p:spTree>
-      <p:nvGrpSpPr>
-        <p:cNvPr id="1" name=""/>
-        <p:cNvGrpSpPr/>
-        <p:nvPr/>
-      </p:nvGrpSpPr>
-      <p:grpSpPr/>
-      <p:sp>
-        <p:nvSpPr>
-          <p:cNvPr id="2" name="Rounded Rectangle 1"/>
-          <p:cNvSpPr/>
-          <p:nvPr/>
-        </p:nvSpPr>
-        <p:spPr>
-          <a:xfrm>
-            <a:off x="0" y="0"/>
-            <a:ext cx="256032" cy="6858000"/>
-          </a:xfrm>
-          <a:prstGeom prst="roundRect">
-            <a:avLst>
-              <a:gd name="adj" fmla="val 6000"/>
-            </a:avLst>
-          </a:prstGeom>
-          <a:solidFill>
-            <a:srgbClr val="1E3A8A"/>
-          </a:solidFill>
-          <a:ln>
-            <a:noFill/>
-          </a:ln>
-          <a:effectLst/>
-        </p:spPr>
-        <p:style>
-          <a:lnRef idx="1">
-            <a:schemeClr val="accent1"/>
-          </a:lnRef>
-          <a:fillRef idx="3">
-            <a:schemeClr val="accent1"/>
-          </a:fillRef>
-          <a:effectRef idx="2">
-            <a:schemeClr val="accent1"/>
-          </a:effectRef>
-          <a:fontRef idx="minor">
-            <a:schemeClr val="lt1"/>
-          </a:fontRef>
-        </p:style>
-        <p:txBody>
-          <a:bodyPr rtlCol="0" anchor="ctr"/>
-          <a:lstStyle/>
-          <a:p>
-            <a:pPr algn="ctr"/>
-          </a:p>
-        </p:txBody>
-      </p:sp>
-      <p:sp>
-        <p:nvSpPr>
-          <p:cNvPr id="3" name="TextBox 2"/>
-          <p:cNvSpPr txBox="1"/>
-          <p:nvPr/>
-        </p:nvSpPr>
-        <p:spPr>
-          <a:xfrm>
-            <a:off x="1005840" y="1463040"/>
-            <a:ext cx="10058400" cy="365760"/>
-          </a:xfrm>
-          <a:prstGeom prst="rect">
-            <a:avLst/>
-          </a:prstGeom>
-          <a:noFill/>
-        </p:spPr>
-        <p:txBody>
-          <a:bodyPr wrap="square" lIns="0" rIns="0" tIns="0" bIns="0">
-            <a:spAutoFit/>
-          </a:bodyPr>
-          <a:lstStyle/>
-          <a:p>
-            <a:pPr algn="l">
-              <a:lnSpc>
-                <a:spcPct val="115000"/>
-              </a:lnSpc>
-              <a:spcAft>
-                <a:spcPts val="600"/>
-              </a:spcAft>
-            </a:pPr>
-            <a:r>
-              <a:rPr sz="1300" b="1">
-                <a:solidFill>
-                  <a:srgbClr val="94A3B8"/>
-                </a:solidFill>
-                <a:latin typeface="Arial"/>
-              </a:rPr>
-              <a:t>DEMO</a:t>
-            </a:r>
-          </a:p>
-        </p:txBody>
-      </p:sp>
-      <p:sp>
-        <p:nvSpPr>
-          <p:cNvPr id="4" name="TextBox 3"/>
-          <p:cNvSpPr txBox="1"/>
-          <p:nvPr/>
-        </p:nvSpPr>
-        <p:spPr>
-          <a:xfrm>
-            <a:off x="1005840" y="1874519"/>
-            <a:ext cx="10058400" cy="822960"/>
-          </a:xfrm>
-          <a:prstGeom prst="rect">
-            <a:avLst/>
-          </a:prstGeom>
-          <a:noFill/>
-        </p:spPr>
-        <p:txBody>
-          <a:bodyPr wrap="square" lIns="0" rIns="0" tIns="0" bIns="0">
-            <a:spAutoFit/>
-          </a:bodyPr>
-          <a:lstStyle/>
-          <a:p>
-            <a:pPr algn="l">
-              <a:lnSpc>
-                <a:spcPct val="115000"/>
-              </a:lnSpc>
-              <a:spcAft>
-                <a:spcPts val="600"/>
-              </a:spcAft>
-            </a:pPr>
-            <a:r>
-              <a:rPr sz="4400" b="1">
-                <a:solidFill>
-                  <a:srgbClr val="0F172A"/>
-                </a:solidFill>
-                <a:latin typeface="Arial"/>
-              </a:rPr>
-              <a:t>Let me show you.</a:t>
-            </a:r>
-          </a:p>
-        </p:txBody>
-      </p:sp>
-      <p:sp>
-        <p:nvSpPr>
-          <p:cNvPr id="5" name="TextBox 4"/>
-          <p:cNvSpPr txBox="1"/>
-          <p:nvPr/>
-        </p:nvSpPr>
-        <p:spPr>
-          <a:xfrm>
-            <a:off x="1005840" y="2971800"/>
-            <a:ext cx="365760" cy="365760"/>
-          </a:xfrm>
-          <a:prstGeom prst="rect">
-            <a:avLst/>
-          </a:prstGeom>
-          <a:noFill/>
-        </p:spPr>
-        <p:txBody>
-          <a:bodyPr wrap="square" lIns="0" rIns="0" tIns="0" bIns="0">
-            <a:spAutoFit/>
-          </a:bodyPr>
-          <a:lstStyle/>
-          <a:p>
-            <a:pPr algn="l">
-              <a:lnSpc>
-                <a:spcPct val="115000"/>
-              </a:lnSpc>
-              <a:spcAft>
-                <a:spcPts val="600"/>
-              </a:spcAft>
-            </a:pPr>
-            <a:r>
-              <a:rPr sz="1500" b="1">
-                <a:solidFill>
-                  <a:srgbClr val="1E3A8A"/>
-                </a:solidFill>
-                <a:latin typeface="Arial"/>
-              </a:rPr>
-              <a:t>1</a:t>
-            </a:r>
-          </a:p>
-        </p:txBody>
-      </p:sp>
-      <p:sp>
-        <p:nvSpPr>
-          <p:cNvPr id="6" name="TextBox 5"/>
-          <p:cNvSpPr txBox="1"/>
-          <p:nvPr/>
-        </p:nvSpPr>
-        <p:spPr>
-          <a:xfrm>
-            <a:off x="1463040" y="2971800"/>
-            <a:ext cx="9692640" cy="365760"/>
-          </a:xfrm>
-          <a:prstGeom prst="rect">
-            <a:avLst/>
-          </a:prstGeom>
-          <a:noFill/>
-        </p:spPr>
-        <p:txBody>
-          <a:bodyPr wrap="square" lIns="0" rIns="0" tIns="0" bIns="0">
-            <a:spAutoFit/>
-          </a:bodyPr>
-          <a:lstStyle/>
-          <a:p>
-            <a:pPr algn="l">
-              <a:lnSpc>
-                <a:spcPct val="115000"/>
-              </a:lnSpc>
-              <a:spcAft>
-                <a:spcPts val="600"/>
-              </a:spcAft>
-            </a:pPr>
-            <a:r>
-              <a:rPr sz="1600" b="0">
-                <a:solidFill>
-                  <a:srgbClr val="475569"/>
-                </a:solidFill>
-                <a:latin typeface="Arial"/>
-              </a:rPr>
-              <a:t>Public walkthrough — answer "intrastate only" and watch 10 requirements become 5</a:t>
-            </a:r>
-          </a:p>
-        </p:txBody>
-      </p:sp>
-      <p:sp>
-        <p:nvSpPr>
-          <p:cNvPr id="7" name="TextBox 6"/>
-          <p:cNvSpPr txBox="1"/>
-          <p:nvPr/>
-        </p:nvSpPr>
-        <p:spPr>
-          <a:xfrm>
-            <a:off x="1005840" y="3447288"/>
-            <a:ext cx="365760" cy="365760"/>
-          </a:xfrm>
-          <a:prstGeom prst="rect">
-            <a:avLst/>
-          </a:prstGeom>
-          <a:noFill/>
-        </p:spPr>
-        <p:txBody>
-          <a:bodyPr wrap="square" lIns="0" rIns="0" tIns="0" bIns="0">
-            <a:spAutoFit/>
-          </a:bodyPr>
-          <a:lstStyle/>
-          <a:p>
-            <a:pPr algn="l">
-              <a:lnSpc>
-                <a:spcPct val="115000"/>
-              </a:lnSpc>
-              <a:spcAft>
-                <a:spcPts val="600"/>
-              </a:spcAft>
-            </a:pPr>
-            <a:r>
-              <a:rPr sz="1500" b="1">
-                <a:solidFill>
-                  <a:srgbClr val="1E3A8A"/>
-                </a:solidFill>
-                <a:latin typeface="Arial"/>
-              </a:rPr>
-              <a:t>2</a:t>
-            </a:r>
-          </a:p>
-        </p:txBody>
-      </p:sp>
-      <p:sp>
-        <p:nvSpPr>
-          <p:cNvPr id="8" name="TextBox 7"/>
-          <p:cNvSpPr txBox="1"/>
-          <p:nvPr/>
-        </p:nvSpPr>
-        <p:spPr>
-          <a:xfrm>
-            <a:off x="1463040" y="3447288"/>
-            <a:ext cx="9692640" cy="365760"/>
-          </a:xfrm>
-          <a:prstGeom prst="rect">
-            <a:avLst/>
-          </a:prstGeom>
-          <a:noFill/>
-        </p:spPr>
-        <p:txBody>
-          <a:bodyPr wrap="square" lIns="0" rIns="0" tIns="0" bIns="0">
-            <a:spAutoFit/>
-          </a:bodyPr>
-          <a:lstStyle/>
-          <a:p>
-            <a:pPr algn="l">
-              <a:lnSpc>
-                <a:spcPct val="115000"/>
-              </a:lnSpc>
-              <a:spcAft>
-                <a:spcPts val="600"/>
-              </a:spcAft>
-            </a:pPr>
-            <a:r>
-              <a:rPr sz="1600" b="0">
-                <a:solidFill>
-                  <a:srgbClr val="475569"/>
-                </a:solidFill>
-                <a:latin typeface="Arial"/>
-              </a:rPr>
-              <a:t>Dashboard — the ranked work queue and what a parked truck actually costs</a:t>
-            </a:r>
-          </a:p>
-        </p:txBody>
-      </p:sp>
-      <p:sp>
-        <p:nvSpPr>
-          <p:cNvPr id="9" name="TextBox 8"/>
-          <p:cNvSpPr txBox="1"/>
-          <p:nvPr/>
-        </p:nvSpPr>
-        <p:spPr>
-          <a:xfrm>
-            <a:off x="1005840" y="3922776"/>
-            <a:ext cx="365760" cy="365760"/>
-          </a:xfrm>
-          <a:prstGeom prst="rect">
-            <a:avLst/>
-          </a:prstGeom>
-          <a:noFill/>
-        </p:spPr>
-        <p:txBody>
-          <a:bodyPr wrap="square" lIns="0" rIns="0" tIns="0" bIns="0">
-            <a:spAutoFit/>
-          </a:bodyPr>
-          <a:lstStyle/>
-          <a:p>
-            <a:pPr algn="l">
-              <a:lnSpc>
-                <a:spcPct val="115000"/>
-              </a:lnSpc>
-              <a:spcAft>
-                <a:spcPts val="600"/>
-              </a:spcAft>
-            </a:pPr>
-            <a:r>
-              <a:rPr sz="1500" b="1">
-                <a:solidFill>
-                  <a:srgbClr val="1E3A8A"/>
-                </a:solidFill>
-                <a:latin typeface="Arial"/>
-              </a:rPr>
-              <a:t>3</a:t>
-            </a:r>
-          </a:p>
-        </p:txBody>
-      </p:sp>
-      <p:sp>
-        <p:nvSpPr>
-          <p:cNvPr id="10" name="TextBox 9"/>
-          <p:cNvSpPr txBox="1"/>
-          <p:nvPr/>
-        </p:nvSpPr>
-        <p:spPr>
-          <a:xfrm>
-            <a:off x="1463040" y="3922776"/>
-            <a:ext cx="9692640" cy="365760"/>
-          </a:xfrm>
-          <a:prstGeom prst="rect">
-            <a:avLst/>
-          </a:prstGeom>
-          <a:noFill/>
-        </p:spPr>
-        <p:txBody>
-          <a:bodyPr wrap="square" lIns="0" rIns="0" tIns="0" bIns="0">
-            <a:spAutoFit/>
-          </a:bodyPr>
-          <a:lstStyle/>
-          <a:p>
-            <a:pPr algn="l">
-              <a:lnSpc>
-                <a:spcPct val="115000"/>
-              </a:lnSpc>
-              <a:spcAft>
-                <a:spcPts val="600"/>
-              </a:spcAft>
-            </a:pPr>
-            <a:r>
-              <a:rPr sz="1600" b="0">
-                <a:solidFill>
-                  <a:srgbClr val="475569"/>
-                </a:solidFill>
-                <a:latin typeface="Arial"/>
-              </a:rPr>
-              <a:t>Unit 101 — the chain, the out-of-service date, and the what-if slider breaking it</a:t>
-            </a:r>
-          </a:p>
-        </p:txBody>
-      </p:sp>
-      <p:sp>
-        <p:nvSpPr>
-          <p:cNvPr id="11" name="TextBox 10"/>
-          <p:cNvSpPr txBox="1"/>
-          <p:nvPr/>
-        </p:nvSpPr>
-        <p:spPr>
-          <a:xfrm>
-            <a:off x="1005840" y="4398264"/>
-            <a:ext cx="365760" cy="365760"/>
-          </a:xfrm>
-          <a:prstGeom prst="rect">
-            <a:avLst/>
-          </a:prstGeom>
-          <a:noFill/>
-        </p:spPr>
-        <p:txBody>
-          <a:bodyPr wrap="square" lIns="0" rIns="0" tIns="0" bIns="0">
-            <a:spAutoFit/>
-          </a:bodyPr>
-          <a:lstStyle/>
-          <a:p>
-            <a:pPr algn="l">
-              <a:lnSpc>
-                <a:spcPct val="115000"/>
-              </a:lnSpc>
-              <a:spcAft>
-                <a:spcPts val="600"/>
-              </a:spcAft>
-            </a:pPr>
-            <a:r>
-              <a:rPr sz="1500" b="1">
-                <a:solidFill>
-                  <a:srgbClr val="1E3A8A"/>
-                </a:solidFill>
-                <a:latin typeface="Arial"/>
-              </a:rPr>
-              <a:t>4</a:t>
-            </a:r>
-          </a:p>
-        </p:txBody>
-      </p:sp>
-      <p:sp>
-        <p:nvSpPr>
-          <p:cNvPr id="12" name="TextBox 11"/>
-          <p:cNvSpPr txBox="1"/>
-          <p:nvPr/>
-        </p:nvSpPr>
-        <p:spPr>
-          <a:xfrm>
-            <a:off x="1463040" y="4398264"/>
-            <a:ext cx="9692640" cy="365760"/>
-          </a:xfrm>
-          <a:prstGeom prst="rect">
-            <a:avLst/>
-          </a:prstGeom>
-          <a:noFill/>
-        </p:spPr>
-        <p:txBody>
-          <a:bodyPr wrap="square" lIns="0" rIns="0" tIns="0" bIns="0">
-            <a:spAutoFit/>
-          </a:bodyPr>
-          <a:lstStyle/>
-          <a:p>
-            <a:pPr algn="l">
-              <a:lnSpc>
-                <a:spcPct val="115000"/>
-              </a:lnSpc>
-              <a:spcAft>
-                <a:spcPts val="600"/>
-              </a:spcAft>
-            </a:pPr>
-            <a:r>
-              <a:rPr sz="1600" b="0">
-                <a:solidFill>
-                  <a:srgbClr val="475569"/>
-                </a:solidFill>
-                <a:latin typeface="Arial"/>
-              </a:rPr>
-              <a:t>Rules — where every date came from, and which two need review</a:t>
-            </a:r>
-          </a:p>
-        </p:txBody>
-      </p:sp>
-      <p:sp>
-        <p:nvSpPr>
-          <p:cNvPr id="13" name="TextBox 12"/>
-          <p:cNvSpPr txBox="1"/>
-          <p:nvPr/>
-        </p:nvSpPr>
-        <p:spPr>
-          <a:xfrm>
-            <a:off x="1005840" y="4873752"/>
-            <a:ext cx="365760" cy="365760"/>
-          </a:xfrm>
-          <a:prstGeom prst="rect">
-            <a:avLst/>
-          </a:prstGeom>
-          <a:noFill/>
-        </p:spPr>
-        <p:txBody>
-          <a:bodyPr wrap="square" lIns="0" rIns="0" tIns="0" bIns="0">
-            <a:spAutoFit/>
-          </a:bodyPr>
-          <a:lstStyle/>
-          <a:p>
-            <a:pPr algn="l">
-              <a:lnSpc>
-                <a:spcPct val="115000"/>
-              </a:lnSpc>
-              <a:spcAft>
-                <a:spcPts val="600"/>
-              </a:spcAft>
-            </a:pPr>
-            <a:r>
-              <a:rPr sz="1500" b="1">
-                <a:solidFill>
-                  <a:srgbClr val="1E3A8A"/>
-                </a:solidFill>
-                <a:latin typeface="Arial"/>
-              </a:rPr>
-              <a:t>5</a:t>
-            </a:r>
-          </a:p>
-        </p:txBody>
-      </p:sp>
-      <p:sp>
-        <p:nvSpPr>
-          <p:cNvPr id="14" name="TextBox 13"/>
-          <p:cNvSpPr txBox="1"/>
-          <p:nvPr/>
-        </p:nvSpPr>
-        <p:spPr>
-          <a:xfrm>
-            <a:off x="1463040" y="4873752"/>
-            <a:ext cx="9692640" cy="365760"/>
-          </a:xfrm>
-          <a:prstGeom prst="rect">
-            <a:avLst/>
-          </a:prstGeom>
-          <a:noFill/>
-        </p:spPr>
-        <p:txBody>
-          <a:bodyPr wrap="square" lIns="0" rIns="0" tIns="0" bIns="0">
-            <a:spAutoFit/>
-          </a:bodyPr>
-          <a:lstStyle/>
-          <a:p>
-            <a:pPr algn="l">
-              <a:lnSpc>
-                <a:spcPct val="115000"/>
-              </a:lnSpc>
-              <a:spcAft>
-                <a:spcPts val="600"/>
-              </a:spcAft>
-            </a:pPr>
-            <a:r>
-              <a:rPr sz="1600" b="0">
-                <a:solidFill>
-                  <a:srgbClr val="475569"/>
-                </a:solidFill>
-                <a:latin typeface="Arial"/>
-              </a:rPr>
-              <a:t>Client portal — send a document, watch it get read back</a:t>
-            </a:r>
-          </a:p>
-        </p:txBody>
-      </p:sp>
-      <p:sp>
-        <p:nvSpPr>
-          <p:cNvPr id="15" name="TextBox 14"/>
-          <p:cNvSpPr txBox="1"/>
-          <p:nvPr/>
-        </p:nvSpPr>
-        <p:spPr>
-          <a:xfrm>
-            <a:off x="1005840" y="5349240"/>
-            <a:ext cx="365760" cy="365760"/>
-          </a:xfrm>
-          <a:prstGeom prst="rect">
-            <a:avLst/>
-          </a:prstGeom>
-          <a:noFill/>
-        </p:spPr>
-        <p:txBody>
-          <a:bodyPr wrap="square" lIns="0" rIns="0" tIns="0" bIns="0">
-            <a:spAutoFit/>
-          </a:bodyPr>
-          <a:lstStyle/>
-          <a:p>
-            <a:pPr algn="l">
-              <a:lnSpc>
-                <a:spcPct val="115000"/>
-              </a:lnSpc>
-              <a:spcAft>
-                <a:spcPts val="600"/>
-              </a:spcAft>
-            </a:pPr>
-            <a:r>
-              <a:rPr sz="1500" b="1">
-                <a:solidFill>
-                  <a:srgbClr val="1E3A8A"/>
-                </a:solidFill>
-                <a:latin typeface="Arial"/>
-              </a:rPr>
-              <a:t>6</a:t>
-            </a:r>
-          </a:p>
-        </p:txBody>
-      </p:sp>
-      <p:sp>
-        <p:nvSpPr>
-          <p:cNvPr id="16" name="TextBox 15"/>
-          <p:cNvSpPr txBox="1"/>
-          <p:nvPr/>
-        </p:nvSpPr>
-        <p:spPr>
-          <a:xfrm>
-            <a:off x="1463040" y="5349240"/>
-            <a:ext cx="9692640" cy="365760"/>
-          </a:xfrm>
-          <a:prstGeom prst="rect">
-            <a:avLst/>
-          </a:prstGeom>
-          <a:noFill/>
-        </p:spPr>
-        <p:txBody>
-          <a:bodyPr wrap="square" lIns="0" rIns="0" tIns="0" bIns="0">
-            <a:spAutoFit/>
-          </a:bodyPr>
-          <a:lstStyle/>
-          <a:p>
-            <a:pPr algn="l">
-              <a:lnSpc>
-                <a:spcPct val="115000"/>
-              </a:lnSpc>
-              <a:spcAft>
-                <a:spcPts val="600"/>
-              </a:spcAft>
-            </a:pPr>
-            <a:r>
-              <a:rPr sz="1600" b="0">
-                <a:solidFill>
-                  <a:srgbClr val="475569"/>
-                </a:solidFill>
-                <a:latin typeface="Arial"/>
-              </a:rPr>
-              <a:t>Scans — what was read set against what the record says</a:t>
+              <a:t>The client's phone — send a document, watch it get read back</a:t>
             </a:r>
           </a:p>
         </p:txBody>
@@ -6956,7 +5121,7 @@
                 </a:solidFill>
                 <a:latin typeface="Arial"/>
               </a:rPr>
-              <a:t>WHAT I LEARNED FIRST</a:t>
+              <a:t>THE STACK</a:t>
             </a:r>
           </a:p>
         </p:txBody>
@@ -6998,128 +5163,21 @@
                 </a:solidFill>
                 <a:latin typeface="Arial"/>
               </a:rPr>
-              <a:t>Sky Transport Solutions is not a trucking company.</a:t>
-            </a:r>
-          </a:p>
-        </p:txBody>
-      </p:sp>
-      <p:sp>
-        <p:nvSpPr>
-          <p:cNvPr id="5" name="TextBox 4"/>
-          <p:cNvSpPr txBox="1"/>
-          <p:nvPr/>
-        </p:nvSpPr>
-        <p:spPr>
-          <a:xfrm>
-            <a:off x="777240" y="1828800"/>
-            <a:ext cx="10607040" cy="4114800"/>
-          </a:xfrm>
-          <a:prstGeom prst="rect">
-            <a:avLst/>
-          </a:prstGeom>
-          <a:noFill/>
-        </p:spPr>
-        <p:txBody>
-          <a:bodyPr wrap="square" lIns="0" rIns="0" tIns="0" bIns="0">
-            <a:spAutoFit/>
-          </a:bodyPr>
-          <a:lstStyle/>
-          <a:p>
-            <a:pPr>
-              <a:lnSpc>
-                <a:spcPct val="120000"/>
-              </a:lnSpc>
-              <a:spcAft>
-                <a:spcPts val="1000"/>
-              </a:spcAft>
-            </a:pPr>
-            <a:r>
-              <a:rPr sz="1700" b="1">
-                <a:solidFill>
-                  <a:srgbClr val="0F172A"/>
-                </a:solidFill>
-                <a:latin typeface="Arial"/>
-              </a:rPr>
-              <a:t>They are the outsourced paperwork department </a:t>
-            </a:r>
-            <a:r>
-              <a:rPr sz="1700">
-                <a:solidFill>
-                  <a:srgbClr val="475569"/>
-                </a:solidFill>
-                <a:latin typeface="Arial"/>
-              </a:rPr>
-              <a:t>for ~18,000 motor carriers — about 25 people holding other people's compliance obligations.</a:t>
-            </a:r>
-          </a:p>
-          <a:p>
-            <a:pPr>
-              <a:lnSpc>
-                <a:spcPct val="120000"/>
-              </a:lnSpc>
-              <a:spcAft>
-                <a:spcPts val="1000"/>
-              </a:spcAft>
-            </a:pPr>
-            <a:r>
-              <a:rPr sz="1700" b="1">
-                <a:solidFill>
-                  <a:srgbClr val="0F172A"/>
-                </a:solidFill>
-                <a:latin typeface="Arial"/>
-              </a:rPr>
-              <a:t>Their customers are owner-operators and small fleets. </a:t>
-            </a:r>
-            <a:r>
-              <a:rPr sz="1700">
-                <a:solidFill>
-                  <a:srgbClr val="475569"/>
-                </a:solidFill>
-                <a:latin typeface="Arial"/>
-              </a:rPr>
-              <a:t>The person who owns the truck is driving it 11 hours a day. He is not logging into seven government portals.</a:t>
-            </a:r>
-          </a:p>
-          <a:p>
-            <a:pPr>
-              <a:lnSpc>
-                <a:spcPct val="120000"/>
-              </a:lnSpc>
-              <a:spcAft>
-                <a:spcPts val="1000"/>
-              </a:spcAft>
-            </a:pPr>
-            <a:r>
-              <a:rPr sz="1700" b="1">
-                <a:solidFill>
-                  <a:srgbClr val="0F172A"/>
-                </a:solidFill>
-                <a:latin typeface="Arial"/>
-              </a:rPr>
-              <a:t>The product is memory and follow-through. </a:t>
-            </a:r>
-            <a:r>
-              <a:rPr sz="1700">
-                <a:solidFill>
-                  <a:srgbClr val="475569"/>
-                </a:solidFill>
-                <a:latin typeface="Arial"/>
-              </a:rPr>
-              <a:t>Membership tiers — Silver $199, Gold $299, Diamond $399 per truck per year — are sorted by how many renewals Sky remembers for you.</a:t>
-            </a:r>
-          </a:p>
-        </p:txBody>
-      </p:sp>
-      <p:sp>
-        <p:nvSpPr>
-          <p:cNvPr id="6" name="Rounded Rectangle 5"/>
+              <a:t>What I built it with.</a:t>
+            </a:r>
+          </a:p>
+        </p:txBody>
+      </p:sp>
+      <p:sp>
+        <p:nvSpPr>
+          <p:cNvPr id="5" name="Rounded Rectangle 4"/>
           <p:cNvSpPr/>
           <p:nvPr/>
         </p:nvSpPr>
         <p:spPr>
           <a:xfrm>
-            <a:off x="777240" y="4480560"/>
-            <a:ext cx="10607040" cy="1280160"/>
+            <a:off x="777240" y="1874519"/>
+            <a:ext cx="10607040" cy="749808"/>
           </a:xfrm>
           <a:prstGeom prst="roundRect">
             <a:avLst>
@@ -7160,14 +5218,14 @@
       </p:sp>
       <p:sp>
         <p:nvSpPr>
-          <p:cNvPr id="7" name="TextBox 6"/>
+          <p:cNvPr id="6" name="TextBox 5"/>
           <p:cNvSpPr txBox="1"/>
           <p:nvPr/>
         </p:nvSpPr>
         <p:spPr>
           <a:xfrm>
-            <a:off x="1097280" y="4754880"/>
-            <a:ext cx="10058400" cy="411480"/>
+            <a:off x="1051560" y="2075687"/>
+            <a:ext cx="4023360" cy="365760"/>
           </a:xfrm>
           <a:prstGeom prst="rect">
             <a:avLst/>
@@ -7189,27 +5247,27 @@
               </a:spcAft>
             </a:pPr>
             <a:r>
-              <a:rPr sz="1800" b="1">
-                <a:solidFill>
-                  <a:srgbClr val="1E3A8A"/>
-                </a:solidFill>
-                <a:latin typeface="Arial"/>
-              </a:rPr>
-              <a:t>This is a deadline liability business.</a:t>
-            </a:r>
-          </a:p>
-        </p:txBody>
-      </p:sp>
-      <p:sp>
-        <p:nvSpPr>
-          <p:cNvPr id="8" name="TextBox 7"/>
+              <a:rPr sz="1500" b="1">
+                <a:solidFill>
+                  <a:srgbClr val="0F172A"/>
+                </a:solidFill>
+                <a:latin typeface="Arial"/>
+              </a:rPr>
+              <a:t>Next.js + React</a:t>
+            </a:r>
+          </a:p>
+        </p:txBody>
+      </p:sp>
+      <p:sp>
+        <p:nvSpPr>
+          <p:cNvPr id="7" name="TextBox 6"/>
           <p:cNvSpPr txBox="1"/>
           <p:nvPr/>
         </p:nvSpPr>
         <p:spPr>
           <a:xfrm>
-            <a:off x="1097280" y="5193792"/>
-            <a:ext cx="10058400" cy="457200"/>
+            <a:off x="5074920" y="2075687"/>
+            <a:ext cx="6126480" cy="365760"/>
           </a:xfrm>
           <a:prstGeom prst="rect">
             <a:avLst/>
@@ -7231,13 +5289,487 @@
               </a:spcAft>
             </a:pPr>
             <a:r>
+              <a:rPr sz="1500" b="0">
+                <a:solidFill>
+                  <a:srgbClr val="475569"/>
+                </a:solidFill>
+                <a:latin typeface="Arial"/>
+              </a:rPr>
+              <a:t>Pages query the database directly. No API layer to maintain.</a:t>
+            </a:r>
+          </a:p>
+        </p:txBody>
+      </p:sp>
+      <p:sp>
+        <p:nvSpPr>
+          <p:cNvPr id="8" name="TextBox 7"/>
+          <p:cNvSpPr txBox="1"/>
+          <p:nvPr/>
+        </p:nvSpPr>
+        <p:spPr>
+          <a:xfrm>
+            <a:off x="1051560" y="2880359"/>
+            <a:ext cx="4023360" cy="365760"/>
+          </a:xfrm>
+          <a:prstGeom prst="rect">
+            <a:avLst/>
+          </a:prstGeom>
+          <a:noFill/>
+        </p:spPr>
+        <p:txBody>
+          <a:bodyPr wrap="square" lIns="0" rIns="0" tIns="0" bIns="0">
+            <a:spAutoFit/>
+          </a:bodyPr>
+          <a:lstStyle/>
+          <a:p>
+            <a:pPr algn="l">
+              <a:lnSpc>
+                <a:spcPct val="115000"/>
+              </a:lnSpc>
+              <a:spcAft>
+                <a:spcPts val="600"/>
+              </a:spcAft>
+            </a:pPr>
+            <a:r>
+              <a:rPr sz="1500" b="1">
+                <a:solidFill>
+                  <a:srgbClr val="0F172A"/>
+                </a:solidFill>
+                <a:latin typeface="Arial"/>
+              </a:rPr>
+              <a:t>PostgreSQL + Prisma</a:t>
+            </a:r>
+          </a:p>
+        </p:txBody>
+      </p:sp>
+      <p:sp>
+        <p:nvSpPr>
+          <p:cNvPr id="9" name="TextBox 8"/>
+          <p:cNvSpPr txBox="1"/>
+          <p:nvPr/>
+        </p:nvSpPr>
+        <p:spPr>
+          <a:xfrm>
+            <a:off x="5074920" y="2880359"/>
+            <a:ext cx="6126480" cy="365760"/>
+          </a:xfrm>
+          <a:prstGeom prst="rect">
+            <a:avLst/>
+          </a:prstGeom>
+          <a:noFill/>
+        </p:spPr>
+        <p:txBody>
+          <a:bodyPr wrap="square" lIns="0" rIns="0" tIns="0" bIns="0">
+            <a:spAutoFit/>
+          </a:bodyPr>
+          <a:lstStyle/>
+          <a:p>
+            <a:pPr algn="l">
+              <a:lnSpc>
+                <a:spcPct val="115000"/>
+              </a:lnSpc>
+              <a:spcAft>
+                <a:spcPts val="600"/>
+              </a:spcAft>
+            </a:pPr>
+            <a:r>
+              <a:rPr sz="1500" b="0">
+                <a:solidFill>
+                  <a:srgbClr val="475569"/>
+                </a:solidFill>
+                <a:latin typeface="Arial"/>
+              </a:rPr>
+              <a:t>Real relations and constraints. Migrations I can review.</a:t>
+            </a:r>
+          </a:p>
+        </p:txBody>
+      </p:sp>
+      <p:sp>
+        <p:nvSpPr>
+          <p:cNvPr id="10" name="Rounded Rectangle 9"/>
+          <p:cNvSpPr/>
+          <p:nvPr/>
+        </p:nvSpPr>
+        <p:spPr>
+          <a:xfrm>
+            <a:off x="777240" y="3483863"/>
+            <a:ext cx="10607040" cy="749808"/>
+          </a:xfrm>
+          <a:prstGeom prst="roundRect">
+            <a:avLst>
+              <a:gd name="adj" fmla="val 6000"/>
+            </a:avLst>
+          </a:prstGeom>
+          <a:solidFill>
+            <a:srgbClr val="F6F7F9"/>
+          </a:solidFill>
+          <a:ln w="12700">
+            <a:solidFill>
+              <a:srgbClr val="E2E8F0"/>
+            </a:solidFill>
+          </a:ln>
+          <a:effectLst/>
+        </p:spPr>
+        <p:style>
+          <a:lnRef idx="1">
+            <a:schemeClr val="accent1"/>
+          </a:lnRef>
+          <a:fillRef idx="3">
+            <a:schemeClr val="accent1"/>
+          </a:fillRef>
+          <a:effectRef idx="2">
+            <a:schemeClr val="accent1"/>
+          </a:effectRef>
+          <a:fontRef idx="minor">
+            <a:schemeClr val="lt1"/>
+          </a:fontRef>
+        </p:style>
+        <p:txBody>
+          <a:bodyPr rtlCol="0" anchor="ctr"/>
+          <a:lstStyle/>
+          <a:p>
+            <a:pPr algn="ctr"/>
+          </a:p>
+        </p:txBody>
+      </p:sp>
+      <p:sp>
+        <p:nvSpPr>
+          <p:cNvPr id="11" name="TextBox 10"/>
+          <p:cNvSpPr txBox="1"/>
+          <p:nvPr/>
+        </p:nvSpPr>
+        <p:spPr>
+          <a:xfrm>
+            <a:off x="1051560" y="3685031"/>
+            <a:ext cx="4023360" cy="365760"/>
+          </a:xfrm>
+          <a:prstGeom prst="rect">
+            <a:avLst/>
+          </a:prstGeom>
+          <a:noFill/>
+        </p:spPr>
+        <p:txBody>
+          <a:bodyPr wrap="square" lIns="0" rIns="0" tIns="0" bIns="0">
+            <a:spAutoFit/>
+          </a:bodyPr>
+          <a:lstStyle/>
+          <a:p>
+            <a:pPr algn="l">
+              <a:lnSpc>
+                <a:spcPct val="115000"/>
+              </a:lnSpc>
+              <a:spcAft>
+                <a:spcPts val="600"/>
+              </a:spcAft>
+            </a:pPr>
+            <a:r>
+              <a:rPr sz="1500" b="1">
+                <a:solidFill>
+                  <a:srgbClr val="0F172A"/>
+                </a:solidFill>
+                <a:latin typeface="Arial"/>
+              </a:rPr>
+              <a:t>Raw SQL for aggregates</a:t>
+            </a:r>
+          </a:p>
+        </p:txBody>
+      </p:sp>
+      <p:sp>
+        <p:nvSpPr>
+          <p:cNvPr id="12" name="TextBox 11"/>
+          <p:cNvSpPr txBox="1"/>
+          <p:nvPr/>
+        </p:nvSpPr>
+        <p:spPr>
+          <a:xfrm>
+            <a:off x="5074920" y="3685031"/>
+            <a:ext cx="6126480" cy="365760"/>
+          </a:xfrm>
+          <a:prstGeom prst="rect">
+            <a:avLst/>
+          </a:prstGeom>
+          <a:noFill/>
+        </p:spPr>
+        <p:txBody>
+          <a:bodyPr wrap="square" lIns="0" rIns="0" tIns="0" bIns="0">
+            <a:spAutoFit/>
+          </a:bodyPr>
+          <a:lstStyle/>
+          <a:p>
+            <a:pPr algn="l">
+              <a:lnSpc>
+                <a:spcPct val="115000"/>
+              </a:lnSpc>
+              <a:spcAft>
+                <a:spcPts val="600"/>
+              </a:spcAft>
+            </a:pPr>
+            <a:r>
+              <a:rPr sz="1500" b="0">
+                <a:solidFill>
+                  <a:srgbClr val="475569"/>
+                </a:solidFill>
+                <a:latin typeface="Arial"/>
+              </a:rPr>
+              <a:t>Ranking and rollups read better as SQL than as ORM calls.</a:t>
+            </a:r>
+          </a:p>
+        </p:txBody>
+      </p:sp>
+      <p:sp>
+        <p:nvSpPr>
+          <p:cNvPr id="13" name="TextBox 12"/>
+          <p:cNvSpPr txBox="1"/>
+          <p:nvPr/>
+        </p:nvSpPr>
+        <p:spPr>
+          <a:xfrm>
+            <a:off x="1051560" y="4489703"/>
+            <a:ext cx="4023360" cy="365760"/>
+          </a:xfrm>
+          <a:prstGeom prst="rect">
+            <a:avLst/>
+          </a:prstGeom>
+          <a:noFill/>
+        </p:spPr>
+        <p:txBody>
+          <a:bodyPr wrap="square" lIns="0" rIns="0" tIns="0" bIns="0">
+            <a:spAutoFit/>
+          </a:bodyPr>
+          <a:lstStyle/>
+          <a:p>
+            <a:pPr algn="l">
+              <a:lnSpc>
+                <a:spcPct val="115000"/>
+              </a:lnSpc>
+              <a:spcAft>
+                <a:spcPts val="600"/>
+              </a:spcAft>
+            </a:pPr>
+            <a:r>
+              <a:rPr sz="1500" b="1">
+                <a:solidFill>
+                  <a:srgbClr val="0F172A"/>
+                </a:solidFill>
+                <a:latin typeface="Arial"/>
+              </a:rPr>
+              <a:t>A pure TypeScript rules module</a:t>
+            </a:r>
+          </a:p>
+        </p:txBody>
+      </p:sp>
+      <p:sp>
+        <p:nvSpPr>
+          <p:cNvPr id="14" name="TextBox 13"/>
+          <p:cNvSpPr txBox="1"/>
+          <p:nvPr/>
+        </p:nvSpPr>
+        <p:spPr>
+          <a:xfrm>
+            <a:off x="5074920" y="4489703"/>
+            <a:ext cx="6126480" cy="365760"/>
+          </a:xfrm>
+          <a:prstGeom prst="rect">
+            <a:avLst/>
+          </a:prstGeom>
+          <a:noFill/>
+        </p:spPr>
+        <p:txBody>
+          <a:bodyPr wrap="square" lIns="0" rIns="0" tIns="0" bIns="0">
+            <a:spAutoFit/>
+          </a:bodyPr>
+          <a:lstStyle/>
+          <a:p>
+            <a:pPr algn="l">
+              <a:lnSpc>
+                <a:spcPct val="115000"/>
+              </a:lnSpc>
+              <a:spcAft>
+                <a:spcPts val="600"/>
+              </a:spcAft>
+            </a:pPr>
+            <a:r>
+              <a:rPr sz="1500" b="0">
+                <a:solidFill>
+                  <a:srgbClr val="475569"/>
+                </a:solidFill>
+                <a:latin typeface="Arial"/>
+              </a:rPr>
+              <a:t>No framework, no I/O — so the logic is testable and portable.</a:t>
+            </a:r>
+          </a:p>
+        </p:txBody>
+      </p:sp>
+      <p:sp>
+        <p:nvSpPr>
+          <p:cNvPr id="15" name="Rounded Rectangle 14"/>
+          <p:cNvSpPr/>
+          <p:nvPr/>
+        </p:nvSpPr>
+        <p:spPr>
+          <a:xfrm>
+            <a:off x="777240" y="5093207"/>
+            <a:ext cx="10607040" cy="749808"/>
+          </a:xfrm>
+          <a:prstGeom prst="roundRect">
+            <a:avLst>
+              <a:gd name="adj" fmla="val 6000"/>
+            </a:avLst>
+          </a:prstGeom>
+          <a:solidFill>
+            <a:srgbClr val="F6F7F9"/>
+          </a:solidFill>
+          <a:ln w="12700">
+            <a:solidFill>
+              <a:srgbClr val="E2E8F0"/>
+            </a:solidFill>
+          </a:ln>
+          <a:effectLst/>
+        </p:spPr>
+        <p:style>
+          <a:lnRef idx="1">
+            <a:schemeClr val="accent1"/>
+          </a:lnRef>
+          <a:fillRef idx="3">
+            <a:schemeClr val="accent1"/>
+          </a:fillRef>
+          <a:effectRef idx="2">
+            <a:schemeClr val="accent1"/>
+          </a:effectRef>
+          <a:fontRef idx="minor">
+            <a:schemeClr val="lt1"/>
+          </a:fontRef>
+        </p:style>
+        <p:txBody>
+          <a:bodyPr rtlCol="0" anchor="ctr"/>
+          <a:lstStyle/>
+          <a:p>
+            <a:pPr algn="ctr"/>
+          </a:p>
+        </p:txBody>
+      </p:sp>
+      <p:sp>
+        <p:nvSpPr>
+          <p:cNvPr id="16" name="TextBox 15"/>
+          <p:cNvSpPr txBox="1"/>
+          <p:nvPr/>
+        </p:nvSpPr>
+        <p:spPr>
+          <a:xfrm>
+            <a:off x="1051560" y="5294375"/>
+            <a:ext cx="4023360" cy="365760"/>
+          </a:xfrm>
+          <a:prstGeom prst="rect">
+            <a:avLst/>
+          </a:prstGeom>
+          <a:noFill/>
+        </p:spPr>
+        <p:txBody>
+          <a:bodyPr wrap="square" lIns="0" rIns="0" tIns="0" bIns="0">
+            <a:spAutoFit/>
+          </a:bodyPr>
+          <a:lstStyle/>
+          <a:p>
+            <a:pPr algn="l">
+              <a:lnSpc>
+                <a:spcPct val="115000"/>
+              </a:lnSpc>
+              <a:spcAft>
+                <a:spcPts val="600"/>
+              </a:spcAft>
+            </a:pPr>
+            <a:r>
+              <a:rPr sz="1500" b="1">
+                <a:solidFill>
+                  <a:srgbClr val="0F172A"/>
+                </a:solidFill>
+                <a:latin typeface="Arial"/>
+              </a:rPr>
+              <a:t>Vitest + Playwright</a:t>
+            </a:r>
+          </a:p>
+        </p:txBody>
+      </p:sp>
+      <p:sp>
+        <p:nvSpPr>
+          <p:cNvPr id="17" name="TextBox 16"/>
+          <p:cNvSpPr txBox="1"/>
+          <p:nvPr/>
+        </p:nvSpPr>
+        <p:spPr>
+          <a:xfrm>
+            <a:off x="5074920" y="5294375"/>
+            <a:ext cx="6126480" cy="365760"/>
+          </a:xfrm>
+          <a:prstGeom prst="rect">
+            <a:avLst/>
+          </a:prstGeom>
+          <a:noFill/>
+        </p:spPr>
+        <p:txBody>
+          <a:bodyPr wrap="square" lIns="0" rIns="0" tIns="0" bIns="0">
+            <a:spAutoFit/>
+          </a:bodyPr>
+          <a:lstStyle/>
+          <a:p>
+            <a:pPr algn="l">
+              <a:lnSpc>
+                <a:spcPct val="115000"/>
+              </a:lnSpc>
+              <a:spcAft>
+                <a:spcPts val="600"/>
+              </a:spcAft>
+            </a:pPr>
+            <a:r>
+              <a:rPr sz="1500" b="0">
+                <a:solidFill>
+                  <a:srgbClr val="475569"/>
+                </a:solidFill>
+                <a:latin typeface="Arial"/>
+              </a:rPr>
+              <a:t>Fast tests with no database; a browser only where it's needed.</a:t>
+            </a:r>
+          </a:p>
+        </p:txBody>
+      </p:sp>
+      <p:sp>
+        <p:nvSpPr>
+          <p:cNvPr id="18" name="TextBox 17"/>
+          <p:cNvSpPr txBox="1"/>
+          <p:nvPr/>
+        </p:nvSpPr>
+        <p:spPr>
+          <a:xfrm>
+            <a:off x="777240" y="6080760"/>
+            <a:ext cx="10607040" cy="457200"/>
+          </a:xfrm>
+          <a:prstGeom prst="rect">
+            <a:avLst/>
+          </a:prstGeom>
+          <a:noFill/>
+        </p:spPr>
+        <p:txBody>
+          <a:bodyPr wrap="square" lIns="0" rIns="0" tIns="0" bIns="0">
+            <a:spAutoFit/>
+          </a:bodyPr>
+          <a:lstStyle/>
+          <a:p>
+            <a:pPr algn="l">
+              <a:lnSpc>
+                <a:spcPct val="115000"/>
+              </a:lnSpc>
+              <a:spcAft>
+                <a:spcPts val="600"/>
+              </a:spcAft>
+            </a:pPr>
+            <a:r>
               <a:rPr sz="1400" b="0">
                 <a:solidFill>
                   <a:srgbClr val="475569"/>
                 </a:solidFill>
                 <a:latin typeface="Arial"/>
               </a:rPr>
-              <a:t>Every design decision followed from that. I spent the first hours on the domain rather than the code, and that research is what made the rest specific.</a:t>
+              <a:t>One deliberate constraint: the compliance logic imports nothing — so it tests without fixtures and runs in the browser unchanged.</a:t>
             </a:r>
           </a:p>
         </p:txBody>
@@ -7351,7 +5883,7 @@
                 </a:solidFill>
                 <a:latin typeface="Arial"/>
               </a:rPr>
-              <a:t>THE DOMAIN</a:t>
+              <a:t>WHERE I BEGAN</a:t>
             </a:r>
           </a:p>
         </p:txBody>
@@ -7393,21 +5925,120 @@
                 </a:solidFill>
                 <a:latin typeface="Arial"/>
               </a:rPr>
-              <a:t>Three things make this genuinely hard.</a:t>
-            </a:r>
-          </a:p>
-        </p:txBody>
-      </p:sp>
-      <p:sp>
-        <p:nvSpPr>
-          <p:cNvPr id="5" name="Rounded Rectangle 4"/>
+              <a:t>I started with the business, not the code.</a:t>
+            </a:r>
+          </a:p>
+        </p:txBody>
+      </p:sp>
+      <p:sp>
+        <p:nvSpPr>
+          <p:cNvPr id="5" name="TextBox 4"/>
+          <p:cNvSpPr txBox="1"/>
+          <p:nvPr/>
+        </p:nvSpPr>
+        <p:spPr>
+          <a:xfrm>
+            <a:off x="777240" y="1920240"/>
+            <a:ext cx="10607040" cy="4114800"/>
+          </a:xfrm>
+          <a:prstGeom prst="rect">
+            <a:avLst/>
+          </a:prstGeom>
+          <a:noFill/>
+        </p:spPr>
+        <p:txBody>
+          <a:bodyPr wrap="square" lIns="0" rIns="0" tIns="0" bIns="0">
+            <a:spAutoFit/>
+          </a:bodyPr>
+          <a:lstStyle/>
+          <a:p>
+            <a:pPr>
+              <a:lnSpc>
+                <a:spcPct val="120000"/>
+              </a:lnSpc>
+              <a:spcAft>
+                <a:spcPts val="1600"/>
+              </a:spcAft>
+            </a:pPr>
+            <a:r>
+              <a:rPr sz="1800">
+                <a:solidFill>
+                  <a:srgbClr val="475569"/>
+                </a:solidFill>
+                <a:latin typeface="Arial"/>
+              </a:rPr>
+              <a:t>Sky Transport Solutions isn't a trucking company.</a:t>
+            </a:r>
+          </a:p>
+          <a:p>
+            <a:pPr>
+              <a:lnSpc>
+                <a:spcPct val="120000"/>
+              </a:lnSpc>
+              <a:spcAft>
+                <a:spcPts val="1600"/>
+              </a:spcAft>
+            </a:pPr>
+            <a:r>
+              <a:rPr sz="1800">
+                <a:solidFill>
+                  <a:srgbClr val="475569"/>
+                </a:solidFill>
+                <a:latin typeface="Arial"/>
+              </a:rPr>
+              <a:t>They're the outsourced paperwork department for ~18,000 carriers — about 25 people.</a:t>
+            </a:r>
+          </a:p>
+          <a:p>
+            <a:pPr>
+              <a:lnSpc>
+                <a:spcPct val="120000"/>
+              </a:lnSpc>
+              <a:spcAft>
+                <a:spcPts val="1600"/>
+              </a:spcAft>
+            </a:pPr>
+            <a:r>
+              <a:rPr sz="1800">
+                <a:solidFill>
+                  <a:srgbClr val="475569"/>
+                </a:solidFill>
+                <a:latin typeface="Arial"/>
+              </a:rPr>
+              <a:t>Their customers are owner-operators. The guy who owns the truck is driving it.</a:t>
+            </a:r>
+          </a:p>
+          <a:p>
+            <a:pPr>
+              <a:lnSpc>
+                <a:spcPct val="120000"/>
+              </a:lnSpc>
+              <a:spcAft>
+                <a:spcPts val="1600"/>
+              </a:spcAft>
+            </a:pPr>
+            <a:r>
+              <a:rPr sz="1800">
+                <a:solidFill>
+                  <a:srgbClr val="475569"/>
+                </a:solidFill>
+                <a:latin typeface="Arial"/>
+              </a:rPr>
+              <a:t>Memberships run $199–$399 per truck per year, tiered by how many renewals Sky remembers for you.</a:t>
+            </a:r>
+          </a:p>
+        </p:txBody>
+      </p:sp>
+      <p:sp>
+        <p:nvSpPr>
+          <p:cNvPr id="6" name="Rounded Rectangle 5"/>
           <p:cNvSpPr/>
           <p:nvPr/>
         </p:nvSpPr>
         <p:spPr>
           <a:xfrm>
-            <a:off x="777240" y="1828800"/>
-            <a:ext cx="3337560" cy="3291840"/>
+            <a:off x="777240" y="4480560"/>
+            <a:ext cx="10607040" cy="1097280"/>
           </a:xfrm>
           <a:prstGeom prst="roundRect">
             <a:avLst>
@@ -7448,60 +6079,14 @@
       </p:sp>
       <p:sp>
         <p:nvSpPr>
-          <p:cNvPr id="6" name="Rounded Rectangle 5"/>
-          <p:cNvSpPr/>
-          <p:nvPr/>
-        </p:nvSpPr>
-        <p:spPr>
-          <a:xfrm>
-            <a:off x="777240" y="1828800"/>
-            <a:ext cx="3337560" cy="73152"/>
-          </a:xfrm>
-          <a:prstGeom prst="roundRect">
-            <a:avLst>
-              <a:gd name="adj" fmla="val 6000"/>
-            </a:avLst>
-          </a:prstGeom>
-          <a:solidFill>
-            <a:srgbClr val="1E3A8A"/>
-          </a:solidFill>
-          <a:ln>
-            <a:noFill/>
-          </a:ln>
-          <a:effectLst/>
-        </p:spPr>
-        <p:style>
-          <a:lnRef idx="1">
-            <a:schemeClr val="accent1"/>
-          </a:lnRef>
-          <a:fillRef idx="3">
-            <a:schemeClr val="accent1"/>
-          </a:fillRef>
-          <a:effectRef idx="2">
-            <a:schemeClr val="accent1"/>
-          </a:effectRef>
-          <a:fontRef idx="minor">
-            <a:schemeClr val="lt1"/>
-          </a:fontRef>
-        </p:style>
-        <p:txBody>
-          <a:bodyPr rtlCol="0" anchor="ctr"/>
-          <a:lstStyle/>
-          <a:p>
-            <a:pPr algn="ctr"/>
-          </a:p>
-        </p:txBody>
-      </p:sp>
-      <p:sp>
-        <p:nvSpPr>
           <p:cNvPr id="7" name="TextBox 6"/>
           <p:cNvSpPr txBox="1"/>
           <p:nvPr/>
         </p:nvSpPr>
         <p:spPr>
           <a:xfrm>
-            <a:off x="1051560" y="2148840"/>
-            <a:ext cx="2788920" cy="822960"/>
+            <a:off x="1097280" y="4846320"/>
+            <a:ext cx="10058400" cy="457200"/>
           </a:xfrm>
           <a:prstGeom prst="rect">
             <a:avLst/>
@@ -7523,411 +6108,13 @@
               </a:spcAft>
             </a:pPr>
             <a:r>
-              <a:rPr sz="1700" b="1">
-                <a:solidFill>
-                  <a:srgbClr val="0F172A"/>
-                </a:solidFill>
-                <a:latin typeface="Arial"/>
-              </a:rPr>
-              <a:t>Deadlines are derived, not delivered.</a:t>
-            </a:r>
-          </a:p>
-        </p:txBody>
-      </p:sp>
-      <p:sp>
-        <p:nvSpPr>
-          <p:cNvPr id="8" name="TextBox 7"/>
-          <p:cNvSpPr txBox="1"/>
-          <p:nvPr/>
-        </p:nvSpPr>
-        <p:spPr>
-          <a:xfrm>
-            <a:off x="1051560" y="3063240"/>
-            <a:ext cx="2788920" cy="1828800"/>
-          </a:xfrm>
-          <a:prstGeom prst="rect">
-            <a:avLst/>
-          </a:prstGeom>
-          <a:noFill/>
-        </p:spPr>
-        <p:txBody>
-          <a:bodyPr wrap="square" lIns="0" rIns="0" tIns="0" bIns="0">
-            <a:spAutoFit/>
-          </a:bodyPr>
-          <a:lstStyle/>
-          <a:p>
-            <a:pPr algn="l">
-              <a:lnSpc>
-                <a:spcPct val="115000"/>
-              </a:lnSpc>
-              <a:spcAft>
-                <a:spcPts val="600"/>
-              </a:spcAft>
-            </a:pPr>
-            <a:r>
-              <a:rPr sz="1300" b="0">
-                <a:solidFill>
-                  <a:srgbClr val="475569"/>
-                </a:solidFill>
-                <a:latin typeface="Arial"/>
-              </a:rPr>
-              <a:t>Nobody sends a bill. The biennial federal update is due on a date encoded in the carrier's own USDOT number — last digit picks the month, second-to-last picks the year.</a:t>
-            </a:r>
-          </a:p>
-        </p:txBody>
-      </p:sp>
-      <p:sp>
-        <p:nvSpPr>
-          <p:cNvPr id="9" name="Rounded Rectangle 8"/>
-          <p:cNvSpPr/>
-          <p:nvPr/>
-        </p:nvSpPr>
-        <p:spPr>
-          <a:xfrm>
-            <a:off x="4343400" y="1828800"/>
-            <a:ext cx="3337560" cy="3291840"/>
-          </a:xfrm>
-          <a:prstGeom prst="roundRect">
-            <a:avLst>
-              <a:gd name="adj" fmla="val 6000"/>
-            </a:avLst>
-          </a:prstGeom>
-          <a:solidFill>
-            <a:srgbClr val="F6F7F9"/>
-          </a:solidFill>
-          <a:ln w="12700">
-            <a:solidFill>
-              <a:srgbClr val="E2E8F0"/>
-            </a:solidFill>
-          </a:ln>
-          <a:effectLst/>
-        </p:spPr>
-        <p:style>
-          <a:lnRef idx="1">
-            <a:schemeClr val="accent1"/>
-          </a:lnRef>
-          <a:fillRef idx="3">
-            <a:schemeClr val="accent1"/>
-          </a:fillRef>
-          <a:effectRef idx="2">
-            <a:schemeClr val="accent1"/>
-          </a:effectRef>
-          <a:fontRef idx="minor">
-            <a:schemeClr val="lt1"/>
-          </a:fontRef>
-        </p:style>
-        <p:txBody>
-          <a:bodyPr rtlCol="0" anchor="ctr"/>
-          <a:lstStyle/>
-          <a:p>
-            <a:pPr algn="ctr"/>
-          </a:p>
-        </p:txBody>
-      </p:sp>
-      <p:sp>
-        <p:nvSpPr>
-          <p:cNvPr id="10" name="Rounded Rectangle 9"/>
-          <p:cNvSpPr/>
-          <p:nvPr/>
-        </p:nvSpPr>
-        <p:spPr>
-          <a:xfrm>
-            <a:off x="4343400" y="1828800"/>
-            <a:ext cx="3337560" cy="73152"/>
-          </a:xfrm>
-          <a:prstGeom prst="roundRect">
-            <a:avLst>
-              <a:gd name="adj" fmla="val 6000"/>
-            </a:avLst>
-          </a:prstGeom>
-          <a:solidFill>
-            <a:srgbClr val="C2410C"/>
-          </a:solidFill>
-          <a:ln>
-            <a:noFill/>
-          </a:ln>
-          <a:effectLst/>
-        </p:spPr>
-        <p:style>
-          <a:lnRef idx="1">
-            <a:schemeClr val="accent1"/>
-          </a:lnRef>
-          <a:fillRef idx="3">
-            <a:schemeClr val="accent1"/>
-          </a:fillRef>
-          <a:effectRef idx="2">
-            <a:schemeClr val="accent1"/>
-          </a:effectRef>
-          <a:fontRef idx="minor">
-            <a:schemeClr val="lt1"/>
-          </a:fontRef>
-        </p:style>
-        <p:txBody>
-          <a:bodyPr rtlCol="0" anchor="ctr"/>
-          <a:lstStyle/>
-          <a:p>
-            <a:pPr algn="ctr"/>
-          </a:p>
-        </p:txBody>
-      </p:sp>
-      <p:sp>
-        <p:nvSpPr>
-          <p:cNvPr id="11" name="TextBox 10"/>
-          <p:cNvSpPr txBox="1"/>
-          <p:nvPr/>
-        </p:nvSpPr>
-        <p:spPr>
-          <a:xfrm>
-            <a:off x="4617720" y="2148840"/>
-            <a:ext cx="2788920" cy="822960"/>
-          </a:xfrm>
-          <a:prstGeom prst="rect">
-            <a:avLst/>
-          </a:prstGeom>
-          <a:noFill/>
-        </p:spPr>
-        <p:txBody>
-          <a:bodyPr wrap="square" lIns="0" rIns="0" tIns="0" bIns="0">
-            <a:spAutoFit/>
-          </a:bodyPr>
-          <a:lstStyle/>
-          <a:p>
-            <a:pPr algn="l">
-              <a:lnSpc>
-                <a:spcPct val="115000"/>
-              </a:lnSpc>
-              <a:spcAft>
-                <a:spcPts val="600"/>
-              </a:spcAft>
-            </a:pPr>
-            <a:r>
-              <a:rPr sz="1700" b="1">
-                <a:solidFill>
-                  <a:srgbClr val="0F172A"/>
-                </a:solidFill>
-                <a:latin typeface="Arial"/>
-              </a:rPr>
-              <a:t>Obligations are chained.</a:t>
-            </a:r>
-          </a:p>
-        </p:txBody>
-      </p:sp>
-      <p:sp>
-        <p:nvSpPr>
-          <p:cNvPr id="12" name="TextBox 11"/>
-          <p:cNvSpPr txBox="1"/>
-          <p:nvPr/>
-        </p:nvSpPr>
-        <p:spPr>
-          <a:xfrm>
-            <a:off x="4617720" y="3063240"/>
-            <a:ext cx="2788920" cy="1828800"/>
-          </a:xfrm>
-          <a:prstGeom prst="rect">
-            <a:avLst/>
-          </a:prstGeom>
-          <a:noFill/>
-        </p:spPr>
-        <p:txBody>
-          <a:bodyPr wrap="square" lIns="0" rIns="0" tIns="0" bIns="0">
-            <a:spAutoFit/>
-          </a:bodyPr>
-          <a:lstStyle/>
-          <a:p>
-            <a:pPr algn="l">
-              <a:lnSpc>
-                <a:spcPct val="115000"/>
-              </a:lnSpc>
-              <a:spcAft>
-                <a:spcPts val="600"/>
-              </a:spcAft>
-            </a:pPr>
-            <a:r>
-              <a:rPr sz="1300" b="0">
-                <a:solidFill>
-                  <a:srgbClr val="475569"/>
-                </a:solidFill>
-                <a:latin typeface="Arial"/>
-              </a:rPr>
-              <a:t>The IRS returns a stamped Schedule 1 after the heavy vehicle tax is filed, and the DMV will not renew registration without it. A missed emissions test in August is a plate failure in November.</a:t>
-            </a:r>
-          </a:p>
-        </p:txBody>
-      </p:sp>
-      <p:sp>
-        <p:nvSpPr>
-          <p:cNvPr id="13" name="Rounded Rectangle 12"/>
-          <p:cNvSpPr/>
-          <p:nvPr/>
-        </p:nvSpPr>
-        <p:spPr>
-          <a:xfrm>
-            <a:off x="7909560" y="1828800"/>
-            <a:ext cx="3337560" cy="3291840"/>
-          </a:xfrm>
-          <a:prstGeom prst="roundRect">
-            <a:avLst>
-              <a:gd name="adj" fmla="val 6000"/>
-            </a:avLst>
-          </a:prstGeom>
-          <a:solidFill>
-            <a:srgbClr val="F6F7F9"/>
-          </a:solidFill>
-          <a:ln w="12700">
-            <a:solidFill>
-              <a:srgbClr val="E2E8F0"/>
-            </a:solidFill>
-          </a:ln>
-          <a:effectLst/>
-        </p:spPr>
-        <p:style>
-          <a:lnRef idx="1">
-            <a:schemeClr val="accent1"/>
-          </a:lnRef>
-          <a:fillRef idx="3">
-            <a:schemeClr val="accent1"/>
-          </a:fillRef>
-          <a:effectRef idx="2">
-            <a:schemeClr val="accent1"/>
-          </a:effectRef>
-          <a:fontRef idx="minor">
-            <a:schemeClr val="lt1"/>
-          </a:fontRef>
-        </p:style>
-        <p:txBody>
-          <a:bodyPr rtlCol="0" anchor="ctr"/>
-          <a:lstStyle/>
-          <a:p>
-            <a:pPr algn="ctr"/>
-          </a:p>
-        </p:txBody>
-      </p:sp>
-      <p:sp>
-        <p:nvSpPr>
-          <p:cNvPr id="14" name="Rounded Rectangle 13"/>
-          <p:cNvSpPr/>
-          <p:nvPr/>
-        </p:nvSpPr>
-        <p:spPr>
-          <a:xfrm>
-            <a:off x="7909560" y="1828800"/>
-            <a:ext cx="3337560" cy="73152"/>
-          </a:xfrm>
-          <a:prstGeom prst="roundRect">
-            <a:avLst>
-              <a:gd name="adj" fmla="val 6000"/>
-            </a:avLst>
-          </a:prstGeom>
-          <a:solidFill>
-            <a:srgbClr val="B91C1C"/>
-          </a:solidFill>
-          <a:ln>
-            <a:noFill/>
-          </a:ln>
-          <a:effectLst/>
-        </p:spPr>
-        <p:style>
-          <a:lnRef idx="1">
-            <a:schemeClr val="accent1"/>
-          </a:lnRef>
-          <a:fillRef idx="3">
-            <a:schemeClr val="accent1"/>
-          </a:fillRef>
-          <a:effectRef idx="2">
-            <a:schemeClr val="accent1"/>
-          </a:effectRef>
-          <a:fontRef idx="minor">
-            <a:schemeClr val="lt1"/>
-          </a:fontRef>
-        </p:style>
-        <p:txBody>
-          <a:bodyPr rtlCol="0" anchor="ctr"/>
-          <a:lstStyle/>
-          <a:p>
-            <a:pPr algn="ctr"/>
-          </a:p>
-        </p:txBody>
-      </p:sp>
-      <p:sp>
-        <p:nvSpPr>
-          <p:cNvPr id="15" name="TextBox 14"/>
-          <p:cNvSpPr txBox="1"/>
-          <p:nvPr/>
-        </p:nvSpPr>
-        <p:spPr>
-          <a:xfrm>
-            <a:off x="8183880" y="2148840"/>
-            <a:ext cx="2788920" cy="822960"/>
-          </a:xfrm>
-          <a:prstGeom prst="rect">
-            <a:avLst/>
-          </a:prstGeom>
-          <a:noFill/>
-        </p:spPr>
-        <p:txBody>
-          <a:bodyPr wrap="square" lIns="0" rIns="0" tIns="0" bIns="0">
-            <a:spAutoFit/>
-          </a:bodyPr>
-          <a:lstStyle/>
-          <a:p>
-            <a:pPr algn="l">
-              <a:lnSpc>
-                <a:spcPct val="115000"/>
-              </a:lnSpc>
-              <a:spcAft>
-                <a:spcPts val="600"/>
-              </a:spcAft>
-            </a:pPr>
-            <a:r>
-              <a:rPr sz="1700" b="1">
-                <a:solidFill>
-                  <a:srgbClr val="0F172A"/>
-                </a:solidFill>
-                <a:latin typeface="Arial"/>
-              </a:rPr>
-              <a:t>Failure is asymmetric.</a:t>
-            </a:r>
-          </a:p>
-        </p:txBody>
-      </p:sp>
-      <p:sp>
-        <p:nvSpPr>
-          <p:cNvPr id="16" name="TextBox 15"/>
-          <p:cNvSpPr txBox="1"/>
-          <p:nvPr/>
-        </p:nvSpPr>
-        <p:spPr>
-          <a:xfrm>
-            <a:off x="8183880" y="3063240"/>
-            <a:ext cx="2788920" cy="1828800"/>
-          </a:xfrm>
-          <a:prstGeom prst="rect">
-            <a:avLst/>
-          </a:prstGeom>
-          <a:noFill/>
-        </p:spPr>
-        <p:txBody>
-          <a:bodyPr wrap="square" lIns="0" rIns="0" tIns="0" bIns="0">
-            <a:spAutoFit/>
-          </a:bodyPr>
-          <a:lstStyle/>
-          <a:p>
-            <a:pPr algn="l">
-              <a:lnSpc>
-                <a:spcPct val="115000"/>
-              </a:lnSpc>
-              <a:spcAft>
-                <a:spcPts val="600"/>
-              </a:spcAft>
-            </a:pPr>
-            <a:r>
-              <a:rPr sz="1300" b="0">
-                <a:solidFill>
-                  <a:srgbClr val="475569"/>
-                </a:solidFill>
-                <a:latin typeface="Arial"/>
-              </a:rPr>
-              <a:t>Filing on time earns $199–$399 a year. Missing one item parks a truck earning ~$800 a day — and the client blames the service they hired to remember.</a:t>
+              <a:rPr sz="2000" b="1">
+                <a:solidFill>
+                  <a:srgbClr val="1E3A8A"/>
+                </a:solidFill>
+                <a:latin typeface="Arial"/>
+              </a:rPr>
+              <a:t>So they sell memory. That reframed the whole problem.</a:t>
             </a:r>
           </a:p>
         </p:txBody>
@@ -8041,7 +6228,7 @@
                 </a:solidFill>
                 <a:latin typeface="Arial"/>
               </a:rPr>
-              <a:t>HOW I CHOSE WHAT TO BUILD</a:t>
+              <a:t>WHAT I FOUND</a:t>
             </a:r>
           </a:p>
         </p:txBody>
@@ -8083,7 +6270,7 @@
                 </a:solidFill>
                 <a:latin typeface="Arial"/>
               </a:rPr>
-              <a:t>From pain point to feature.</a:t>
+              <a:t>Where it hurts.</a:t>
             </a:r>
           </a:p>
         </p:txBody>
@@ -8096,8 +6283,8 @@
         </p:nvSpPr>
         <p:spPr>
           <a:xfrm>
-            <a:off x="777240" y="1783080"/>
-            <a:ext cx="10607040" cy="658368"/>
+            <a:off x="777240" y="1874519"/>
+            <a:ext cx="10607040" cy="749808"/>
           </a:xfrm>
           <a:prstGeom prst="roundRect">
             <a:avLst>
@@ -8144,8 +6331,8 @@
         </p:nvSpPr>
         <p:spPr>
           <a:xfrm>
-            <a:off x="1051560" y="1965960"/>
-            <a:ext cx="4206240" cy="365760"/>
+            <a:off x="1051560" y="2075687"/>
+            <a:ext cx="3931920" cy="365760"/>
           </a:xfrm>
           <a:prstGeom prst="rect">
             <a:avLst/>
@@ -8167,13 +6354,13 @@
               </a:spcAft>
             </a:pPr>
             <a:r>
-              <a:rPr sz="1400" b="1">
+              <a:rPr sz="1500" b="1">
                 <a:solidFill>
                   <a:srgbClr val="0F172A"/>
                 </a:solidFill>
                 <a:latin typeface="Arial"/>
               </a:rPr>
-              <a:t>Every deadline must be derived</a:t>
+              <a:t>Nobody sends a bill.</a:t>
             </a:r>
           </a:p>
         </p:txBody>
@@ -8186,8 +6373,8 @@
         </p:nvSpPr>
         <p:spPr>
           <a:xfrm>
-            <a:off x="5349240" y="1956816"/>
-            <a:ext cx="365760" cy="365760"/>
+            <a:off x="5029200" y="2075687"/>
+            <a:ext cx="6126480" cy="365760"/>
           </a:xfrm>
           <a:prstGeom prst="rect">
             <a:avLst/>
@@ -8211,241 +6398,25 @@
             <a:r>
               <a:rPr sz="1500" b="0">
                 <a:solidFill>
-                  <a:srgbClr val="94A3B8"/>
-                </a:solidFill>
-                <a:latin typeface="Arial"/>
-              </a:rPr>
-              <a:t>→</a:t>
-            </a:r>
-          </a:p>
-        </p:txBody>
-      </p:sp>
-      <p:sp>
-        <p:nvSpPr>
-          <p:cNvPr id="8" name="TextBox 7"/>
-          <p:cNvSpPr txBox="1"/>
-          <p:nvPr/>
-        </p:nvSpPr>
-        <p:spPr>
-          <a:xfrm>
-            <a:off x="5806440" y="1965960"/>
-            <a:ext cx="5394960" cy="365760"/>
-          </a:xfrm>
-          <a:prstGeom prst="rect">
-            <a:avLst/>
-          </a:prstGeom>
-          <a:noFill/>
-        </p:spPr>
-        <p:txBody>
-          <a:bodyPr wrap="square" lIns="0" rIns="0" tIns="0" bIns="0">
-            <a:spAutoFit/>
-          </a:bodyPr>
-          <a:lstStyle/>
-          <a:p>
-            <a:pPr algn="l">
-              <a:lnSpc>
-                <a:spcPct val="115000"/>
-              </a:lnSpc>
-              <a:spcAft>
-                <a:spcPts val="600"/>
-              </a:spcAft>
-            </a:pPr>
-            <a:r>
-              <a:rPr sz="1400" b="0">
-                <a:solidFill>
                   <a:srgbClr val="475569"/>
                 </a:solidFill>
                 <a:latin typeface="Arial"/>
               </a:rPr>
-              <a:t>Rules engine — 7 cited rules deriving dates from the regulations</a:t>
-            </a:r>
-          </a:p>
-        </p:txBody>
-      </p:sp>
-      <p:sp>
-        <p:nvSpPr>
-          <p:cNvPr id="9" name="Rounded Rectangle 8"/>
+              <a:t>Deadlines are derived. One is encoded in the carrier's own DOT number.</a:t>
+            </a:r>
+          </a:p>
+        </p:txBody>
+      </p:sp>
+      <p:sp>
+        <p:nvSpPr>
+          <p:cNvPr id="8" name="Rounded Rectangle 7"/>
           <p:cNvSpPr/>
           <p:nvPr/>
         </p:nvSpPr>
         <p:spPr>
           <a:xfrm>
-            <a:off x="777240" y="2505456"/>
-            <a:ext cx="10607040" cy="658368"/>
-          </a:xfrm>
-          <a:prstGeom prst="roundRect">
-            <a:avLst>
-              <a:gd name="adj" fmla="val 6000"/>
-            </a:avLst>
-          </a:prstGeom>
-          <a:solidFill>
-            <a:srgbClr val="FFFFFF"/>
-          </a:solidFill>
-          <a:ln w="12700">
-            <a:solidFill>
-              <a:srgbClr val="E2E8F0"/>
-            </a:solidFill>
-          </a:ln>
-          <a:effectLst/>
-        </p:spPr>
-        <p:style>
-          <a:lnRef idx="1">
-            <a:schemeClr val="accent1"/>
-          </a:lnRef>
-          <a:fillRef idx="3">
-            <a:schemeClr val="accent1"/>
-          </a:fillRef>
-          <a:effectRef idx="2">
-            <a:schemeClr val="accent1"/>
-          </a:effectRef>
-          <a:fontRef idx="minor">
-            <a:schemeClr val="lt1"/>
-          </a:fontRef>
-        </p:style>
-        <p:txBody>
-          <a:bodyPr rtlCol="0" anchor="ctr"/>
-          <a:lstStyle/>
-          <a:p>
-            <a:pPr algn="ctr"/>
-          </a:p>
-        </p:txBody>
-      </p:sp>
-      <p:sp>
-        <p:nvSpPr>
-          <p:cNvPr id="10" name="TextBox 9"/>
-          <p:cNvSpPr txBox="1"/>
-          <p:nvPr/>
-        </p:nvSpPr>
-        <p:spPr>
-          <a:xfrm>
-            <a:off x="1051560" y="2688336"/>
-            <a:ext cx="4206240" cy="365760"/>
-          </a:xfrm>
-          <a:prstGeom prst="rect">
-            <a:avLst/>
-          </a:prstGeom>
-          <a:noFill/>
-        </p:spPr>
-        <p:txBody>
-          <a:bodyPr wrap="square" lIns="0" rIns="0" tIns="0" bIns="0">
-            <a:spAutoFit/>
-          </a:bodyPr>
-          <a:lstStyle/>
-          <a:p>
-            <a:pPr algn="l">
-              <a:lnSpc>
-                <a:spcPct val="115000"/>
-              </a:lnSpc>
-              <a:spcAft>
-                <a:spcPts val="600"/>
-              </a:spcAft>
-            </a:pPr>
-            <a:r>
-              <a:rPr sz="1400" b="1">
-                <a:solidFill>
-                  <a:srgbClr val="0F172A"/>
-                </a:solidFill>
-                <a:latin typeface="Arial"/>
-              </a:rPr>
-              <a:t>Obligations block each other</a:t>
-            </a:r>
-          </a:p>
-        </p:txBody>
-      </p:sp>
-      <p:sp>
-        <p:nvSpPr>
-          <p:cNvPr id="11" name="TextBox 10"/>
-          <p:cNvSpPr txBox="1"/>
-          <p:nvPr/>
-        </p:nvSpPr>
-        <p:spPr>
-          <a:xfrm>
-            <a:off x="5349240" y="2679192"/>
-            <a:ext cx="365760" cy="365760"/>
-          </a:xfrm>
-          <a:prstGeom prst="rect">
-            <a:avLst/>
-          </a:prstGeom>
-          <a:noFill/>
-        </p:spPr>
-        <p:txBody>
-          <a:bodyPr wrap="square" lIns="0" rIns="0" tIns="0" bIns="0">
-            <a:spAutoFit/>
-          </a:bodyPr>
-          <a:lstStyle/>
-          <a:p>
-            <a:pPr algn="l">
-              <a:lnSpc>
-                <a:spcPct val="115000"/>
-              </a:lnSpc>
-              <a:spcAft>
-                <a:spcPts val="600"/>
-              </a:spcAft>
-            </a:pPr>
-            <a:r>
-              <a:rPr sz="1500" b="0">
-                <a:solidFill>
-                  <a:srgbClr val="94A3B8"/>
-                </a:solidFill>
-                <a:latin typeface="Arial"/>
-              </a:rPr>
-              <a:t>→</a:t>
-            </a:r>
-          </a:p>
-        </p:txBody>
-      </p:sp>
-      <p:sp>
-        <p:nvSpPr>
-          <p:cNvPr id="12" name="TextBox 11"/>
-          <p:cNvSpPr txBox="1"/>
-          <p:nvPr/>
-        </p:nvSpPr>
-        <p:spPr>
-          <a:xfrm>
-            <a:off x="5806440" y="2688336"/>
-            <a:ext cx="5394960" cy="365760"/>
-          </a:xfrm>
-          <a:prstGeom prst="rect">
-            <a:avLst/>
-          </a:prstGeom>
-          <a:noFill/>
-        </p:spPr>
-        <p:txBody>
-          <a:bodyPr wrap="square" lIns="0" rIns="0" tIns="0" bIns="0">
-            <a:spAutoFit/>
-          </a:bodyPr>
-          <a:lstStyle/>
-          <a:p>
-            <a:pPr algn="l">
-              <a:lnSpc>
-                <a:spcPct val="115000"/>
-              </a:lnSpc>
-              <a:spcAft>
-                <a:spcPts val="600"/>
-              </a:spcAft>
-            </a:pPr>
-            <a:r>
-              <a:rPr sz="1400" b="0">
-                <a:solidFill>
-                  <a:srgbClr val="475569"/>
-                </a:solidFill>
-                <a:latin typeface="Arial"/>
-              </a:rPr>
-              <a:t>Dependency graph → a single out-of-service date per truck</a:t>
-            </a:r>
-          </a:p>
-        </p:txBody>
-      </p:sp>
-      <p:sp>
-        <p:nvSpPr>
-          <p:cNvPr id="13" name="Rounded Rectangle 12"/>
-          <p:cNvSpPr/>
-          <p:nvPr/>
-        </p:nvSpPr>
-        <p:spPr>
-          <a:xfrm>
-            <a:off x="777240" y="3227832"/>
-            <a:ext cx="10607040" cy="658368"/>
+            <a:off x="777240" y="2679191"/>
+            <a:ext cx="10607040" cy="749808"/>
           </a:xfrm>
           <a:prstGeom prst="roundRect">
             <a:avLst>
@@ -8486,14 +6457,14 @@
       </p:sp>
       <p:sp>
         <p:nvSpPr>
-          <p:cNvPr id="14" name="TextBox 13"/>
+          <p:cNvPr id="9" name="TextBox 8"/>
           <p:cNvSpPr txBox="1"/>
           <p:nvPr/>
         </p:nvSpPr>
         <p:spPr>
           <a:xfrm>
-            <a:off x="1051560" y="3410712"/>
-            <a:ext cx="4206240" cy="365760"/>
+            <a:off x="1051560" y="2880359"/>
+            <a:ext cx="3931920" cy="365760"/>
           </a:xfrm>
           <a:prstGeom prst="rect">
             <a:avLst/>
@@ -8515,27 +6486,27 @@
               </a:spcAft>
             </a:pPr>
             <a:r>
-              <a:rPr sz="1400" b="1">
+              <a:rPr sz="1500" b="1">
                 <a:solidFill>
                   <a:srgbClr val="0F172A"/>
                 </a:solidFill>
                 <a:latin typeface="Arial"/>
               </a:rPr>
-              <a:t>Chasing documents from drivers</a:t>
-            </a:r>
-          </a:p>
-        </p:txBody>
-      </p:sp>
-      <p:sp>
-        <p:nvSpPr>
-          <p:cNvPr id="15" name="TextBox 14"/>
+              <a:t>Filings block each other.</a:t>
+            </a:r>
+          </a:p>
+        </p:txBody>
+      </p:sp>
+      <p:sp>
+        <p:nvSpPr>
+          <p:cNvPr id="10" name="TextBox 9"/>
           <p:cNvSpPr txBox="1"/>
           <p:nvPr/>
         </p:nvSpPr>
         <p:spPr>
           <a:xfrm>
-            <a:off x="5349240" y="3401568"/>
-            <a:ext cx="365760" cy="365760"/>
+            <a:off x="5029200" y="2880359"/>
+            <a:ext cx="6126480" cy="365760"/>
           </a:xfrm>
           <a:prstGeom prst="rect">
             <a:avLst/>
@@ -8559,241 +6530,25 @@
             <a:r>
               <a:rPr sz="1500" b="0">
                 <a:solidFill>
-                  <a:srgbClr val="94A3B8"/>
-                </a:solidFill>
-                <a:latin typeface="Arial"/>
-              </a:rPr>
-              <a:t>→</a:t>
-            </a:r>
-          </a:p>
-        </p:txBody>
-      </p:sp>
-      <p:sp>
-        <p:nvSpPr>
-          <p:cNvPr id="16" name="TextBox 15"/>
-          <p:cNvSpPr txBox="1"/>
-          <p:nvPr/>
-        </p:nvSpPr>
-        <p:spPr>
-          <a:xfrm>
-            <a:off x="5806440" y="3410712"/>
-            <a:ext cx="5394960" cy="365760"/>
-          </a:xfrm>
-          <a:prstGeom prst="rect">
-            <a:avLst/>
-          </a:prstGeom>
-          <a:noFill/>
-        </p:spPr>
-        <p:txBody>
-          <a:bodyPr wrap="square" lIns="0" rIns="0" tIns="0" bIns="0">
-            <a:spAutoFit/>
-          </a:bodyPr>
-          <a:lstStyle/>
-          <a:p>
-            <a:pPr algn="l">
-              <a:lnSpc>
-                <a:spcPct val="115000"/>
-              </a:lnSpc>
-              <a:spcAft>
-                <a:spcPts val="600"/>
-              </a:spcAft>
-            </a:pPr>
-            <a:r>
-              <a:rPr sz="1400" b="0">
-                <a:solidFill>
                   <a:srgbClr val="475569"/>
                 </a:solidFill>
                 <a:latin typeface="Arial"/>
               </a:rPr>
-              <a:t>Proactive requests 60 days out, then a fixed escalation ladder</a:t>
-            </a:r>
-          </a:p>
-        </p:txBody>
-      </p:sp>
-      <p:sp>
-        <p:nvSpPr>
-          <p:cNvPr id="17" name="Rounded Rectangle 16"/>
+              <a:t>No tax receipt, no plate renewal. No emissions check, no registration.</a:t>
+            </a:r>
+          </a:p>
+        </p:txBody>
+      </p:sp>
+      <p:sp>
+        <p:nvSpPr>
+          <p:cNvPr id="11" name="Rounded Rectangle 10"/>
           <p:cNvSpPr/>
           <p:nvPr/>
         </p:nvSpPr>
         <p:spPr>
           <a:xfrm>
-            <a:off x="777240" y="3950208"/>
-            <a:ext cx="10607040" cy="658368"/>
-          </a:xfrm>
-          <a:prstGeom prst="roundRect">
-            <a:avLst>
-              <a:gd name="adj" fmla="val 6000"/>
-            </a:avLst>
-          </a:prstGeom>
-          <a:solidFill>
-            <a:srgbClr val="FFFFFF"/>
-          </a:solidFill>
-          <a:ln w="12700">
-            <a:solidFill>
-              <a:srgbClr val="E2E8F0"/>
-            </a:solidFill>
-          </a:ln>
-          <a:effectLst/>
-        </p:spPr>
-        <p:style>
-          <a:lnRef idx="1">
-            <a:schemeClr val="accent1"/>
-          </a:lnRef>
-          <a:fillRef idx="3">
-            <a:schemeClr val="accent1"/>
-          </a:fillRef>
-          <a:effectRef idx="2">
-            <a:schemeClr val="accent1"/>
-          </a:effectRef>
-          <a:fontRef idx="minor">
-            <a:schemeClr val="lt1"/>
-          </a:fontRef>
-        </p:style>
-        <p:txBody>
-          <a:bodyPr rtlCol="0" anchor="ctr"/>
-          <a:lstStyle/>
-          <a:p>
-            <a:pPr algn="ctr"/>
-          </a:p>
-        </p:txBody>
-      </p:sp>
-      <p:sp>
-        <p:nvSpPr>
-          <p:cNvPr id="18" name="TextBox 17"/>
-          <p:cNvSpPr txBox="1"/>
-          <p:nvPr/>
-        </p:nvSpPr>
-        <p:spPr>
-          <a:xfrm>
-            <a:off x="1051560" y="4133088"/>
-            <a:ext cx="4206240" cy="365760"/>
-          </a:xfrm>
-          <a:prstGeom prst="rect">
-            <a:avLst/>
-          </a:prstGeom>
-          <a:noFill/>
-        </p:spPr>
-        <p:txBody>
-          <a:bodyPr wrap="square" lIns="0" rIns="0" tIns="0" bIns="0">
-            <a:spAutoFit/>
-          </a:bodyPr>
-          <a:lstStyle/>
-          <a:p>
-            <a:pPr algn="l">
-              <a:lnSpc>
-                <a:spcPct val="115000"/>
-              </a:lnSpc>
-              <a:spcAft>
-                <a:spcPts val="600"/>
-              </a:spcAft>
-            </a:pPr>
-            <a:r>
-              <a:rPr sz="1400" b="1">
-                <a:solidFill>
-                  <a:srgbClr val="0F172A"/>
-                </a:solidFill>
-                <a:latin typeface="Arial"/>
-              </a:rPr>
-              <a:t>Retyping into seven portals</a:t>
-            </a:r>
-          </a:p>
-        </p:txBody>
-      </p:sp>
-      <p:sp>
-        <p:nvSpPr>
-          <p:cNvPr id="19" name="TextBox 18"/>
-          <p:cNvSpPr txBox="1"/>
-          <p:nvPr/>
-        </p:nvSpPr>
-        <p:spPr>
-          <a:xfrm>
-            <a:off x="5349240" y="4123944"/>
-            <a:ext cx="365760" cy="365760"/>
-          </a:xfrm>
-          <a:prstGeom prst="rect">
-            <a:avLst/>
-          </a:prstGeom>
-          <a:noFill/>
-        </p:spPr>
-        <p:txBody>
-          <a:bodyPr wrap="square" lIns="0" rIns="0" tIns="0" bIns="0">
-            <a:spAutoFit/>
-          </a:bodyPr>
-          <a:lstStyle/>
-          <a:p>
-            <a:pPr algn="l">
-              <a:lnSpc>
-                <a:spcPct val="115000"/>
-              </a:lnSpc>
-              <a:spcAft>
-                <a:spcPts val="600"/>
-              </a:spcAft>
-            </a:pPr>
-            <a:r>
-              <a:rPr sz="1500" b="0">
-                <a:solidFill>
-                  <a:srgbClr val="94A3B8"/>
-                </a:solidFill>
-                <a:latin typeface="Arial"/>
-              </a:rPr>
-              <a:t>→</a:t>
-            </a:r>
-          </a:p>
-        </p:txBody>
-      </p:sp>
-      <p:sp>
-        <p:nvSpPr>
-          <p:cNvPr id="20" name="TextBox 19"/>
-          <p:cNvSpPr txBox="1"/>
-          <p:nvPr/>
-        </p:nvSpPr>
-        <p:spPr>
-          <a:xfrm>
-            <a:off x="5806440" y="4133088"/>
-            <a:ext cx="5394960" cy="365760"/>
-          </a:xfrm>
-          <a:prstGeom prst="rect">
-            <a:avLst/>
-          </a:prstGeom>
-          <a:noFill/>
-        </p:spPr>
-        <p:txBody>
-          <a:bodyPr wrap="square" lIns="0" rIns="0" tIns="0" bIns="0">
-            <a:spAutoFit/>
-          </a:bodyPr>
-          <a:lstStyle/>
-          <a:p>
-            <a:pPr algn="l">
-              <a:lnSpc>
-                <a:spcPct val="115000"/>
-              </a:lnSpc>
-              <a:spcAft>
-                <a:spcPts val="600"/>
-              </a:spcAft>
-            </a:pPr>
-            <a:r>
-              <a:rPr sz="1400" b="0">
-                <a:solidFill>
-                  <a:srgbClr val="475569"/>
-                </a:solidFill>
-                <a:latin typeface="Arial"/>
-              </a:rPr>
-              <a:t>Master record → pre-populated filing packets</a:t>
-            </a:r>
-          </a:p>
-        </p:txBody>
-      </p:sp>
-      <p:sp>
-        <p:nvSpPr>
-          <p:cNvPr id="21" name="Rounded Rectangle 20"/>
-          <p:cNvSpPr/>
-          <p:nvPr/>
-        </p:nvSpPr>
-        <p:spPr>
-          <a:xfrm>
-            <a:off x="777240" y="4672584"/>
-            <a:ext cx="10607040" cy="658368"/>
+            <a:off x="777240" y="3483863"/>
+            <a:ext cx="10607040" cy="749808"/>
           </a:xfrm>
           <a:prstGeom prst="roundRect">
             <a:avLst>
@@ -8834,14 +6589,14 @@
       </p:sp>
       <p:sp>
         <p:nvSpPr>
-          <p:cNvPr id="22" name="TextBox 21"/>
+          <p:cNvPr id="12" name="TextBox 11"/>
           <p:cNvSpPr txBox="1"/>
           <p:nvPr/>
         </p:nvSpPr>
         <p:spPr>
           <a:xfrm>
-            <a:off x="1051560" y="4855464"/>
-            <a:ext cx="4206240" cy="365760"/>
+            <a:off x="1051560" y="3685031"/>
+            <a:ext cx="3931920" cy="365760"/>
           </a:xfrm>
           <a:prstGeom prst="rect">
             <a:avLst/>
@@ -8863,27 +6618,27 @@
               </a:spcAft>
             </a:pPr>
             <a:r>
-              <a:rPr sz="1400" b="1">
+              <a:rPr sz="1500" b="1">
                 <a:solidFill>
                   <a:srgbClr val="0F172A"/>
                 </a:solidFill>
                 <a:latin typeface="Arial"/>
               </a:rPr>
-              <a:t>Everything spikes at once</a:t>
-            </a:r>
-          </a:p>
-        </p:txBody>
-      </p:sp>
-      <p:sp>
-        <p:nvSpPr>
-          <p:cNvPr id="23" name="TextBox 22"/>
+              <a:t>The client is driving.</a:t>
+            </a:r>
+          </a:p>
+        </p:txBody>
+      </p:sp>
+      <p:sp>
+        <p:nvSpPr>
+          <p:cNvPr id="13" name="TextBox 12"/>
           <p:cNvSpPr txBox="1"/>
           <p:nvPr/>
         </p:nvSpPr>
         <p:spPr>
           <a:xfrm>
-            <a:off x="5349240" y="4846320"/>
-            <a:ext cx="365760" cy="365760"/>
+            <a:off x="5029200" y="3685031"/>
+            <a:ext cx="6126480" cy="365760"/>
           </a:xfrm>
           <a:prstGeom prst="rect">
             <a:avLst/>
@@ -8907,67 +6662,25 @@
             <a:r>
               <a:rPr sz="1500" b="0">
                 <a:solidFill>
-                  <a:srgbClr val="94A3B8"/>
-                </a:solidFill>
-                <a:latin typeface="Arial"/>
-              </a:rPr>
-              <a:t>→</a:t>
-            </a:r>
-          </a:p>
-        </p:txBody>
-      </p:sp>
-      <p:sp>
-        <p:nvSpPr>
-          <p:cNvPr id="24" name="TextBox 23"/>
-          <p:cNvSpPr txBox="1"/>
-          <p:nvPr/>
-        </p:nvSpPr>
-        <p:spPr>
-          <a:xfrm>
-            <a:off x="5806440" y="4855464"/>
-            <a:ext cx="5394960" cy="365760"/>
-          </a:xfrm>
-          <a:prstGeom prst="rect">
-            <a:avLst/>
-          </a:prstGeom>
-          <a:noFill/>
-        </p:spPr>
-        <p:txBody>
-          <a:bodyPr wrap="square" lIns="0" rIns="0" tIns="0" bIns="0">
-            <a:spAutoFit/>
-          </a:bodyPr>
-          <a:lstStyle/>
-          <a:p>
-            <a:pPr algn="l">
-              <a:lnSpc>
-                <a:spcPct val="115000"/>
-              </a:lnSpc>
-              <a:spcAft>
-                <a:spcPts val="600"/>
-              </a:spcAft>
-            </a:pPr>
-            <a:r>
-              <a:rPr sz="1400" b="0">
-                <a:solidFill>
                   <a:srgbClr val="475569"/>
                 </a:solidFill>
                 <a:latin typeface="Arial"/>
               </a:rPr>
-              <a:t>Seasonal view + pull-forward that flattens the peak</a:t>
-            </a:r>
-          </a:p>
-        </p:txBody>
-      </p:sp>
-      <p:sp>
-        <p:nvSpPr>
-          <p:cNvPr id="25" name="Rounded Rectangle 24"/>
+              <a:t>You can't collect a document from someone on I-5.</a:t>
+            </a:r>
+          </a:p>
+        </p:txBody>
+      </p:sp>
+      <p:sp>
+        <p:nvSpPr>
+          <p:cNvPr id="14" name="Rounded Rectangle 13"/>
           <p:cNvSpPr/>
           <p:nvPr/>
         </p:nvSpPr>
         <p:spPr>
           <a:xfrm>
-            <a:off x="777240" y="5394960"/>
-            <a:ext cx="10607040" cy="658368"/>
+            <a:off x="777240" y="4288535"/>
+            <a:ext cx="10607040" cy="749808"/>
           </a:xfrm>
           <a:prstGeom prst="roundRect">
             <a:avLst>
@@ -8975,7 +6688,7 @@
             </a:avLst>
           </a:prstGeom>
           <a:solidFill>
-            <a:srgbClr val="FFFFFF"/>
+            <a:srgbClr val="F6F7F9"/>
           </a:solidFill>
           <a:ln w="12700">
             <a:solidFill>
@@ -9008,14 +6721,14 @@
       </p:sp>
       <p:sp>
         <p:nvSpPr>
-          <p:cNvPr id="26" name="TextBox 25"/>
+          <p:cNvPr id="15" name="TextBox 14"/>
           <p:cNvSpPr txBox="1"/>
           <p:nvPr/>
         </p:nvSpPr>
         <p:spPr>
           <a:xfrm>
-            <a:off x="1051560" y="5577840"/>
-            <a:ext cx="4206240" cy="365760"/>
+            <a:off x="1051560" y="4489703"/>
+            <a:ext cx="3931920" cy="365760"/>
           </a:xfrm>
           <a:prstGeom prst="rect">
             <a:avLst/>
@@ -9037,27 +6750,27 @@
               </a:spcAft>
             </a:pPr>
             <a:r>
-              <a:rPr sz="1400" b="1">
+              <a:rPr sz="1500" b="1">
                 <a:solidFill>
                   <a:srgbClr val="0F172A"/>
                 </a:solidFill>
                 <a:latin typeface="Arial"/>
               </a:rPr>
-              <a:t>One miss costs more than one filing earns</a:t>
-            </a:r>
-          </a:p>
-        </p:txBody>
-      </p:sp>
-      <p:sp>
-        <p:nvSpPr>
-          <p:cNvPr id="27" name="TextBox 26"/>
+              <a:t>Everything lands at once.</a:t>
+            </a:r>
+          </a:p>
+        </p:txBody>
+      </p:sp>
+      <p:sp>
+        <p:nvSpPr>
+          <p:cNvPr id="16" name="TextBox 15"/>
           <p:cNvSpPr txBox="1"/>
           <p:nvPr/>
         </p:nvSpPr>
         <p:spPr>
           <a:xfrm>
-            <a:off x="5349240" y="5568696"/>
-            <a:ext cx="365760" cy="365760"/>
+            <a:off x="5029200" y="4489703"/>
+            <a:ext cx="6126480" cy="365760"/>
           </a:xfrm>
           <a:prstGeom prst="rect">
             <a:avLst/>
@@ -9081,25 +6794,73 @@
             <a:r>
               <a:rPr sz="1500" b="0">
                 <a:solidFill>
-                  <a:srgbClr val="94A3B8"/>
-                </a:solidFill>
-                <a:latin typeface="Arial"/>
-              </a:rPr>
-              <a:t>→</a:t>
-            </a:r>
-          </a:p>
-        </p:txBody>
-      </p:sp>
-      <p:sp>
-        <p:nvSpPr>
-          <p:cNvPr id="28" name="TextBox 27"/>
+                  <a:srgbClr val="475569"/>
+                </a:solidFill>
+                <a:latin typeface="Arial"/>
+              </a:rPr>
+              <a:t>Four fuel tax dates a year, on every client, simultaneously.</a:t>
+            </a:r>
+          </a:p>
+        </p:txBody>
+      </p:sp>
+      <p:sp>
+        <p:nvSpPr>
+          <p:cNvPr id="17" name="Rounded Rectangle 16"/>
+          <p:cNvSpPr/>
+          <p:nvPr/>
+        </p:nvSpPr>
+        <p:spPr>
+          <a:xfrm>
+            <a:off x="777240" y="5093207"/>
+            <a:ext cx="10607040" cy="749808"/>
+          </a:xfrm>
+          <a:prstGeom prst="roundRect">
+            <a:avLst>
+              <a:gd name="adj" fmla="val 6000"/>
+            </a:avLst>
+          </a:prstGeom>
+          <a:solidFill>
+            <a:srgbClr val="F6F7F9"/>
+          </a:solidFill>
+          <a:ln w="12700">
+            <a:solidFill>
+              <a:srgbClr val="E2E8F0"/>
+            </a:solidFill>
+          </a:ln>
+          <a:effectLst/>
+        </p:spPr>
+        <p:style>
+          <a:lnRef idx="1">
+            <a:schemeClr val="accent1"/>
+          </a:lnRef>
+          <a:fillRef idx="3">
+            <a:schemeClr val="accent1"/>
+          </a:fillRef>
+          <a:effectRef idx="2">
+            <a:schemeClr val="accent1"/>
+          </a:effectRef>
+          <a:fontRef idx="minor">
+            <a:schemeClr val="lt1"/>
+          </a:fontRef>
+        </p:style>
+        <p:txBody>
+          <a:bodyPr rtlCol="0" anchor="ctr"/>
+          <a:lstStyle/>
+          <a:p>
+            <a:pPr algn="ctr"/>
+          </a:p>
+        </p:txBody>
+      </p:sp>
+      <p:sp>
+        <p:nvSpPr>
+          <p:cNvPr id="18" name="TextBox 17"/>
           <p:cNvSpPr txBox="1"/>
           <p:nvPr/>
         </p:nvSpPr>
         <p:spPr>
           <a:xfrm>
-            <a:off x="5806440" y="5577840"/>
-            <a:ext cx="5394960" cy="365760"/>
+            <a:off x="1051560" y="5294375"/>
+            <a:ext cx="3931920" cy="365760"/>
           </a:xfrm>
           <a:prstGeom prst="rect">
             <a:avLst/>
@@ -9121,13 +6882,55 @@
               </a:spcAft>
             </a:pPr>
             <a:r>
-              <a:rPr sz="1400" b="0">
+              <a:rPr sz="1500" b="1">
+                <a:solidFill>
+                  <a:srgbClr val="0F172A"/>
+                </a:solidFill>
+                <a:latin typeface="Arial"/>
+              </a:rPr>
+              <a:t>One miss costs more than the fee.</a:t>
+            </a:r>
+          </a:p>
+        </p:txBody>
+      </p:sp>
+      <p:sp>
+        <p:nvSpPr>
+          <p:cNvPr id="19" name="TextBox 18"/>
+          <p:cNvSpPr txBox="1"/>
+          <p:nvPr/>
+        </p:nvSpPr>
+        <p:spPr>
+          <a:xfrm>
+            <a:off x="5029200" y="5294375"/>
+            <a:ext cx="6126480" cy="365760"/>
+          </a:xfrm>
+          <a:prstGeom prst="rect">
+            <a:avLst/>
+          </a:prstGeom>
+          <a:noFill/>
+        </p:spPr>
+        <p:txBody>
+          <a:bodyPr wrap="square" lIns="0" rIns="0" tIns="0" bIns="0">
+            <a:spAutoFit/>
+          </a:bodyPr>
+          <a:lstStyle/>
+          <a:p>
+            <a:pPr algn="l">
+              <a:lnSpc>
+                <a:spcPct val="115000"/>
+              </a:lnSpc>
+              <a:spcAft>
+                <a:spcPts val="600"/>
+              </a:spcAft>
+            </a:pPr>
+            <a:r>
+              <a:rPr sz="1500" b="0">
                 <a:solidFill>
                   <a:srgbClr val="475569"/>
                 </a:solidFill>
                 <a:latin typeface="Arial"/>
               </a:rPr>
-              <a:t>Revenue-at-risk ranking and tier coverage gaps</a:t>
+              <a:t>$199 to remember. ~$800 a day when a truck is parked.</a:t>
             </a:r>
           </a:p>
         </p:txBody>
@@ -9241,7 +7044,7 @@
                 </a:solidFill>
                 <a:latin typeface="Arial"/>
               </a:rPr>
-              <a:t>ARCHITECTURE</a:t>
+              <a:t>SCOPE</a:t>
             </a:r>
           </a:p>
         </p:txBody>
@@ -9283,156 +7086,21 @@
                 </a:solidFill>
                 <a:latin typeface="Arial"/>
               </a:rPr>
-              <a:t>The rules engine is the asset.</a:t>
-            </a:r>
-          </a:p>
-        </p:txBody>
-      </p:sp>
-      <p:sp>
-        <p:nvSpPr>
-          <p:cNvPr id="5" name="TextBox 4"/>
-          <p:cNvSpPr txBox="1"/>
-          <p:nvPr/>
-        </p:nvSpPr>
-        <p:spPr>
-          <a:xfrm>
-            <a:off x="777240" y="1783080"/>
-            <a:ext cx="10607040" cy="4114800"/>
-          </a:xfrm>
-          <a:prstGeom prst="rect">
-            <a:avLst/>
-          </a:prstGeom>
-          <a:noFill/>
-        </p:spPr>
-        <p:txBody>
-          <a:bodyPr wrap="square" lIns="0" rIns="0" tIns="0" bIns="0">
-            <a:spAutoFit/>
-          </a:bodyPr>
-          <a:lstStyle/>
-          <a:p>
-            <a:pPr>
-              <a:lnSpc>
-                <a:spcPct val="120000"/>
-              </a:lnSpc>
-              <a:spcAft>
-                <a:spcPts val="1000"/>
-              </a:spcAft>
-            </a:pPr>
-            <a:r>
-              <a:rPr sz="1600" b="1">
-                <a:solidFill>
-                  <a:srgbClr val="0F172A"/>
-                </a:solidFill>
-                <a:latin typeface="Arial"/>
-              </a:rPr>
-              <a:t>Pure. </a:t>
-            </a:r>
-            <a:r>
-              <a:rPr sz="1600">
-                <a:solidFill>
-                  <a:srgbClr val="475569"/>
-                </a:solidFill>
-                <a:latin typeface="Arial"/>
-              </a:rPr>
-              <a:t>src/rules/ imports nothing — no database, no React, no HTTP. Facts in, dated obligations out.</a:t>
-            </a:r>
-          </a:p>
-          <a:p>
-            <a:pPr>
-              <a:lnSpc>
-                <a:spcPct val="120000"/>
-              </a:lnSpc>
-              <a:spcAft>
-                <a:spcPts val="1000"/>
-              </a:spcAft>
-            </a:pPr>
-            <a:r>
-              <a:rPr sz="1600" b="1">
-                <a:solidFill>
-                  <a:srgbClr val="0F172A"/>
-                </a:solidFill>
-                <a:latin typeface="Arial"/>
-              </a:rPr>
-              <a:t>Deterministic. </a:t>
-            </a:r>
-            <a:r>
-              <a:rPr sz="1600">
-                <a:solidFill>
-                  <a:srgbClr val="475569"/>
-                </a:solidFill>
-                <a:latin typeface="Arial"/>
-              </a:rPr>
-              <a:t>The current date is injected, never read from the clock, so every rule is testable against a fixed day.</a:t>
-            </a:r>
-          </a:p>
-          <a:p>
-            <a:pPr>
-              <a:lnSpc>
-                <a:spcPct val="120000"/>
-              </a:lnSpc>
-              <a:spcAft>
-                <a:spcPts val="1000"/>
-              </a:spcAft>
-            </a:pPr>
-            <a:r>
-              <a:rPr sz="1600" b="1">
-                <a:solidFill>
-                  <a:srgbClr val="0F172A"/>
-                </a:solidFill>
-                <a:latin typeface="Arial"/>
-              </a:rPr>
-              <a:t>Cited. </a:t>
-            </a:r>
-            <a:r>
-              <a:rPr sz="1600">
-                <a:solidFill>
-                  <a:srgbClr val="475569"/>
-                </a:solidFill>
-                <a:latin typeface="Arial"/>
-              </a:rPr>
-              <a:t>Each rule carries the agency, the CFR section, and a source URL — and an explicit marker saying whether it was verified or still needs review.</a:t>
-            </a:r>
-          </a:p>
-          <a:p>
-            <a:pPr>
-              <a:lnSpc>
-                <a:spcPct val="120000"/>
-              </a:lnSpc>
-              <a:spcAft>
-                <a:spcPts val="1000"/>
-              </a:spcAft>
-            </a:pPr>
-            <a:r>
-              <a:rPr sz="1600" b="1">
-                <a:solidFill>
-                  <a:srgbClr val="0F172A"/>
-                </a:solidFill>
-                <a:latin typeface="Arial"/>
-              </a:rPr>
-              <a:t>Runs anywhere. </a:t>
-            </a:r>
-            <a:r>
-              <a:rPr sz="1600">
-                <a:solidFill>
-                  <a:srgbClr val="475569"/>
-                </a:solidFill>
-                <a:latin typeface="Arial"/>
-              </a:rPr>
-              <a:t>Because it has no I/O, the same functions that derive dates on the server run unchanged in the browser for the what-if simulator.</a:t>
-            </a:r>
-          </a:p>
-        </p:txBody>
-      </p:sp>
-      <p:sp>
-        <p:nvSpPr>
-          <p:cNvPr id="6" name="Rounded Rectangle 5"/>
+              <a:t>I picked three.</a:t>
+            </a:r>
+          </a:p>
+        </p:txBody>
+      </p:sp>
+      <p:sp>
+        <p:nvSpPr>
+          <p:cNvPr id="5" name="Rounded Rectangle 4"/>
           <p:cNvSpPr/>
           <p:nvPr/>
         </p:nvSpPr>
         <p:spPr>
           <a:xfrm>
-            <a:off x="777240" y="4343400"/>
-            <a:ext cx="10607040" cy="1417320"/>
+            <a:off x="777240" y="2011680"/>
+            <a:ext cx="3337560" cy="2286000"/>
           </a:xfrm>
           <a:prstGeom prst="roundRect">
             <a:avLst>
@@ -9473,14 +7141,60 @@
       </p:sp>
       <p:sp>
         <p:nvSpPr>
+          <p:cNvPr id="6" name="Rounded Rectangle 5"/>
+          <p:cNvSpPr/>
+          <p:nvPr/>
+        </p:nvSpPr>
+        <p:spPr>
+          <a:xfrm>
+            <a:off x="777240" y="2011680"/>
+            <a:ext cx="3337560" cy="73152"/>
+          </a:xfrm>
+          <a:prstGeom prst="roundRect">
+            <a:avLst>
+              <a:gd name="adj" fmla="val 6000"/>
+            </a:avLst>
+          </a:prstGeom>
+          <a:solidFill>
+            <a:srgbClr val="1E3A8A"/>
+          </a:solidFill>
+          <a:ln>
+            <a:noFill/>
+          </a:ln>
+          <a:effectLst/>
+        </p:spPr>
+        <p:style>
+          <a:lnRef idx="1">
+            <a:schemeClr val="accent1"/>
+          </a:lnRef>
+          <a:fillRef idx="3">
+            <a:schemeClr val="accent1"/>
+          </a:fillRef>
+          <a:effectRef idx="2">
+            <a:schemeClr val="accent1"/>
+          </a:effectRef>
+          <a:fontRef idx="minor">
+            <a:schemeClr val="lt1"/>
+          </a:fontRef>
+        </p:style>
+        <p:txBody>
+          <a:bodyPr rtlCol="0" anchor="ctr"/>
+          <a:lstStyle/>
+          <a:p>
+            <a:pPr algn="ctr"/>
+          </a:p>
+        </p:txBody>
+      </p:sp>
+      <p:sp>
+        <p:nvSpPr>
           <p:cNvPr id="7" name="TextBox 6"/>
           <p:cNvSpPr txBox="1"/>
           <p:nvPr/>
         </p:nvSpPr>
         <p:spPr>
           <a:xfrm>
-            <a:off x="1097280" y="4617720"/>
-            <a:ext cx="10058400" cy="365760"/>
+            <a:off x="1051560" y="2377440"/>
+            <a:ext cx="2788920" cy="457200"/>
           </a:xfrm>
           <a:prstGeom prst="rect">
             <a:avLst/>
@@ -9502,13 +7216,13 @@
               </a:spcAft>
             </a:pPr>
             <a:r>
-              <a:rPr sz="1600" b="1">
-                <a:solidFill>
-                  <a:srgbClr val="1E3A8A"/>
-                </a:solidFill>
-                <a:latin typeface="Arial"/>
-              </a:rPr>
-              <a:t>Obligations are materialised, not computed per request.</a:t>
+              <a:rPr sz="1900" b="1">
+                <a:solidFill>
+                  <a:srgbClr val="0F172A"/>
+                </a:solidFill>
+                <a:latin typeface="Arial"/>
+              </a:rPr>
+              <a:t>Derive the deadlines</a:t>
             </a:r>
           </a:p>
         </p:txBody>
@@ -9521,8 +7235,8 @@
         </p:nvSpPr>
         <p:spPr>
           <a:xfrm>
-            <a:off x="1097280" y="5029200"/>
-            <a:ext cx="9966960" cy="731520"/>
+            <a:off x="1051560" y="2971800"/>
+            <a:ext cx="2788920" cy="1005840"/>
           </a:xfrm>
           <a:prstGeom prst="rect">
             <a:avLst/>
@@ -9544,13 +7258,411 @@
               </a:spcAft>
             </a:pPr>
             <a:r>
-              <a:rPr sz="1300" b="0">
+              <a:rPr sz="1400" b="0">
                 <a:solidFill>
                   <a:srgbClr val="475569"/>
                 </a:solidFill>
                 <a:latin typeface="Arial"/>
               </a:rPr>
-              <a:t>Deriving in application code per page load does not survive 18,000 carriers. Persisting them makes book-wide questions a GROUP BY — and gives an audit trail for "why did we think this was due?"</a:t>
+              <a:t>Encode the regulations, don't store dates.</a:t>
+            </a:r>
+          </a:p>
+        </p:txBody>
+      </p:sp>
+      <p:sp>
+        <p:nvSpPr>
+          <p:cNvPr id="9" name="Rounded Rectangle 8"/>
+          <p:cNvSpPr/>
+          <p:nvPr/>
+        </p:nvSpPr>
+        <p:spPr>
+          <a:xfrm>
+            <a:off x="4343400" y="2011680"/>
+            <a:ext cx="3337560" cy="2286000"/>
+          </a:xfrm>
+          <a:prstGeom prst="roundRect">
+            <a:avLst>
+              <a:gd name="adj" fmla="val 6000"/>
+            </a:avLst>
+          </a:prstGeom>
+          <a:solidFill>
+            <a:srgbClr val="F6F7F9"/>
+          </a:solidFill>
+          <a:ln w="12700">
+            <a:solidFill>
+              <a:srgbClr val="E2E8F0"/>
+            </a:solidFill>
+          </a:ln>
+          <a:effectLst/>
+        </p:spPr>
+        <p:style>
+          <a:lnRef idx="1">
+            <a:schemeClr val="accent1"/>
+          </a:lnRef>
+          <a:fillRef idx="3">
+            <a:schemeClr val="accent1"/>
+          </a:fillRef>
+          <a:effectRef idx="2">
+            <a:schemeClr val="accent1"/>
+          </a:effectRef>
+          <a:fontRef idx="minor">
+            <a:schemeClr val="lt1"/>
+          </a:fontRef>
+        </p:style>
+        <p:txBody>
+          <a:bodyPr rtlCol="0" anchor="ctr"/>
+          <a:lstStyle/>
+          <a:p>
+            <a:pPr algn="ctr"/>
+          </a:p>
+        </p:txBody>
+      </p:sp>
+      <p:sp>
+        <p:nvSpPr>
+          <p:cNvPr id="10" name="Rounded Rectangle 9"/>
+          <p:cNvSpPr/>
+          <p:nvPr/>
+        </p:nvSpPr>
+        <p:spPr>
+          <a:xfrm>
+            <a:off x="4343400" y="2011680"/>
+            <a:ext cx="3337560" cy="73152"/>
+          </a:xfrm>
+          <a:prstGeom prst="roundRect">
+            <a:avLst>
+              <a:gd name="adj" fmla="val 6000"/>
+            </a:avLst>
+          </a:prstGeom>
+          <a:solidFill>
+            <a:srgbClr val="C2410C"/>
+          </a:solidFill>
+          <a:ln>
+            <a:noFill/>
+          </a:ln>
+          <a:effectLst/>
+        </p:spPr>
+        <p:style>
+          <a:lnRef idx="1">
+            <a:schemeClr val="accent1"/>
+          </a:lnRef>
+          <a:fillRef idx="3">
+            <a:schemeClr val="accent1"/>
+          </a:fillRef>
+          <a:effectRef idx="2">
+            <a:schemeClr val="accent1"/>
+          </a:effectRef>
+          <a:fontRef idx="minor">
+            <a:schemeClr val="lt1"/>
+          </a:fontRef>
+        </p:style>
+        <p:txBody>
+          <a:bodyPr rtlCol="0" anchor="ctr"/>
+          <a:lstStyle/>
+          <a:p>
+            <a:pPr algn="ctr"/>
+          </a:p>
+        </p:txBody>
+      </p:sp>
+      <p:sp>
+        <p:nvSpPr>
+          <p:cNvPr id="11" name="TextBox 10"/>
+          <p:cNvSpPr txBox="1"/>
+          <p:nvPr/>
+        </p:nvSpPr>
+        <p:spPr>
+          <a:xfrm>
+            <a:off x="4617720" y="2377440"/>
+            <a:ext cx="2788920" cy="457200"/>
+          </a:xfrm>
+          <a:prstGeom prst="rect">
+            <a:avLst/>
+          </a:prstGeom>
+          <a:noFill/>
+        </p:spPr>
+        <p:txBody>
+          <a:bodyPr wrap="square" lIns="0" rIns="0" tIns="0" bIns="0">
+            <a:spAutoFit/>
+          </a:bodyPr>
+          <a:lstStyle/>
+          <a:p>
+            <a:pPr algn="l">
+              <a:lnSpc>
+                <a:spcPct val="115000"/>
+              </a:lnSpc>
+              <a:spcAft>
+                <a:spcPts val="600"/>
+              </a:spcAft>
+            </a:pPr>
+            <a:r>
+              <a:rPr sz="1900" b="1">
+                <a:solidFill>
+                  <a:srgbClr val="0F172A"/>
+                </a:solidFill>
+                <a:latin typeface="Arial"/>
+              </a:rPr>
+              <a:t>Model what blocks what</a:t>
+            </a:r>
+          </a:p>
+        </p:txBody>
+      </p:sp>
+      <p:sp>
+        <p:nvSpPr>
+          <p:cNvPr id="12" name="TextBox 11"/>
+          <p:cNvSpPr txBox="1"/>
+          <p:nvPr/>
+        </p:nvSpPr>
+        <p:spPr>
+          <a:xfrm>
+            <a:off x="4617720" y="2971800"/>
+            <a:ext cx="2788920" cy="1005840"/>
+          </a:xfrm>
+          <a:prstGeom prst="rect">
+            <a:avLst/>
+          </a:prstGeom>
+          <a:noFill/>
+        </p:spPr>
+        <p:txBody>
+          <a:bodyPr wrap="square" lIns="0" rIns="0" tIns="0" bIns="0">
+            <a:spAutoFit/>
+          </a:bodyPr>
+          <a:lstStyle/>
+          <a:p>
+            <a:pPr algn="l">
+              <a:lnSpc>
+                <a:spcPct val="115000"/>
+              </a:lnSpc>
+              <a:spcAft>
+                <a:spcPts val="600"/>
+              </a:spcAft>
+            </a:pPr>
+            <a:r>
+              <a:rPr sz="1400" b="0">
+                <a:solidFill>
+                  <a:srgbClr val="475569"/>
+                </a:solidFill>
+                <a:latin typeface="Arial"/>
+              </a:rPr>
+              <a:t>The chain is the part no calendar shows.</a:t>
+            </a:r>
+          </a:p>
+        </p:txBody>
+      </p:sp>
+      <p:sp>
+        <p:nvSpPr>
+          <p:cNvPr id="13" name="Rounded Rectangle 12"/>
+          <p:cNvSpPr/>
+          <p:nvPr/>
+        </p:nvSpPr>
+        <p:spPr>
+          <a:xfrm>
+            <a:off x="7909560" y="2011680"/>
+            <a:ext cx="3337560" cy="2286000"/>
+          </a:xfrm>
+          <a:prstGeom prst="roundRect">
+            <a:avLst>
+              <a:gd name="adj" fmla="val 6000"/>
+            </a:avLst>
+          </a:prstGeom>
+          <a:solidFill>
+            <a:srgbClr val="F6F7F9"/>
+          </a:solidFill>
+          <a:ln w="12700">
+            <a:solidFill>
+              <a:srgbClr val="E2E8F0"/>
+            </a:solidFill>
+          </a:ln>
+          <a:effectLst/>
+        </p:spPr>
+        <p:style>
+          <a:lnRef idx="1">
+            <a:schemeClr val="accent1"/>
+          </a:lnRef>
+          <a:fillRef idx="3">
+            <a:schemeClr val="accent1"/>
+          </a:fillRef>
+          <a:effectRef idx="2">
+            <a:schemeClr val="accent1"/>
+          </a:effectRef>
+          <a:fontRef idx="minor">
+            <a:schemeClr val="lt1"/>
+          </a:fontRef>
+        </p:style>
+        <p:txBody>
+          <a:bodyPr rtlCol="0" anchor="ctr"/>
+          <a:lstStyle/>
+          <a:p>
+            <a:pPr algn="ctr"/>
+          </a:p>
+        </p:txBody>
+      </p:sp>
+      <p:sp>
+        <p:nvSpPr>
+          <p:cNvPr id="14" name="Rounded Rectangle 13"/>
+          <p:cNvSpPr/>
+          <p:nvPr/>
+        </p:nvSpPr>
+        <p:spPr>
+          <a:xfrm>
+            <a:off x="7909560" y="2011680"/>
+            <a:ext cx="3337560" cy="73152"/>
+          </a:xfrm>
+          <a:prstGeom prst="roundRect">
+            <a:avLst>
+              <a:gd name="adj" fmla="val 6000"/>
+            </a:avLst>
+          </a:prstGeom>
+          <a:solidFill>
+            <a:srgbClr val="15803D"/>
+          </a:solidFill>
+          <a:ln>
+            <a:noFill/>
+          </a:ln>
+          <a:effectLst/>
+        </p:spPr>
+        <p:style>
+          <a:lnRef idx="1">
+            <a:schemeClr val="accent1"/>
+          </a:lnRef>
+          <a:fillRef idx="3">
+            <a:schemeClr val="accent1"/>
+          </a:fillRef>
+          <a:effectRef idx="2">
+            <a:schemeClr val="accent1"/>
+          </a:effectRef>
+          <a:fontRef idx="minor">
+            <a:schemeClr val="lt1"/>
+          </a:fontRef>
+        </p:style>
+        <p:txBody>
+          <a:bodyPr rtlCol="0" anchor="ctr"/>
+          <a:lstStyle/>
+          <a:p>
+            <a:pPr algn="ctr"/>
+          </a:p>
+        </p:txBody>
+      </p:sp>
+      <p:sp>
+        <p:nvSpPr>
+          <p:cNvPr id="15" name="TextBox 14"/>
+          <p:cNvSpPr txBox="1"/>
+          <p:nvPr/>
+        </p:nvSpPr>
+        <p:spPr>
+          <a:xfrm>
+            <a:off x="8183880" y="2377440"/>
+            <a:ext cx="2788920" cy="457200"/>
+          </a:xfrm>
+          <a:prstGeom prst="rect">
+            <a:avLst/>
+          </a:prstGeom>
+          <a:noFill/>
+        </p:spPr>
+        <p:txBody>
+          <a:bodyPr wrap="square" lIns="0" rIns="0" tIns="0" bIns="0">
+            <a:spAutoFit/>
+          </a:bodyPr>
+          <a:lstStyle/>
+          <a:p>
+            <a:pPr algn="l">
+              <a:lnSpc>
+                <a:spcPct val="115000"/>
+              </a:lnSpc>
+              <a:spcAft>
+                <a:spcPts val="600"/>
+              </a:spcAft>
+            </a:pPr>
+            <a:r>
+              <a:rPr sz="1900" b="1">
+                <a:solidFill>
+                  <a:srgbClr val="0F172A"/>
+                </a:solidFill>
+                <a:latin typeface="Arial"/>
+              </a:rPr>
+              <a:t>Collect the documents</a:t>
+            </a:r>
+          </a:p>
+        </p:txBody>
+      </p:sp>
+      <p:sp>
+        <p:nvSpPr>
+          <p:cNvPr id="16" name="TextBox 15"/>
+          <p:cNvSpPr txBox="1"/>
+          <p:nvPr/>
+        </p:nvSpPr>
+        <p:spPr>
+          <a:xfrm>
+            <a:off x="8183880" y="2971800"/>
+            <a:ext cx="2788920" cy="1005840"/>
+          </a:xfrm>
+          <a:prstGeom prst="rect">
+            <a:avLst/>
+          </a:prstGeom>
+          <a:noFill/>
+        </p:spPr>
+        <p:txBody>
+          <a:bodyPr wrap="square" lIns="0" rIns="0" tIns="0" bIns="0">
+            <a:spAutoFit/>
+          </a:bodyPr>
+          <a:lstStyle/>
+          <a:p>
+            <a:pPr algn="l">
+              <a:lnSpc>
+                <a:spcPct val="115000"/>
+              </a:lnSpc>
+              <a:spcAft>
+                <a:spcPts val="600"/>
+              </a:spcAft>
+            </a:pPr>
+            <a:r>
+              <a:rPr sz="1400" b="0">
+                <a:solidFill>
+                  <a:srgbClr val="475569"/>
+                </a:solidFill>
+                <a:latin typeface="Arial"/>
+              </a:rPr>
+              <a:t>Ask early, chase automatically, read what arrives.</a:t>
+            </a:r>
+          </a:p>
+        </p:txBody>
+      </p:sp>
+      <p:sp>
+        <p:nvSpPr>
+          <p:cNvPr id="17" name="TextBox 16"/>
+          <p:cNvSpPr txBox="1"/>
+          <p:nvPr/>
+        </p:nvSpPr>
+        <p:spPr>
+          <a:xfrm>
+            <a:off x="777240" y="4754880"/>
+            <a:ext cx="10607040" cy="457200"/>
+          </a:xfrm>
+          <a:prstGeom prst="rect">
+            <a:avLst/>
+          </a:prstGeom>
+          <a:noFill/>
+        </p:spPr>
+        <p:txBody>
+          <a:bodyPr wrap="square" lIns="0" rIns="0" tIns="0" bIns="0">
+            <a:spAutoFit/>
+          </a:bodyPr>
+          <a:lstStyle/>
+          <a:p>
+            <a:pPr algn="l">
+              <a:lnSpc>
+                <a:spcPct val="115000"/>
+              </a:lnSpc>
+              <a:spcAft>
+                <a:spcPts val="600"/>
+              </a:spcAft>
+            </a:pPr>
+            <a:r>
+              <a:rPr sz="1500" b="0">
+                <a:solidFill>
+                  <a:srgbClr val="475569"/>
+                </a:solidFill>
+                <a:latin typeface="Arial"/>
+              </a:rPr>
+              <a:t>The rest — seasonal planning, filing packets, coverage gaps — fell out of the same engine once it existed.</a:t>
             </a:r>
           </a:p>
         </p:txBody>
@@ -9664,7 +7776,7 @@
                 </a:solidFill>
                 <a:latin typeface="Arial"/>
               </a:rPr>
-              <a:t>THE DIFFERENTIATOR</a:t>
+              <a:t>HOW I ADDRESSED IT — 1 OF 3</a:t>
             </a:r>
           </a:p>
         </p:txBody>
@@ -9706,7 +7818,7 @@
                 </a:solidFill>
                 <a:latin typeface="Arial"/>
               </a:rPr>
-              <a:t>The date nobody's calendar contains.</a:t>
+              <a:t>Deriving the deadlines.</a:t>
             </a:r>
           </a:p>
         </p:txBody>
@@ -9719,8 +7831,8 @@
         </p:nvSpPr>
         <p:spPr>
           <a:xfrm>
-            <a:off x="777240" y="1737360"/>
-            <a:ext cx="10515600" cy="365760"/>
+            <a:off x="777240" y="1920240"/>
+            <a:ext cx="10607040" cy="4114800"/>
           </a:xfrm>
           <a:prstGeom prst="rect">
             <a:avLst/>
@@ -9733,22 +7845,79 @@
           </a:bodyPr>
           <a:lstStyle/>
           <a:p>
-            <a:pPr algn="l">
-              <a:lnSpc>
-                <a:spcPct val="115000"/>
-              </a:lnSpc>
-              <a:spcAft>
-                <a:spcPts val="600"/>
-              </a:spcAft>
-            </a:pPr>
-            <a:r>
-              <a:rPr sz="1500" b="0">
+            <a:pPr>
+              <a:lnSpc>
+                <a:spcPct val="120000"/>
+              </a:lnSpc>
+              <a:spcAft>
+                <a:spcPts val="1600"/>
+              </a:spcAft>
+            </a:pPr>
+            <a:r>
+              <a:rPr sz="1800">
                 <a:solidFill>
                   <a:srgbClr val="475569"/>
                 </a:solidFill>
                 <a:latin typeface="Arial"/>
               </a:rPr>
-              <a:t>Altamont Freight Systems, Unit 101 — a real chain from the seeded book:</a:t>
+              <a:t>Seven rules, each carrying the regulation it came from.</a:t>
+            </a:r>
+          </a:p>
+          <a:p>
+            <a:pPr>
+              <a:lnSpc>
+                <a:spcPct val="120000"/>
+              </a:lnSpc>
+              <a:spcAft>
+                <a:spcPts val="1600"/>
+              </a:spcAft>
+            </a:pPr>
+            <a:r>
+              <a:rPr sz="1800">
+                <a:solidFill>
+                  <a:srgbClr val="475569"/>
+                </a:solidFill>
+                <a:latin typeface="Arial"/>
+              </a:rPr>
+              <a:t>One is derived from digits in the DOT number. Nobody is ever told that date.</a:t>
+            </a:r>
+          </a:p>
+          <a:p>
+            <a:pPr>
+              <a:lnSpc>
+                <a:spcPct val="120000"/>
+              </a:lnSpc>
+              <a:spcAft>
+                <a:spcPts val="1600"/>
+              </a:spcAft>
+            </a:pPr>
+            <a:r>
+              <a:rPr sz="1800">
+                <a:solidFill>
+                  <a:srgbClr val="475569"/>
+                </a:solidFill>
+                <a:latin typeface="Arial"/>
+              </a:rPr>
+              <a:t>Two are marked "needs review" — I wasn't certain, so the app says so.</a:t>
+            </a:r>
+          </a:p>
+          <a:p>
+            <a:pPr>
+              <a:lnSpc>
+                <a:spcPct val="120000"/>
+              </a:lnSpc>
+              <a:spcAft>
+                <a:spcPts val="1600"/>
+              </a:spcAft>
+            </a:pPr>
+            <a:r>
+              <a:rPr sz="1800">
+                <a:solidFill>
+                  <a:srgbClr val="475569"/>
+                </a:solidFill>
+                <a:latin typeface="Arial"/>
+              </a:rPr>
+              <a:t>Ambiguous dates are refused, not guessed. 03/04 could be March or April.</a:t>
             </a:r>
           </a:p>
         </p:txBody>
@@ -9761,8 +7930,8 @@
         </p:nvSpPr>
         <p:spPr>
           <a:xfrm>
-            <a:off x="777240" y="2286000"/>
-            <a:ext cx="2834640" cy="1143000"/>
+            <a:off x="777240" y="4480560"/>
+            <a:ext cx="10607040" cy="1188720"/>
           </a:xfrm>
           <a:prstGeom prst="roundRect">
             <a:avLst>
@@ -9803,60 +7972,14 @@
       </p:sp>
       <p:sp>
         <p:nvSpPr>
-          <p:cNvPr id="7" name="Rounded Rectangle 6"/>
-          <p:cNvSpPr/>
-          <p:nvPr/>
-        </p:nvSpPr>
-        <p:spPr>
-          <a:xfrm>
-            <a:off x="777240" y="2286000"/>
-            <a:ext cx="2834640" cy="64008"/>
-          </a:xfrm>
-          <a:prstGeom prst="roundRect">
-            <a:avLst>
-              <a:gd name="adj" fmla="val 6000"/>
-            </a:avLst>
-          </a:prstGeom>
-          <a:solidFill>
-            <a:srgbClr val="B91C1C"/>
-          </a:solidFill>
-          <a:ln>
-            <a:noFill/>
-          </a:ln>
-          <a:effectLst/>
-        </p:spPr>
-        <p:style>
-          <a:lnRef idx="1">
-            <a:schemeClr val="accent1"/>
-          </a:lnRef>
-          <a:fillRef idx="3">
-            <a:schemeClr val="accent1"/>
-          </a:fillRef>
-          <a:effectRef idx="2">
-            <a:schemeClr val="accent1"/>
-          </a:effectRef>
-          <a:fontRef idx="minor">
-            <a:schemeClr val="lt1"/>
-          </a:fontRef>
-        </p:style>
-        <p:txBody>
-          <a:bodyPr rtlCol="0" anchor="ctr"/>
-          <a:lstStyle/>
-          <a:p>
-            <a:pPr algn="ctr"/>
-          </a:p>
-        </p:txBody>
-      </p:sp>
-      <p:sp>
-        <p:nvSpPr>
-          <p:cNvPr id="8" name="TextBox 7"/>
+          <p:cNvPr id="7" name="TextBox 6"/>
           <p:cNvSpPr txBox="1"/>
           <p:nvPr/>
         </p:nvSpPr>
         <p:spPr>
           <a:xfrm>
-            <a:off x="1005840" y="2542032"/>
-            <a:ext cx="2377440" cy="365760"/>
+            <a:off x="1097280" y="4892040"/>
+            <a:ext cx="10058400" cy="457200"/>
           </a:xfrm>
           <a:prstGeom prst="rect">
             <a:avLst/>
@@ -9878,669 +8001,13 @@
               </a:spcAft>
             </a:pPr>
             <a:r>
-              <a:rPr sz="1400" b="1">
-                <a:solidFill>
-                  <a:srgbClr val="0F172A"/>
-                </a:solidFill>
-                <a:latin typeface="Arial"/>
-              </a:rPr>
-              <a:t>CARB Clean Truck Check</a:t>
-            </a:r>
-          </a:p>
-        </p:txBody>
-      </p:sp>
-      <p:sp>
-        <p:nvSpPr>
-          <p:cNvPr id="9" name="TextBox 8"/>
-          <p:cNvSpPr txBox="1"/>
-          <p:nvPr/>
-        </p:nvSpPr>
-        <p:spPr>
-          <a:xfrm>
-            <a:off x="1005840" y="2907792"/>
-            <a:ext cx="2377440" cy="365760"/>
-          </a:xfrm>
-          <a:prstGeom prst="rect">
-            <a:avLst/>
-          </a:prstGeom>
-          <a:noFill/>
-        </p:spPr>
-        <p:txBody>
-          <a:bodyPr wrap="square" lIns="0" rIns="0" tIns="0" bIns="0">
-            <a:spAutoFit/>
-          </a:bodyPr>
-          <a:lstStyle/>
-          <a:p>
-            <a:pPr algn="l">
-              <a:lnSpc>
-                <a:spcPct val="115000"/>
-              </a:lnSpc>
-              <a:spcAft>
-                <a:spcPts val="600"/>
-              </a:spcAft>
-            </a:pPr>
-            <a:r>
-              <a:rPr sz="1300" b="0">
-                <a:solidFill>
-                  <a:srgbClr val="475569"/>
-                </a:solidFill>
-                <a:latin typeface="Arial"/>
-              </a:rPr>
-              <a:t>Aug 17</a:t>
-            </a:r>
-          </a:p>
-        </p:txBody>
-      </p:sp>
-      <p:sp>
-        <p:nvSpPr>
-          <p:cNvPr id="10" name="TextBox 9"/>
-          <p:cNvSpPr txBox="1"/>
-          <p:nvPr/>
-        </p:nvSpPr>
-        <p:spPr>
-          <a:xfrm>
-            <a:off x="3703320" y="2697480"/>
-            <a:ext cx="457200" cy="365760"/>
-          </a:xfrm>
-          <a:prstGeom prst="rect">
-            <a:avLst/>
-          </a:prstGeom>
-          <a:noFill/>
-        </p:spPr>
-        <p:txBody>
-          <a:bodyPr wrap="square" lIns="0" rIns="0" tIns="0" bIns="0">
-            <a:spAutoFit/>
-          </a:bodyPr>
-          <a:lstStyle/>
-          <a:p>
-            <a:pPr algn="l">
-              <a:lnSpc>
-                <a:spcPct val="115000"/>
-              </a:lnSpc>
-              <a:spcAft>
-                <a:spcPts val="600"/>
-              </a:spcAft>
-            </a:pPr>
-            <a:r>
-              <a:rPr sz="2000" b="0">
-                <a:solidFill>
-                  <a:srgbClr val="94A3B8"/>
-                </a:solidFill>
-                <a:latin typeface="Arial"/>
-              </a:rPr>
-              <a:t>→</a:t>
-            </a:r>
-          </a:p>
-        </p:txBody>
-      </p:sp>
-      <p:sp>
-        <p:nvSpPr>
-          <p:cNvPr id="11" name="Rounded Rectangle 10"/>
-          <p:cNvSpPr/>
-          <p:nvPr/>
-        </p:nvSpPr>
-        <p:spPr>
-          <a:xfrm>
-            <a:off x="4160520" y="2286000"/>
-            <a:ext cx="2834640" cy="1143000"/>
-          </a:xfrm>
-          <a:prstGeom prst="roundRect">
-            <a:avLst>
-              <a:gd name="adj" fmla="val 6000"/>
-            </a:avLst>
-          </a:prstGeom>
-          <a:solidFill>
-            <a:srgbClr val="F6F7F9"/>
-          </a:solidFill>
-          <a:ln w="12700">
-            <a:solidFill>
-              <a:srgbClr val="E2E8F0"/>
-            </a:solidFill>
-          </a:ln>
-          <a:effectLst/>
-        </p:spPr>
-        <p:style>
-          <a:lnRef idx="1">
-            <a:schemeClr val="accent1"/>
-          </a:lnRef>
-          <a:fillRef idx="3">
-            <a:schemeClr val="accent1"/>
-          </a:fillRef>
-          <a:effectRef idx="2">
-            <a:schemeClr val="accent1"/>
-          </a:effectRef>
-          <a:fontRef idx="minor">
-            <a:schemeClr val="lt1"/>
-          </a:fontRef>
-        </p:style>
-        <p:txBody>
-          <a:bodyPr rtlCol="0" anchor="ctr"/>
-          <a:lstStyle/>
-          <a:p>
-            <a:pPr algn="ctr"/>
-          </a:p>
-        </p:txBody>
-      </p:sp>
-      <p:sp>
-        <p:nvSpPr>
-          <p:cNvPr id="12" name="Rounded Rectangle 11"/>
-          <p:cNvSpPr/>
-          <p:nvPr/>
-        </p:nvSpPr>
-        <p:spPr>
-          <a:xfrm>
-            <a:off x="4160520" y="2286000"/>
-            <a:ext cx="2834640" cy="64008"/>
-          </a:xfrm>
-          <a:prstGeom prst="roundRect">
-            <a:avLst>
-              <a:gd name="adj" fmla="val 6000"/>
-            </a:avLst>
-          </a:prstGeom>
-          <a:solidFill>
-            <a:srgbClr val="C2410C"/>
-          </a:solidFill>
-          <a:ln>
-            <a:noFill/>
-          </a:ln>
-          <a:effectLst/>
-        </p:spPr>
-        <p:style>
-          <a:lnRef idx="1">
-            <a:schemeClr val="accent1"/>
-          </a:lnRef>
-          <a:fillRef idx="3">
-            <a:schemeClr val="accent1"/>
-          </a:fillRef>
-          <a:effectRef idx="2">
-            <a:schemeClr val="accent1"/>
-          </a:effectRef>
-          <a:fontRef idx="minor">
-            <a:schemeClr val="lt1"/>
-          </a:fontRef>
-        </p:style>
-        <p:txBody>
-          <a:bodyPr rtlCol="0" anchor="ctr"/>
-          <a:lstStyle/>
-          <a:p>
-            <a:pPr algn="ctr"/>
-          </a:p>
-        </p:txBody>
-      </p:sp>
-      <p:sp>
-        <p:nvSpPr>
-          <p:cNvPr id="13" name="TextBox 12"/>
-          <p:cNvSpPr txBox="1"/>
-          <p:nvPr/>
-        </p:nvSpPr>
-        <p:spPr>
-          <a:xfrm>
-            <a:off x="4389120" y="2542032"/>
-            <a:ext cx="2377440" cy="365760"/>
-          </a:xfrm>
-          <a:prstGeom prst="rect">
-            <a:avLst/>
-          </a:prstGeom>
-          <a:noFill/>
-        </p:spPr>
-        <p:txBody>
-          <a:bodyPr wrap="square" lIns="0" rIns="0" tIns="0" bIns="0">
-            <a:spAutoFit/>
-          </a:bodyPr>
-          <a:lstStyle/>
-          <a:p>
-            <a:pPr algn="l">
-              <a:lnSpc>
-                <a:spcPct val="115000"/>
-              </a:lnSpc>
-              <a:spcAft>
-                <a:spcPts val="600"/>
-              </a:spcAft>
-            </a:pPr>
-            <a:r>
-              <a:rPr sz="1400" b="1">
-                <a:solidFill>
-                  <a:srgbClr val="0F172A"/>
-                </a:solidFill>
-                <a:latin typeface="Arial"/>
-              </a:rPr>
-              <a:t>Form 2290 (HVUT)</a:t>
-            </a:r>
-          </a:p>
-        </p:txBody>
-      </p:sp>
-      <p:sp>
-        <p:nvSpPr>
-          <p:cNvPr id="14" name="TextBox 13"/>
-          <p:cNvSpPr txBox="1"/>
-          <p:nvPr/>
-        </p:nvSpPr>
-        <p:spPr>
-          <a:xfrm>
-            <a:off x="4389120" y="2907792"/>
-            <a:ext cx="2377440" cy="365760"/>
-          </a:xfrm>
-          <a:prstGeom prst="rect">
-            <a:avLst/>
-          </a:prstGeom>
-          <a:noFill/>
-        </p:spPr>
-        <p:txBody>
-          <a:bodyPr wrap="square" lIns="0" rIns="0" tIns="0" bIns="0">
-            <a:spAutoFit/>
-          </a:bodyPr>
-          <a:lstStyle/>
-          <a:p>
-            <a:pPr algn="l">
-              <a:lnSpc>
-                <a:spcPct val="115000"/>
-              </a:lnSpc>
-              <a:spcAft>
-                <a:spcPts val="600"/>
-              </a:spcAft>
-            </a:pPr>
-            <a:r>
-              <a:rPr sz="1300" b="0">
-                <a:solidFill>
-                  <a:srgbClr val="475569"/>
-                </a:solidFill>
-                <a:latin typeface="Arial"/>
-              </a:rPr>
-              <a:t>Aug 31</a:t>
-            </a:r>
-          </a:p>
-        </p:txBody>
-      </p:sp>
-      <p:sp>
-        <p:nvSpPr>
-          <p:cNvPr id="15" name="TextBox 14"/>
-          <p:cNvSpPr txBox="1"/>
-          <p:nvPr/>
-        </p:nvSpPr>
-        <p:spPr>
-          <a:xfrm>
-            <a:off x="7086600" y="2697480"/>
-            <a:ext cx="457200" cy="365760"/>
-          </a:xfrm>
-          <a:prstGeom prst="rect">
-            <a:avLst/>
-          </a:prstGeom>
-          <a:noFill/>
-        </p:spPr>
-        <p:txBody>
-          <a:bodyPr wrap="square" lIns="0" rIns="0" tIns="0" bIns="0">
-            <a:spAutoFit/>
-          </a:bodyPr>
-          <a:lstStyle/>
-          <a:p>
-            <a:pPr algn="l">
-              <a:lnSpc>
-                <a:spcPct val="115000"/>
-              </a:lnSpc>
-              <a:spcAft>
-                <a:spcPts val="600"/>
-              </a:spcAft>
-            </a:pPr>
-            <a:r>
-              <a:rPr sz="2000" b="0">
-                <a:solidFill>
-                  <a:srgbClr val="94A3B8"/>
-                </a:solidFill>
-                <a:latin typeface="Arial"/>
-              </a:rPr>
-              <a:t>→</a:t>
-            </a:r>
-          </a:p>
-        </p:txBody>
-      </p:sp>
-      <p:sp>
-        <p:nvSpPr>
-          <p:cNvPr id="16" name="Rounded Rectangle 15"/>
-          <p:cNvSpPr/>
-          <p:nvPr/>
-        </p:nvSpPr>
-        <p:spPr>
-          <a:xfrm>
-            <a:off x="7543800" y="2286000"/>
-            <a:ext cx="2834640" cy="1143000"/>
-          </a:xfrm>
-          <a:prstGeom prst="roundRect">
-            <a:avLst>
-              <a:gd name="adj" fmla="val 6000"/>
-            </a:avLst>
-          </a:prstGeom>
-          <a:solidFill>
-            <a:srgbClr val="F6F7F9"/>
-          </a:solidFill>
-          <a:ln w="12700">
-            <a:solidFill>
-              <a:srgbClr val="E2E8F0"/>
-            </a:solidFill>
-          </a:ln>
-          <a:effectLst/>
-        </p:spPr>
-        <p:style>
-          <a:lnRef idx="1">
-            <a:schemeClr val="accent1"/>
-          </a:lnRef>
-          <a:fillRef idx="3">
-            <a:schemeClr val="accent1"/>
-          </a:fillRef>
-          <a:effectRef idx="2">
-            <a:schemeClr val="accent1"/>
-          </a:effectRef>
-          <a:fontRef idx="minor">
-            <a:schemeClr val="lt1"/>
-          </a:fontRef>
-        </p:style>
-        <p:txBody>
-          <a:bodyPr rtlCol="0" anchor="ctr"/>
-          <a:lstStyle/>
-          <a:p>
-            <a:pPr algn="ctr"/>
-          </a:p>
-        </p:txBody>
-      </p:sp>
-      <p:sp>
-        <p:nvSpPr>
-          <p:cNvPr id="17" name="Rounded Rectangle 16"/>
-          <p:cNvSpPr/>
-          <p:nvPr/>
-        </p:nvSpPr>
-        <p:spPr>
-          <a:xfrm>
-            <a:off x="7543800" y="2286000"/>
-            <a:ext cx="2834640" cy="64008"/>
-          </a:xfrm>
-          <a:prstGeom prst="roundRect">
-            <a:avLst>
-              <a:gd name="adj" fmla="val 6000"/>
-            </a:avLst>
-          </a:prstGeom>
-          <a:solidFill>
-            <a:srgbClr val="0F172A"/>
-          </a:solidFill>
-          <a:ln>
-            <a:noFill/>
-          </a:ln>
-          <a:effectLst/>
-        </p:spPr>
-        <p:style>
-          <a:lnRef idx="1">
-            <a:schemeClr val="accent1"/>
-          </a:lnRef>
-          <a:fillRef idx="3">
-            <a:schemeClr val="accent1"/>
-          </a:fillRef>
-          <a:effectRef idx="2">
-            <a:schemeClr val="accent1"/>
-          </a:effectRef>
-          <a:fontRef idx="minor">
-            <a:schemeClr val="lt1"/>
-          </a:fontRef>
-        </p:style>
-        <p:txBody>
-          <a:bodyPr rtlCol="0" anchor="ctr"/>
-          <a:lstStyle/>
-          <a:p>
-            <a:pPr algn="ctr"/>
-          </a:p>
-        </p:txBody>
-      </p:sp>
-      <p:sp>
-        <p:nvSpPr>
-          <p:cNvPr id="18" name="TextBox 17"/>
-          <p:cNvSpPr txBox="1"/>
-          <p:nvPr/>
-        </p:nvSpPr>
-        <p:spPr>
-          <a:xfrm>
-            <a:off x="7772400" y="2542032"/>
-            <a:ext cx="2377440" cy="365760"/>
-          </a:xfrm>
-          <a:prstGeom prst="rect">
-            <a:avLst/>
-          </a:prstGeom>
-          <a:noFill/>
-        </p:spPr>
-        <p:txBody>
-          <a:bodyPr wrap="square" lIns="0" rIns="0" tIns="0" bIns="0">
-            <a:spAutoFit/>
-          </a:bodyPr>
-          <a:lstStyle/>
-          <a:p>
-            <a:pPr algn="l">
-              <a:lnSpc>
-                <a:spcPct val="115000"/>
-              </a:lnSpc>
-              <a:spcAft>
-                <a:spcPts val="600"/>
-              </a:spcAft>
-            </a:pPr>
-            <a:r>
-              <a:rPr sz="1400" b="1">
-                <a:solidFill>
-                  <a:srgbClr val="0F172A"/>
-                </a:solidFill>
-                <a:latin typeface="Arial"/>
-              </a:rPr>
-              <a:t>IRP Plate Renewal</a:t>
-            </a:r>
-          </a:p>
-        </p:txBody>
-      </p:sp>
-      <p:sp>
-        <p:nvSpPr>
-          <p:cNvPr id="19" name="TextBox 18"/>
-          <p:cNvSpPr txBox="1"/>
-          <p:nvPr/>
-        </p:nvSpPr>
-        <p:spPr>
-          <a:xfrm>
-            <a:off x="7772400" y="2907792"/>
-            <a:ext cx="2377440" cy="365760"/>
-          </a:xfrm>
-          <a:prstGeom prst="rect">
-            <a:avLst/>
-          </a:prstGeom>
-          <a:noFill/>
-        </p:spPr>
-        <p:txBody>
-          <a:bodyPr wrap="square" lIns="0" rIns="0" tIns="0" bIns="0">
-            <a:spAutoFit/>
-          </a:bodyPr>
-          <a:lstStyle/>
-          <a:p>
-            <a:pPr algn="l">
-              <a:lnSpc>
-                <a:spcPct val="115000"/>
-              </a:lnSpc>
-              <a:spcAft>
-                <a:spcPts val="600"/>
-              </a:spcAft>
-            </a:pPr>
-            <a:r>
-              <a:rPr sz="1300" b="0">
-                <a:solidFill>
-                  <a:srgbClr val="475569"/>
-                </a:solidFill>
-                <a:latin typeface="Arial"/>
-              </a:rPr>
-              <a:t>Sep 16</a:t>
-            </a:r>
-          </a:p>
-        </p:txBody>
-      </p:sp>
-      <p:sp>
-        <p:nvSpPr>
-          <p:cNvPr id="20" name="TextBox 19"/>
-          <p:cNvSpPr txBox="1"/>
-          <p:nvPr/>
-        </p:nvSpPr>
-        <p:spPr>
-          <a:xfrm>
-            <a:off x="7543800" y="3520440"/>
-            <a:ext cx="2834640" cy="274320"/>
-          </a:xfrm>
-          <a:prstGeom prst="rect">
-            <a:avLst/>
-          </a:prstGeom>
-          <a:noFill/>
-        </p:spPr>
-        <p:txBody>
-          <a:bodyPr wrap="square" lIns="0" rIns="0" tIns="0" bIns="0">
-            <a:spAutoFit/>
-          </a:bodyPr>
-          <a:lstStyle/>
-          <a:p>
-            <a:pPr algn="l">
-              <a:lnSpc>
-                <a:spcPct val="115000"/>
-              </a:lnSpc>
-              <a:spcAft>
-                <a:spcPts val="600"/>
-              </a:spcAft>
-            </a:pPr>
-            <a:r>
-              <a:rPr sz="1100" b="1">
-                <a:solidFill>
-                  <a:srgbClr val="B91C1C"/>
-                </a:solidFill>
-                <a:latin typeface="Arial"/>
-              </a:rPr>
-              <a:t>OUT OF SERVICE</a:t>
-            </a:r>
-          </a:p>
-        </p:txBody>
-      </p:sp>
-      <p:sp>
-        <p:nvSpPr>
-          <p:cNvPr id="21" name="Rounded Rectangle 20"/>
-          <p:cNvSpPr/>
-          <p:nvPr/>
-        </p:nvSpPr>
-        <p:spPr>
-          <a:xfrm>
-            <a:off x="777240" y="4069080"/>
-            <a:ext cx="10607040" cy="1691640"/>
-          </a:xfrm>
-          <a:prstGeom prst="roundRect">
-            <a:avLst>
-              <a:gd name="adj" fmla="val 6000"/>
-            </a:avLst>
-          </a:prstGeom>
-          <a:solidFill>
-            <a:srgbClr val="F6F7F9"/>
-          </a:solidFill>
-          <a:ln w="12700">
-            <a:solidFill>
-              <a:srgbClr val="E2E8F0"/>
-            </a:solidFill>
-          </a:ln>
-          <a:effectLst/>
-        </p:spPr>
-        <p:style>
-          <a:lnRef idx="1">
-            <a:schemeClr val="accent1"/>
-          </a:lnRef>
-          <a:fillRef idx="3">
-            <a:schemeClr val="accent1"/>
-          </a:fillRef>
-          <a:effectRef idx="2">
-            <a:schemeClr val="accent1"/>
-          </a:effectRef>
-          <a:fontRef idx="minor">
-            <a:schemeClr val="lt1"/>
-          </a:fontRef>
-        </p:style>
-        <p:txBody>
-          <a:bodyPr rtlCol="0" anchor="ctr"/>
-          <a:lstStyle/>
-          <a:p>
-            <a:pPr algn="ctr"/>
-          </a:p>
-        </p:txBody>
-      </p:sp>
-      <p:sp>
-        <p:nvSpPr>
-          <p:cNvPr id="22" name="TextBox 21"/>
-          <p:cNvSpPr txBox="1"/>
-          <p:nvPr/>
-        </p:nvSpPr>
-        <p:spPr>
-          <a:xfrm>
-            <a:off x="1097280" y="4389120"/>
-            <a:ext cx="10058400" cy="411480"/>
-          </a:xfrm>
-          <a:prstGeom prst="rect">
-            <a:avLst/>
-          </a:prstGeom>
-          <a:noFill/>
-        </p:spPr>
-        <p:txBody>
-          <a:bodyPr wrap="square" lIns="0" rIns="0" tIns="0" bIns="0">
-            <a:spAutoFit/>
-          </a:bodyPr>
-          <a:lstStyle/>
-          <a:p>
-            <a:pPr algn="l">
-              <a:lnSpc>
-                <a:spcPct val="115000"/>
-              </a:lnSpc>
-              <a:spcAft>
-                <a:spcPts val="600"/>
-              </a:spcAft>
-            </a:pPr>
-            <a:r>
-              <a:rPr sz="1800" b="1">
-                <a:solidFill>
-                  <a:srgbClr val="0F172A"/>
-                </a:solidFill>
-                <a:latin typeface="Arial"/>
-              </a:rPr>
-              <a:t>The binding constraint is the emissions check five days from now.</a:t>
-            </a:r>
-          </a:p>
-        </p:txBody>
-      </p:sp>
-      <p:sp>
-        <p:nvSpPr>
-          <p:cNvPr id="23" name="TextBox 22"/>
-          <p:cNvSpPr txBox="1"/>
-          <p:nvPr/>
-        </p:nvSpPr>
-        <p:spPr>
-          <a:xfrm>
-            <a:off x="1097280" y="4892040"/>
-            <a:ext cx="9966960" cy="868680"/>
-          </a:xfrm>
-          <a:prstGeom prst="rect">
-            <a:avLst/>
-          </a:prstGeom>
-          <a:noFill/>
-        </p:spPr>
-        <p:txBody>
-          <a:bodyPr wrap="square" lIns="0" rIns="0" tIns="0" bIns="0">
-            <a:spAutoFit/>
-          </a:bodyPr>
-          <a:lstStyle/>
-          <a:p>
-            <a:pPr algn="l">
-              <a:lnSpc>
-                <a:spcPct val="115000"/>
-              </a:lnSpc>
-              <a:spcAft>
-                <a:spcPts val="600"/>
-              </a:spcAft>
-            </a:pPr>
-            <a:r>
-              <a:rPr sz="1400" b="0">
-                <a:solidFill>
-                  <a:srgbClr val="475569"/>
-                </a:solidFill>
-                <a:latin typeface="Arial"/>
-              </a:rPr>
-              <a:t>The plate expires September 16, but miss the emissions check and the renewal behind it cannot complete, whatever the calendar says. No due-date list shows this — it appears only once you model what blocks what. That truck is also on the Silver plan, which does not cover plate renewals at all.</a:t>
+              <a:rPr sz="1700" b="1">
+                <a:solidFill>
+                  <a:srgbClr val="1E3A8A"/>
+                </a:solidFill>
+                <a:latin typeface="Arial"/>
+              </a:rPr>
+              <a:t>A rule that looks confident and is wrong is worse than one that admits it isn't sure.</a:t>
             </a:r>
           </a:p>
         </p:txBody>
@@ -10654,7 +8121,7 @@
                 </a:solidFill>
                 <a:latin typeface="Arial"/>
               </a:rPr>
-              <a:t>HOW I WORKED WITH AI</a:t>
+              <a:t>HOW I ADDRESSED IT — 2 OF 3</a:t>
             </a:r>
           </a:p>
         </p:txBody>
@@ -10696,128 +8163,21 @@
                 </a:solidFill>
                 <a:latin typeface="Arial"/>
               </a:rPr>
-              <a:t>Research first, then encode it.</a:t>
-            </a:r>
-          </a:p>
-        </p:txBody>
-      </p:sp>
-      <p:sp>
-        <p:nvSpPr>
-          <p:cNvPr id="5" name="TextBox 4"/>
-          <p:cNvSpPr txBox="1"/>
-          <p:nvPr/>
-        </p:nvSpPr>
-        <p:spPr>
-          <a:xfrm>
-            <a:off x="777240" y="1737360"/>
-            <a:ext cx="10607040" cy="4114800"/>
-          </a:xfrm>
-          <a:prstGeom prst="rect">
-            <a:avLst/>
-          </a:prstGeom>
-          <a:noFill/>
-        </p:spPr>
-        <p:txBody>
-          <a:bodyPr wrap="square" lIns="0" rIns="0" tIns="0" bIns="0">
-            <a:spAutoFit/>
-          </a:bodyPr>
-          <a:lstStyle/>
-          <a:p>
-            <a:pPr>
-              <a:lnSpc>
-                <a:spcPct val="120000"/>
-              </a:lnSpc>
-              <a:spcAft>
-                <a:spcPts val="1000"/>
-              </a:spcAft>
-            </a:pPr>
-            <a:r>
-              <a:rPr sz="1500" b="1">
-                <a:solidFill>
-                  <a:srgbClr val="0F172A"/>
-                </a:solidFill>
-                <a:latin typeface="Arial"/>
-              </a:rPr>
-              <a:t>Context before code. </a:t>
-            </a:r>
-            <a:r>
-              <a:rPr sz="1500">
-                <a:solidFill>
-                  <a:srgbClr val="475569"/>
-                </a:solidFill>
-                <a:latin typeface="Arial"/>
-              </a:rPr>
-              <a:t>I researched the company and the regulations before writing anything — what STS actually sells, how each deadline is derived, which filings gate which. That research is why the rules carry citations instead of guesses.</a:t>
-            </a:r>
-          </a:p>
-          <a:p>
-            <a:pPr>
-              <a:lnSpc>
-                <a:spcPct val="120000"/>
-              </a:lnSpc>
-              <a:spcAft>
-                <a:spcPts val="1000"/>
-              </a:spcAft>
-            </a:pPr>
-            <a:r>
-              <a:rPr sz="1500" b="1">
-                <a:solidFill>
-                  <a:srgbClr val="0F172A"/>
-                </a:solidFill>
-                <a:latin typeface="Arial"/>
-              </a:rPr>
-              <a:t>Then I turned that context into five subagents, </a:t>
-            </a:r>
-            <a:r>
-              <a:rPr sz="1500">
-                <a:solidFill>
-                  <a:srgbClr val="475569"/>
-                </a:solidFill>
-                <a:latin typeface="Arial"/>
-              </a:rPr>
-              <a:t>committed to the repo: compliance-rules, data-layer, security-boundaries, test-author, ui-ux.</a:t>
-            </a:r>
-          </a:p>
-          <a:p>
-            <a:pPr>
-              <a:lnSpc>
-                <a:spcPct val="120000"/>
-              </a:lnSpc>
-              <a:spcAft>
-                <a:spcPts val="1000"/>
-              </a:spcAft>
-            </a:pPr>
-            <a:r>
-              <a:rPr sz="1500" b="1">
-                <a:solidFill>
-                  <a:srgbClr val="0F172A"/>
-                </a:solidFill>
-                <a:latin typeface="Arial"/>
-              </a:rPr>
-              <a:t>Each encodes judgment that is not in the code — </a:t>
-            </a:r>
-            <a:r>
-              <a:rPr sz="1500">
-                <a:solidFill>
-                  <a:srgbClr val="475569"/>
-                </a:solidFill>
-                <a:latin typeface="Arial"/>
-              </a:rPr>
-              <a:t>a regulation, a trap already hit, a boundary already argued about. They route by task, so the next change starts from that knowledge instead of rediscovering it.</a:t>
-            </a:r>
-          </a:p>
-        </p:txBody>
-      </p:sp>
-      <p:sp>
-        <p:nvSpPr>
-          <p:cNvPr id="6" name="Rounded Rectangle 5"/>
+              <a:t>The date nobody's calendar contains.</a:t>
+            </a:r>
+          </a:p>
+        </p:txBody>
+      </p:sp>
+      <p:sp>
+        <p:nvSpPr>
+          <p:cNvPr id="5" name="Rounded Rectangle 4"/>
           <p:cNvSpPr/>
           <p:nvPr/>
         </p:nvSpPr>
         <p:spPr>
           <a:xfrm>
-            <a:off x="777240" y="4343400"/>
-            <a:ext cx="10607040" cy="1417320"/>
+            <a:off x="777240" y="2057400"/>
+            <a:ext cx="2834640" cy="1143000"/>
           </a:xfrm>
           <a:prstGeom prst="roundRect">
             <a:avLst>
@@ -10858,14 +8218,60 @@
       </p:sp>
       <p:sp>
         <p:nvSpPr>
+          <p:cNvPr id="6" name="Rounded Rectangle 5"/>
+          <p:cNvSpPr/>
+          <p:nvPr/>
+        </p:nvSpPr>
+        <p:spPr>
+          <a:xfrm>
+            <a:off x="777240" y="2057400"/>
+            <a:ext cx="2834640" cy="64008"/>
+          </a:xfrm>
+          <a:prstGeom prst="roundRect">
+            <a:avLst>
+              <a:gd name="adj" fmla="val 6000"/>
+            </a:avLst>
+          </a:prstGeom>
+          <a:solidFill>
+            <a:srgbClr val="B91C1C"/>
+          </a:solidFill>
+          <a:ln>
+            <a:noFill/>
+          </a:ln>
+          <a:effectLst/>
+        </p:spPr>
+        <p:style>
+          <a:lnRef idx="1">
+            <a:schemeClr val="accent1"/>
+          </a:lnRef>
+          <a:fillRef idx="3">
+            <a:schemeClr val="accent1"/>
+          </a:fillRef>
+          <a:effectRef idx="2">
+            <a:schemeClr val="accent1"/>
+          </a:effectRef>
+          <a:fontRef idx="minor">
+            <a:schemeClr val="lt1"/>
+          </a:fontRef>
+        </p:style>
+        <p:txBody>
+          <a:bodyPr rtlCol="0" anchor="ctr"/>
+          <a:lstStyle/>
+          <a:p>
+            <a:pPr algn="ctr"/>
+          </a:p>
+        </p:txBody>
+      </p:sp>
+      <p:sp>
+        <p:nvSpPr>
           <p:cNvPr id="7" name="TextBox 6"/>
           <p:cNvSpPr txBox="1"/>
           <p:nvPr/>
         </p:nvSpPr>
         <p:spPr>
           <a:xfrm>
-            <a:off x="1097280" y="4617720"/>
-            <a:ext cx="10058400" cy="365760"/>
+            <a:off x="1005840" y="2331720"/>
+            <a:ext cx="2377440" cy="365760"/>
           </a:xfrm>
           <a:prstGeom prst="rect">
             <a:avLst/>
@@ -10887,13 +8293,13 @@
               </a:spcAft>
             </a:pPr>
             <a:r>
-              <a:rPr sz="1600" b="1">
-                <a:solidFill>
-                  <a:srgbClr val="1E3A8A"/>
-                </a:solidFill>
-                <a:latin typeface="Arial"/>
-              </a:rPr>
-              <a:t>The filter mattered more than the count.</a:t>
+              <a:rPr sz="1500" b="1">
+                <a:solidFill>
+                  <a:srgbClr val="0F172A"/>
+                </a:solidFill>
+                <a:latin typeface="Arial"/>
+              </a:rPr>
+              <a:t>Emissions check</a:t>
             </a:r>
           </a:p>
         </p:txBody>
@@ -10906,8 +8312,8 @@
         </p:nvSpPr>
         <p:spPr>
           <a:xfrm>
-            <a:off x="1097280" y="5029200"/>
-            <a:ext cx="9966960" cy="731520"/>
+            <a:off x="1005840" y="2697480"/>
+            <a:ext cx="2377440" cy="365760"/>
           </a:xfrm>
           <a:prstGeom prst="rect">
             <a:avLst/>
@@ -10929,13 +8335,575 @@
               </a:spcAft>
             </a:pPr>
             <a:r>
-              <a:rPr sz="1300" b="0">
+              <a:rPr sz="1400" b="0">
                 <a:solidFill>
                   <a:srgbClr val="475569"/>
                 </a:solidFill>
                 <a:latin typeface="Arial"/>
               </a:rPr>
-              <a:t>An agent earns its place when it encodes judgment not already in the code. I rejected code-reviewer, refactorer, performance, accessibility and docs-writer — "look for bugs" is default behaviour, and five agents that route cleanly beat twelve that overlap. The rejections are documented in the repo.</a:t>
+              <a:t>Aug 17</a:t>
+            </a:r>
+          </a:p>
+        </p:txBody>
+      </p:sp>
+      <p:sp>
+        <p:nvSpPr>
+          <p:cNvPr id="9" name="TextBox 8"/>
+          <p:cNvSpPr txBox="1"/>
+          <p:nvPr/>
+        </p:nvSpPr>
+        <p:spPr>
+          <a:xfrm>
+            <a:off x="3703320" y="2468880"/>
+            <a:ext cx="457200" cy="365760"/>
+          </a:xfrm>
+          <a:prstGeom prst="rect">
+            <a:avLst/>
+          </a:prstGeom>
+          <a:noFill/>
+        </p:spPr>
+        <p:txBody>
+          <a:bodyPr wrap="square" lIns="0" rIns="0" tIns="0" bIns="0">
+            <a:spAutoFit/>
+          </a:bodyPr>
+          <a:lstStyle/>
+          <a:p>
+            <a:pPr algn="l">
+              <a:lnSpc>
+                <a:spcPct val="115000"/>
+              </a:lnSpc>
+              <a:spcAft>
+                <a:spcPts val="600"/>
+              </a:spcAft>
+            </a:pPr>
+            <a:r>
+              <a:rPr sz="2000" b="0">
+                <a:solidFill>
+                  <a:srgbClr val="94A3B8"/>
+                </a:solidFill>
+                <a:latin typeface="Arial"/>
+              </a:rPr>
+              <a:t>→</a:t>
+            </a:r>
+          </a:p>
+        </p:txBody>
+      </p:sp>
+      <p:sp>
+        <p:nvSpPr>
+          <p:cNvPr id="10" name="Rounded Rectangle 9"/>
+          <p:cNvSpPr/>
+          <p:nvPr/>
+        </p:nvSpPr>
+        <p:spPr>
+          <a:xfrm>
+            <a:off x="4160520" y="2057400"/>
+            <a:ext cx="2834640" cy="1143000"/>
+          </a:xfrm>
+          <a:prstGeom prst="roundRect">
+            <a:avLst>
+              <a:gd name="adj" fmla="val 6000"/>
+            </a:avLst>
+          </a:prstGeom>
+          <a:solidFill>
+            <a:srgbClr val="F6F7F9"/>
+          </a:solidFill>
+          <a:ln w="12700">
+            <a:solidFill>
+              <a:srgbClr val="E2E8F0"/>
+            </a:solidFill>
+          </a:ln>
+          <a:effectLst/>
+        </p:spPr>
+        <p:style>
+          <a:lnRef idx="1">
+            <a:schemeClr val="accent1"/>
+          </a:lnRef>
+          <a:fillRef idx="3">
+            <a:schemeClr val="accent1"/>
+          </a:fillRef>
+          <a:effectRef idx="2">
+            <a:schemeClr val="accent1"/>
+          </a:effectRef>
+          <a:fontRef idx="minor">
+            <a:schemeClr val="lt1"/>
+          </a:fontRef>
+        </p:style>
+        <p:txBody>
+          <a:bodyPr rtlCol="0" anchor="ctr"/>
+          <a:lstStyle/>
+          <a:p>
+            <a:pPr algn="ctr"/>
+          </a:p>
+        </p:txBody>
+      </p:sp>
+      <p:sp>
+        <p:nvSpPr>
+          <p:cNvPr id="11" name="Rounded Rectangle 10"/>
+          <p:cNvSpPr/>
+          <p:nvPr/>
+        </p:nvSpPr>
+        <p:spPr>
+          <a:xfrm>
+            <a:off x="4160520" y="2057400"/>
+            <a:ext cx="2834640" cy="64008"/>
+          </a:xfrm>
+          <a:prstGeom prst="roundRect">
+            <a:avLst>
+              <a:gd name="adj" fmla="val 6000"/>
+            </a:avLst>
+          </a:prstGeom>
+          <a:solidFill>
+            <a:srgbClr val="C2410C"/>
+          </a:solidFill>
+          <a:ln>
+            <a:noFill/>
+          </a:ln>
+          <a:effectLst/>
+        </p:spPr>
+        <p:style>
+          <a:lnRef idx="1">
+            <a:schemeClr val="accent1"/>
+          </a:lnRef>
+          <a:fillRef idx="3">
+            <a:schemeClr val="accent1"/>
+          </a:fillRef>
+          <a:effectRef idx="2">
+            <a:schemeClr val="accent1"/>
+          </a:effectRef>
+          <a:fontRef idx="minor">
+            <a:schemeClr val="lt1"/>
+          </a:fontRef>
+        </p:style>
+        <p:txBody>
+          <a:bodyPr rtlCol="0" anchor="ctr"/>
+          <a:lstStyle/>
+          <a:p>
+            <a:pPr algn="ctr"/>
+          </a:p>
+        </p:txBody>
+      </p:sp>
+      <p:sp>
+        <p:nvSpPr>
+          <p:cNvPr id="12" name="TextBox 11"/>
+          <p:cNvSpPr txBox="1"/>
+          <p:nvPr/>
+        </p:nvSpPr>
+        <p:spPr>
+          <a:xfrm>
+            <a:off x="4389120" y="2331720"/>
+            <a:ext cx="2377440" cy="365760"/>
+          </a:xfrm>
+          <a:prstGeom prst="rect">
+            <a:avLst/>
+          </a:prstGeom>
+          <a:noFill/>
+        </p:spPr>
+        <p:txBody>
+          <a:bodyPr wrap="square" lIns="0" rIns="0" tIns="0" bIns="0">
+            <a:spAutoFit/>
+          </a:bodyPr>
+          <a:lstStyle/>
+          <a:p>
+            <a:pPr algn="l">
+              <a:lnSpc>
+                <a:spcPct val="115000"/>
+              </a:lnSpc>
+              <a:spcAft>
+                <a:spcPts val="600"/>
+              </a:spcAft>
+            </a:pPr>
+            <a:r>
+              <a:rPr sz="1500" b="1">
+                <a:solidFill>
+                  <a:srgbClr val="0F172A"/>
+                </a:solidFill>
+                <a:latin typeface="Arial"/>
+              </a:rPr>
+              <a:t>Heavy vehicle tax</a:t>
+            </a:r>
+          </a:p>
+        </p:txBody>
+      </p:sp>
+      <p:sp>
+        <p:nvSpPr>
+          <p:cNvPr id="13" name="TextBox 12"/>
+          <p:cNvSpPr txBox="1"/>
+          <p:nvPr/>
+        </p:nvSpPr>
+        <p:spPr>
+          <a:xfrm>
+            <a:off x="4389120" y="2697480"/>
+            <a:ext cx="2377440" cy="365760"/>
+          </a:xfrm>
+          <a:prstGeom prst="rect">
+            <a:avLst/>
+          </a:prstGeom>
+          <a:noFill/>
+        </p:spPr>
+        <p:txBody>
+          <a:bodyPr wrap="square" lIns="0" rIns="0" tIns="0" bIns="0">
+            <a:spAutoFit/>
+          </a:bodyPr>
+          <a:lstStyle/>
+          <a:p>
+            <a:pPr algn="l">
+              <a:lnSpc>
+                <a:spcPct val="115000"/>
+              </a:lnSpc>
+              <a:spcAft>
+                <a:spcPts val="600"/>
+              </a:spcAft>
+            </a:pPr>
+            <a:r>
+              <a:rPr sz="1400" b="0">
+                <a:solidFill>
+                  <a:srgbClr val="475569"/>
+                </a:solidFill>
+                <a:latin typeface="Arial"/>
+              </a:rPr>
+              <a:t>Aug 31</a:t>
+            </a:r>
+          </a:p>
+        </p:txBody>
+      </p:sp>
+      <p:sp>
+        <p:nvSpPr>
+          <p:cNvPr id="14" name="TextBox 13"/>
+          <p:cNvSpPr txBox="1"/>
+          <p:nvPr/>
+        </p:nvSpPr>
+        <p:spPr>
+          <a:xfrm>
+            <a:off x="7086600" y="2468880"/>
+            <a:ext cx="457200" cy="365760"/>
+          </a:xfrm>
+          <a:prstGeom prst="rect">
+            <a:avLst/>
+          </a:prstGeom>
+          <a:noFill/>
+        </p:spPr>
+        <p:txBody>
+          <a:bodyPr wrap="square" lIns="0" rIns="0" tIns="0" bIns="0">
+            <a:spAutoFit/>
+          </a:bodyPr>
+          <a:lstStyle/>
+          <a:p>
+            <a:pPr algn="l">
+              <a:lnSpc>
+                <a:spcPct val="115000"/>
+              </a:lnSpc>
+              <a:spcAft>
+                <a:spcPts val="600"/>
+              </a:spcAft>
+            </a:pPr>
+            <a:r>
+              <a:rPr sz="2000" b="0">
+                <a:solidFill>
+                  <a:srgbClr val="94A3B8"/>
+                </a:solidFill>
+                <a:latin typeface="Arial"/>
+              </a:rPr>
+              <a:t>→</a:t>
+            </a:r>
+          </a:p>
+        </p:txBody>
+      </p:sp>
+      <p:sp>
+        <p:nvSpPr>
+          <p:cNvPr id="15" name="Rounded Rectangle 14"/>
+          <p:cNvSpPr/>
+          <p:nvPr/>
+        </p:nvSpPr>
+        <p:spPr>
+          <a:xfrm>
+            <a:off x="7543800" y="2057400"/>
+            <a:ext cx="2834640" cy="1143000"/>
+          </a:xfrm>
+          <a:prstGeom prst="roundRect">
+            <a:avLst>
+              <a:gd name="adj" fmla="val 6000"/>
+            </a:avLst>
+          </a:prstGeom>
+          <a:solidFill>
+            <a:srgbClr val="F6F7F9"/>
+          </a:solidFill>
+          <a:ln w="12700">
+            <a:solidFill>
+              <a:srgbClr val="E2E8F0"/>
+            </a:solidFill>
+          </a:ln>
+          <a:effectLst/>
+        </p:spPr>
+        <p:style>
+          <a:lnRef idx="1">
+            <a:schemeClr val="accent1"/>
+          </a:lnRef>
+          <a:fillRef idx="3">
+            <a:schemeClr val="accent1"/>
+          </a:fillRef>
+          <a:effectRef idx="2">
+            <a:schemeClr val="accent1"/>
+          </a:effectRef>
+          <a:fontRef idx="minor">
+            <a:schemeClr val="lt1"/>
+          </a:fontRef>
+        </p:style>
+        <p:txBody>
+          <a:bodyPr rtlCol="0" anchor="ctr"/>
+          <a:lstStyle/>
+          <a:p>
+            <a:pPr algn="ctr"/>
+          </a:p>
+        </p:txBody>
+      </p:sp>
+      <p:sp>
+        <p:nvSpPr>
+          <p:cNvPr id="16" name="Rounded Rectangle 15"/>
+          <p:cNvSpPr/>
+          <p:nvPr/>
+        </p:nvSpPr>
+        <p:spPr>
+          <a:xfrm>
+            <a:off x="7543800" y="2057400"/>
+            <a:ext cx="2834640" cy="64008"/>
+          </a:xfrm>
+          <a:prstGeom prst="roundRect">
+            <a:avLst>
+              <a:gd name="adj" fmla="val 6000"/>
+            </a:avLst>
+          </a:prstGeom>
+          <a:solidFill>
+            <a:srgbClr val="0F172A"/>
+          </a:solidFill>
+          <a:ln>
+            <a:noFill/>
+          </a:ln>
+          <a:effectLst/>
+        </p:spPr>
+        <p:style>
+          <a:lnRef idx="1">
+            <a:schemeClr val="accent1"/>
+          </a:lnRef>
+          <a:fillRef idx="3">
+            <a:schemeClr val="accent1"/>
+          </a:fillRef>
+          <a:effectRef idx="2">
+            <a:schemeClr val="accent1"/>
+          </a:effectRef>
+          <a:fontRef idx="minor">
+            <a:schemeClr val="lt1"/>
+          </a:fontRef>
+        </p:style>
+        <p:txBody>
+          <a:bodyPr rtlCol="0" anchor="ctr"/>
+          <a:lstStyle/>
+          <a:p>
+            <a:pPr algn="ctr"/>
+          </a:p>
+        </p:txBody>
+      </p:sp>
+      <p:sp>
+        <p:nvSpPr>
+          <p:cNvPr id="17" name="TextBox 16"/>
+          <p:cNvSpPr txBox="1"/>
+          <p:nvPr/>
+        </p:nvSpPr>
+        <p:spPr>
+          <a:xfrm>
+            <a:off x="7772400" y="2331720"/>
+            <a:ext cx="2377440" cy="365760"/>
+          </a:xfrm>
+          <a:prstGeom prst="rect">
+            <a:avLst/>
+          </a:prstGeom>
+          <a:noFill/>
+        </p:spPr>
+        <p:txBody>
+          <a:bodyPr wrap="square" lIns="0" rIns="0" tIns="0" bIns="0">
+            <a:spAutoFit/>
+          </a:bodyPr>
+          <a:lstStyle/>
+          <a:p>
+            <a:pPr algn="l">
+              <a:lnSpc>
+                <a:spcPct val="115000"/>
+              </a:lnSpc>
+              <a:spcAft>
+                <a:spcPts val="600"/>
+              </a:spcAft>
+            </a:pPr>
+            <a:r>
+              <a:rPr sz="1500" b="1">
+                <a:solidFill>
+                  <a:srgbClr val="0F172A"/>
+                </a:solidFill>
+                <a:latin typeface="Arial"/>
+              </a:rPr>
+              <a:t>Plate renewal</a:t>
+            </a:r>
+          </a:p>
+        </p:txBody>
+      </p:sp>
+      <p:sp>
+        <p:nvSpPr>
+          <p:cNvPr id="18" name="TextBox 17"/>
+          <p:cNvSpPr txBox="1"/>
+          <p:nvPr/>
+        </p:nvSpPr>
+        <p:spPr>
+          <a:xfrm>
+            <a:off x="7772400" y="2697480"/>
+            <a:ext cx="2377440" cy="365760"/>
+          </a:xfrm>
+          <a:prstGeom prst="rect">
+            <a:avLst/>
+          </a:prstGeom>
+          <a:noFill/>
+        </p:spPr>
+        <p:txBody>
+          <a:bodyPr wrap="square" lIns="0" rIns="0" tIns="0" bIns="0">
+            <a:spAutoFit/>
+          </a:bodyPr>
+          <a:lstStyle/>
+          <a:p>
+            <a:pPr algn="l">
+              <a:lnSpc>
+                <a:spcPct val="115000"/>
+              </a:lnSpc>
+              <a:spcAft>
+                <a:spcPts val="600"/>
+              </a:spcAft>
+            </a:pPr>
+            <a:r>
+              <a:rPr sz="1400" b="0">
+                <a:solidFill>
+                  <a:srgbClr val="475569"/>
+                </a:solidFill>
+                <a:latin typeface="Arial"/>
+              </a:rPr>
+              <a:t>Sep 16</a:t>
+            </a:r>
+          </a:p>
+        </p:txBody>
+      </p:sp>
+      <p:sp>
+        <p:nvSpPr>
+          <p:cNvPr id="19" name="TextBox 18"/>
+          <p:cNvSpPr txBox="1"/>
+          <p:nvPr/>
+        </p:nvSpPr>
+        <p:spPr>
+          <a:xfrm>
+            <a:off x="7543800" y="3310128"/>
+            <a:ext cx="3200400" cy="274320"/>
+          </a:xfrm>
+          <a:prstGeom prst="rect">
+            <a:avLst/>
+          </a:prstGeom>
+          <a:noFill/>
+        </p:spPr>
+        <p:txBody>
+          <a:bodyPr wrap="square" lIns="0" rIns="0" tIns="0" bIns="0">
+            <a:spAutoFit/>
+          </a:bodyPr>
+          <a:lstStyle/>
+          <a:p>
+            <a:pPr algn="l">
+              <a:lnSpc>
+                <a:spcPct val="115000"/>
+              </a:lnSpc>
+              <a:spcAft>
+                <a:spcPts val="600"/>
+              </a:spcAft>
+            </a:pPr>
+            <a:r>
+              <a:rPr sz="1100" b="1">
+                <a:solidFill>
+                  <a:srgbClr val="B91C1C"/>
+                </a:solidFill>
+                <a:latin typeface="Arial"/>
+              </a:rPr>
+              <a:t>TRUCK STOPS BEING LEGAL</a:t>
+            </a:r>
+          </a:p>
+        </p:txBody>
+      </p:sp>
+      <p:sp>
+        <p:nvSpPr>
+          <p:cNvPr id="20" name="TextBox 19"/>
+          <p:cNvSpPr txBox="1"/>
+          <p:nvPr/>
+        </p:nvSpPr>
+        <p:spPr>
+          <a:xfrm>
+            <a:off x="777240" y="3977639"/>
+            <a:ext cx="10607040" cy="4114800"/>
+          </a:xfrm>
+          <a:prstGeom prst="rect">
+            <a:avLst/>
+          </a:prstGeom>
+          <a:noFill/>
+        </p:spPr>
+        <p:txBody>
+          <a:bodyPr wrap="square" lIns="0" rIns="0" tIns="0" bIns="0">
+            <a:spAutoFit/>
+          </a:bodyPr>
+          <a:lstStyle/>
+          <a:p>
+            <a:pPr>
+              <a:lnSpc>
+                <a:spcPct val="120000"/>
+              </a:lnSpc>
+              <a:spcAft>
+                <a:spcPts val="1400"/>
+              </a:spcAft>
+            </a:pPr>
+            <a:r>
+              <a:rPr sz="1800">
+                <a:solidFill>
+                  <a:srgbClr val="475569"/>
+                </a:solidFill>
+                <a:latin typeface="Arial"/>
+              </a:rPr>
+              <a:t>The plate looks like a September problem.</a:t>
+            </a:r>
+          </a:p>
+          <a:p>
+            <a:pPr>
+              <a:lnSpc>
+                <a:spcPct val="120000"/>
+              </a:lnSpc>
+              <a:spcAft>
+                <a:spcPts val="1400"/>
+              </a:spcAft>
+            </a:pPr>
+            <a:r>
+              <a:rPr sz="1800">
+                <a:solidFill>
+                  <a:srgbClr val="475569"/>
+                </a:solidFill>
+                <a:latin typeface="Arial"/>
+              </a:rPr>
+              <a:t>It's an August one — miss the emissions check and the renewal can't complete.</a:t>
+            </a:r>
+          </a:p>
+          <a:p>
+            <a:pPr>
+              <a:lnSpc>
+                <a:spcPct val="120000"/>
+              </a:lnSpc>
+              <a:spcAft>
+                <a:spcPts val="1400"/>
+              </a:spcAft>
+            </a:pPr>
+            <a:r>
+              <a:rPr sz="1800">
+                <a:solidFill>
+                  <a:srgbClr val="475569"/>
+                </a:solidFill>
+                <a:latin typeface="Arial"/>
+              </a:rPr>
+              <a:t>That truck is on the plan that doesn't cover plate renewals.</a:t>
             </a:r>
           </a:p>
         </p:txBody>
@@ -11049,7 +9017,7 @@
                 </a:solidFill>
                 <a:latin typeface="Arial"/>
               </a:rPr>
-              <a:t>FEATURE — AUTOMATE</a:t>
+              <a:t>HOW I ADDRESSED IT — 3 OF 3</a:t>
             </a:r>
           </a:p>
         </p:txBody>
@@ -11091,7 +9059,7 @@
                 </a:solidFill>
                 <a:latin typeface="Arial"/>
               </a:rPr>
-              <a:t>Automating the work that has no trigger.</a:t>
+              <a:t>Getting documents off a driver's phone.</a:t>
             </a:r>
           </a:p>
         </p:txBody>
@@ -11104,7 +9072,7 @@
         </p:nvSpPr>
         <p:spPr>
           <a:xfrm>
-            <a:off x="777240" y="1737360"/>
+            <a:off x="777240" y="1920240"/>
             <a:ext cx="10607040" cy="4114800"/>
           </a:xfrm>
           <a:prstGeom prst="rect">
@@ -11123,26 +9091,17 @@
                 <a:spcPct val="120000"/>
               </a:lnSpc>
               <a:spcAft>
-                <a:spcPts val="1000"/>
-              </a:spcAft>
-            </a:pPr>
-            <a:r>
-              <a:rPr sz="1500" b="1">
-                <a:solidFill>
-                  <a:srgbClr val="0F172A"/>
-                </a:solidFill>
-                <a:latin typeface="Arial"/>
-              </a:rPr>
-              <a:t>7 rules, each cited. </a:t>
-            </a:r>
-            <a:r>
-              <a:rPr sz="1500">
+                <a:spcPts val="1600"/>
+              </a:spcAft>
+            </a:pPr>
+            <a:r>
+              <a:rPr sz="1800">
                 <a:solidFill>
                   <a:srgbClr val="475569"/>
                 </a:solidFill>
                 <a:latin typeface="Arial"/>
               </a:rPr>
-              <a:t>Biennial federal update, quarterly fuel tax, heavy vehicle tax, CA emissions, plate renewal, annual federal registration, medical certificates.</a:t>
+              <a:t>We ask 60 days before expiry, then chase on a fixed ladder. Texts first — he's driving.</a:t>
             </a:r>
           </a:p>
           <a:p>
@@ -11151,26 +9110,17 @@
                 <a:spcPct val="120000"/>
               </a:lnSpc>
               <a:spcAft>
-                <a:spcPts val="1000"/>
-              </a:spcAft>
-            </a:pPr>
-            <a:r>
-              <a:rPr sz="1500" b="1">
-                <a:solidFill>
-                  <a:srgbClr val="0F172A"/>
-                </a:solidFill>
-                <a:latin typeface="Arial"/>
-              </a:rPr>
-              <a:t>Two of them are marked "needs review" on purpose. </a:t>
-            </a:r>
-            <a:r>
-              <a:rPr sz="1500">
+                <a:spcPts val="1600"/>
+              </a:spcAft>
+            </a:pPr>
+            <a:r>
+              <a:rPr sz="1800">
                 <a:solidFill>
                   <a:srgbClr val="475569"/>
                 </a:solidFill>
                 <a:latin typeface="Arial"/>
               </a:rPr>
-              <a:t>The CARB testing cadence and plate staggering are genuinely uncertain, and the app says so rather than looking confident.</a:t>
+              <a:t>He photographs it at a truck stop. No app, no login.</a:t>
             </a:r>
           </a:p>
           <a:p>
@@ -11179,26 +9129,17 @@
                 <a:spcPct val="120000"/>
               </a:lnSpc>
               <a:spcAft>
-                <a:spcPts val="1000"/>
-              </a:spcAft>
-            </a:pPr>
-            <a:r>
-              <a:rPr sz="1500" b="1">
-                <a:solidFill>
-                  <a:srgbClr val="0F172A"/>
-                </a:solidFill>
-                <a:latin typeface="Arial"/>
-              </a:rPr>
-              <a:t>Backward scheduling. </a:t>
-            </a:r>
-            <a:r>
-              <a:rPr sz="1500">
+                <a:spcPts val="1600"/>
+              </a:spcAft>
+            </a:pPr>
+            <a:r>
+              <a:rPr sz="1800">
                 <a:solidFill>
                   <a:srgbClr val="475569"/>
                 </a:solidFill>
                 <a:latin typeface="Arial"/>
               </a:rPr>
-              <a:t>A due date is not a start date. Each step is bound by its own deadline and by the start of whatever depends on it — the demo truck already reads "behind schedule".</a:t>
+              <a:t>The image is shrunk in the browser, because signal out there is bad.</a:t>
             </a:r>
           </a:p>
           <a:p>
@@ -11207,26 +9148,107 @@
                 <a:spcPct val="120000"/>
               </a:lnSpc>
               <a:spcAft>
-                <a:spcPts val="1000"/>
-              </a:spcAft>
-            </a:pPr>
-            <a:r>
-              <a:rPr sz="1500" b="1">
-                <a:solidFill>
-                  <a:srgbClr val="0F172A"/>
-                </a:solidFill>
-                <a:latin typeface="Arial"/>
-              </a:rPr>
-              <a:t>Document collection runs itself. </a:t>
-            </a:r>
-            <a:r>
-              <a:rPr sz="1500">
+                <a:spcPts val="1600"/>
+              </a:spcAft>
+            </a:pPr>
+            <a:r>
+              <a:rPr sz="1800">
                 <a:solidFill>
                   <a:srgbClr val="475569"/>
                 </a:solidFill>
                 <a:latin typeface="Arial"/>
               </a:rPr>
-              <a:t>Requests go out 60 days before expiry, then climb a fixed ladder — text, second text, staff call, escalate. Staff time is spent only after the cheap channels fail.</a:t>
+              <a:t>A model reads it. Then a person confirms it before anything is filed.</a:t>
+            </a:r>
+          </a:p>
+        </p:txBody>
+      </p:sp>
+      <p:sp>
+        <p:nvSpPr>
+          <p:cNvPr id="6" name="Rounded Rectangle 5"/>
+          <p:cNvSpPr/>
+          <p:nvPr/>
+        </p:nvSpPr>
+        <p:spPr>
+          <a:xfrm>
+            <a:off x="777240" y="4526280"/>
+            <a:ext cx="10607040" cy="1188720"/>
+          </a:xfrm>
+          <a:prstGeom prst="roundRect">
+            <a:avLst>
+              <a:gd name="adj" fmla="val 6000"/>
+            </a:avLst>
+          </a:prstGeom>
+          <a:solidFill>
+            <a:srgbClr val="F6F7F9"/>
+          </a:solidFill>
+          <a:ln w="12700">
+            <a:solidFill>
+              <a:srgbClr val="E2E8F0"/>
+            </a:solidFill>
+          </a:ln>
+          <a:effectLst/>
+        </p:spPr>
+        <p:style>
+          <a:lnRef idx="1">
+            <a:schemeClr val="accent1"/>
+          </a:lnRef>
+          <a:fillRef idx="3">
+            <a:schemeClr val="accent1"/>
+          </a:fillRef>
+          <a:effectRef idx="2">
+            <a:schemeClr val="accent1"/>
+          </a:effectRef>
+          <a:fontRef idx="minor">
+            <a:schemeClr val="lt1"/>
+          </a:fontRef>
+        </p:style>
+        <p:txBody>
+          <a:bodyPr rtlCol="0" anchor="ctr"/>
+          <a:lstStyle/>
+          <a:p>
+            <a:pPr algn="ctr"/>
+          </a:p>
+        </p:txBody>
+      </p:sp>
+      <p:sp>
+        <p:nvSpPr>
+          <p:cNvPr id="7" name="TextBox 6"/>
+          <p:cNvSpPr txBox="1"/>
+          <p:nvPr/>
+        </p:nvSpPr>
+        <p:spPr>
+          <a:xfrm>
+            <a:off x="1097280" y="4937760"/>
+            <a:ext cx="10058400" cy="457200"/>
+          </a:xfrm>
+          <a:prstGeom prst="rect">
+            <a:avLst/>
+          </a:prstGeom>
+          <a:noFill/>
+        </p:spPr>
+        <p:txBody>
+          <a:bodyPr wrap="square" lIns="0" rIns="0" tIns="0" bIns="0">
+            <a:spAutoFit/>
+          </a:bodyPr>
+          <a:lstStyle/>
+          <a:p>
+            <a:pPr algn="l">
+              <a:lnSpc>
+                <a:spcPct val="115000"/>
+              </a:lnSpc>
+              <a:spcAft>
+                <a:spcPts val="600"/>
+              </a:spcAft>
+            </a:pPr>
+            <a:r>
+              <a:rPr sz="1700" b="1">
+                <a:solidFill>
+                  <a:srgbClr val="1E3A8A"/>
+                </a:solidFill>
+                <a:latin typeface="Arial"/>
+              </a:rPr>
+              <a:t>Extraction proposes. A person commits. A misread expiry date is the exact failure this thing exists to prevent.</a:t>
             </a:r>
           </a:p>
         </p:txBody>
@@ -11340,7 +9362,7 @@
                 </a:solidFill>
                 <a:latin typeface="Arial"/>
               </a:rPr>
-              <a:t>FEATURE — DOCUMENT INTAKE</a:t>
+              <a:t>HOW I WORKED WITH AI</a:t>
             </a:r>
           </a:p>
         </p:txBody>
@@ -11382,7 +9404,7 @@
                 </a:solidFill>
                 <a:latin typeface="Arial"/>
               </a:rPr>
-              <a:t>They photograph it. A person confirms it.</a:t>
+              <a:t>Research first, then encode it.</a:t>
             </a:r>
           </a:p>
         </p:txBody>
@@ -11395,7 +9417,7 @@
         </p:nvSpPr>
         <p:spPr>
           <a:xfrm>
-            <a:off x="777240" y="1737360"/>
+            <a:off x="777240" y="1920240"/>
             <a:ext cx="10607040" cy="4114800"/>
           </a:xfrm>
           <a:prstGeom prst="rect">
@@ -11414,26 +9436,17 @@
                 <a:spcPct val="120000"/>
               </a:lnSpc>
               <a:spcAft>
-                <a:spcPts val="1000"/>
-              </a:spcAft>
-            </a:pPr>
-            <a:r>
-              <a:rPr sz="1500" b="1">
-                <a:solidFill>
-                  <a:srgbClr val="0F172A"/>
-                </a:solidFill>
-                <a:latin typeface="Arial"/>
-              </a:rPr>
-              <a:t>Capture where the client is. </a:t>
-            </a:r>
-            <a:r>
-              <a:rPr sz="1500">
+                <a:spcPts val="1600"/>
+              </a:spcAft>
+            </a:pPr>
+            <a:r>
+              <a:rPr sz="1800">
                 <a:solidFill>
                   <a:srgbClr val="475569"/>
                 </a:solidFill>
                 <a:latin typeface="Arial"/>
               </a:rPr>
-              <a:t>A live camera opens on phone or laptop; images are downscaled in the browser — a 12 MB shot becomes ~200 KB, which on truck-stop signal decides whether the upload finishes.</a:t>
+              <a:t>I learned the domain before writing anything. That's why the rules carry citations.</a:t>
             </a:r>
           </a:p>
           <a:p>
@@ -11442,26 +9455,17 @@
                 <a:spcPct val="120000"/>
               </a:lnSpc>
               <a:spcAft>
-                <a:spcPts val="1000"/>
-              </a:spcAft>
-            </a:pPr>
-            <a:r>
-              <a:rPr sz="1500" b="1">
-                <a:solidFill>
-                  <a:srgbClr val="0F172A"/>
-                </a:solidFill>
-                <a:latin typeface="Arial"/>
-              </a:rPr>
-              <a:t>Two reading paths, one pipeline. </a:t>
-            </a:r>
-            <a:r>
-              <a:rPr sz="1500">
+                <a:spcPts val="1600"/>
+              </a:spcAft>
+            </a:pPr>
+            <a:r>
+              <a:rPr sz="1800">
                 <a:solidFill>
                   <a:srgbClr val="475569"/>
                 </a:solidFill>
                 <a:latin typeface="Arial"/>
               </a:rPr>
-              <a:t>A generated PDF goes to a deterministic text parser; a photograph goes to a vision model. Both return the same shape, so review doesn't care which ran.</a:t>
+              <a:t>Then I turned that context into five subagents, committed to the repo.</a:t>
             </a:r>
           </a:p>
           <a:p>
@@ -11470,26 +9474,17 @@
                 <a:spcPct val="120000"/>
               </a:lnSpc>
               <a:spcAft>
-                <a:spcPts val="1000"/>
-              </a:spcAft>
-            </a:pPr>
-            <a:r>
-              <a:rPr sz="1500" b="1">
-                <a:solidFill>
-                  <a:srgbClr val="0F172A"/>
-                </a:solidFill>
-                <a:latin typeface="Arial"/>
-              </a:rPr>
-              <a:t>It refuses to guess. </a:t>
-            </a:r>
-            <a:r>
-              <a:rPr sz="1500">
+                <a:spcPts val="1600"/>
+              </a:spcAft>
+            </a:pPr>
+            <a:r>
+              <a:rPr sz="1800">
                 <a:solidFill>
                   <a:srgbClr val="475569"/>
                 </a:solidFill>
                 <a:latin typeface="Arial"/>
               </a:rPr>
-              <a:t>An ambiguous date — 03/04/2027 could be 3 April or 4 March — returns nothing rather than a coin flip. Half the guesses would silently move a compliance deadline.</a:t>
+              <a:t>Compliance, data layer, security, testing, design — each holds judgment the code doesn't.</a:t>
             </a:r>
           </a:p>
           <a:p>
@@ -11498,26 +9493,107 @@
                 <a:spcPct val="120000"/>
               </a:lnSpc>
               <a:spcAft>
-                <a:spcPts val="1000"/>
-              </a:spcAft>
-            </a:pPr>
-            <a:r>
-              <a:rPr sz="1500" b="1">
-                <a:solidFill>
-                  <a:srgbClr val="0F172A"/>
-                </a:solidFill>
-                <a:latin typeface="Arial"/>
-              </a:rPr>
-              <a:t>Extraction proposes; a person commits. </a:t>
-            </a:r>
-            <a:r>
-              <a:rPr sz="1500">
+                <a:spcPts val="1600"/>
+              </a:spcAft>
+            </a:pPr>
+            <a:r>
+              <a:rPr sz="1800">
                 <a:solidFill>
                   <a:srgbClr val="475569"/>
                 </a:solidFill>
                 <a:latin typeface="Arial"/>
               </a:rPr>
-              <a:t>The staff screen sets what was read against what the record says and flags differences. Nothing writes back automatically.</a:t>
+              <a:t>I rejected five more. "Look for bugs" isn't knowledge, it's default behaviour.</a:t>
+            </a:r>
+          </a:p>
+        </p:txBody>
+      </p:sp>
+      <p:sp>
+        <p:nvSpPr>
+          <p:cNvPr id="6" name="Rounded Rectangle 5"/>
+          <p:cNvSpPr/>
+          <p:nvPr/>
+        </p:nvSpPr>
+        <p:spPr>
+          <a:xfrm>
+            <a:off x="777240" y="4526280"/>
+            <a:ext cx="10607040" cy="1188720"/>
+          </a:xfrm>
+          <a:prstGeom prst="roundRect">
+            <a:avLst>
+              <a:gd name="adj" fmla="val 6000"/>
+            </a:avLst>
+          </a:prstGeom>
+          <a:solidFill>
+            <a:srgbClr val="F6F7F9"/>
+          </a:solidFill>
+          <a:ln w="12700">
+            <a:solidFill>
+              <a:srgbClr val="E2E8F0"/>
+            </a:solidFill>
+          </a:ln>
+          <a:effectLst/>
+        </p:spPr>
+        <p:style>
+          <a:lnRef idx="1">
+            <a:schemeClr val="accent1"/>
+          </a:lnRef>
+          <a:fillRef idx="3">
+            <a:schemeClr val="accent1"/>
+          </a:fillRef>
+          <a:effectRef idx="2">
+            <a:schemeClr val="accent1"/>
+          </a:effectRef>
+          <a:fontRef idx="minor">
+            <a:schemeClr val="lt1"/>
+          </a:fontRef>
+        </p:style>
+        <p:txBody>
+          <a:bodyPr rtlCol="0" anchor="ctr"/>
+          <a:lstStyle/>
+          <a:p>
+            <a:pPr algn="ctr"/>
+          </a:p>
+        </p:txBody>
+      </p:sp>
+      <p:sp>
+        <p:nvSpPr>
+          <p:cNvPr id="7" name="TextBox 6"/>
+          <p:cNvSpPr txBox="1"/>
+          <p:nvPr/>
+        </p:nvSpPr>
+        <p:spPr>
+          <a:xfrm>
+            <a:off x="1097280" y="4937760"/>
+            <a:ext cx="10058400" cy="457200"/>
+          </a:xfrm>
+          <a:prstGeom prst="rect">
+            <a:avLst/>
+          </a:prstGeom>
+          <a:noFill/>
+        </p:spPr>
+        <p:txBody>
+          <a:bodyPr wrap="square" lIns="0" rIns="0" tIns="0" bIns="0">
+            <a:spAutoFit/>
+          </a:bodyPr>
+          <a:lstStyle/>
+          <a:p>
+            <a:pPr algn="l">
+              <a:lnSpc>
+                <a:spcPct val="115000"/>
+              </a:lnSpc>
+              <a:spcAft>
+                <a:spcPts val="600"/>
+              </a:spcAft>
+            </a:pPr>
+            <a:r>
+              <a:rPr sz="1800" b="1">
+                <a:solidFill>
+                  <a:srgbClr val="1E3A8A"/>
+                </a:solidFill>
+                <a:latin typeface="Arial"/>
+              </a:rPr>
+              <a:t>Deciding what not to build was the harder half.</a:t>
             </a:r>
           </a:p>
         </p:txBody>
